--- a/Overview_Operasional_dan_Proses_Produksi_Pabrik_Gula.pptx
+++ b/Overview_Operasional_dan_Proses_Produksi_Pabrik_Gula.pptx
@@ -3139,7 +3139,7 @@
           <a:lstStyle/>
           <a:p>
             <a:pPr algn="l">
-              <a:defRPr sz="1100" b="0">
+              <a:defRPr sz="1400" b="0">
                 <a:solidFill>
                   <a:srgbClr val="F9A825"/>
                 </a:solidFill>
@@ -3147,6 +3147,7 @@
               </a:defRPr>
             </a:pPr>
             <a:r>
+              <a:rPr/>
               <a:t>PRESENTASI INTERNAL  •  2026</a:t>
             </a:r>
           </a:p>
@@ -3175,7 +3176,7 @@
           <a:lstStyle/>
           <a:p>
             <a:pPr algn="l">
-              <a:defRPr sz="3200" b="1">
+              <a:defRPr sz="3600" b="1">
                 <a:solidFill>
                   <a:srgbClr val="FFFFFF"/>
                 </a:solidFill>
@@ -3183,10 +3184,12 @@
               </a:defRPr>
             </a:pPr>
             <a:r>
+              <a:rPr/>
               <a:t>Overview Operasional &amp;</a:t>
             </a:r>
             <a:br/>
             <a:r>
+              <a:rPr/>
               <a:t>Proses Produksi Pabrik Gula</a:t>
             </a:r>
           </a:p>
@@ -3215,7 +3218,7 @@
           <a:lstStyle/>
           <a:p>
             <a:pPr algn="l">
-              <a:defRPr sz="1400" b="0">
+              <a:defRPr sz="1600" b="0">
                 <a:solidFill>
                   <a:srgbClr val="A5D6A7"/>
                 </a:solidFill>
@@ -3223,6 +3226,7 @@
               </a:defRPr>
             </a:pPr>
             <a:r>
+              <a:rPr/>
               <a:t>Dari Penerimaan Tebu hingga Produk Akhir — Alur, GMP, QC &amp; Sustainability</a:t>
             </a:r>
           </a:p>
@@ -3267,7 +3271,9 @@
           <a:bodyPr rtlCol="0" anchor="ctr"/>
           <a:lstStyle/>
           <a:p>
-            <a:pPr algn="ctr"/>
+            <a:pPr algn="ctr">
+              <a:defRPr/>
+            </a:pPr>
           </a:p>
         </p:txBody>
       </p:sp>
@@ -3294,7 +3300,7 @@
           <a:lstStyle/>
           <a:p>
             <a:pPr algn="l">
-              <a:defRPr sz="1000" b="0">
+              <a:defRPr sz="1300" b="0">
                 <a:solidFill>
                   <a:srgbClr val="C8E6C9"/>
                 </a:solidFill>
@@ -3302,10 +3308,12 @@
               </a:defRPr>
             </a:pPr>
             <a:r>
+              <a:rPr/>
               <a:t>Disusun untuk pemahaman operasional pabrik gula</a:t>
             </a:r>
             <a:br/>
             <a:r>
+              <a:rPr/>
               <a:t>Berbasis referensi: Hugot (1960), GMP Manual, Laporan KP &amp; Jurnal Industri</a:t>
             </a:r>
           </a:p>
@@ -3360,7 +3368,7 @@
           <a:lstStyle/>
           <a:p>
             <a:pPr algn="l">
-              <a:defRPr sz="2800" b="1">
+              <a:defRPr sz="3000" b="1">
                 <a:solidFill>
                   <a:srgbClr val="1B5E20"/>
                 </a:solidFill>
@@ -3368,6 +3376,7 @@
               </a:defRPr>
             </a:pPr>
             <a:r>
+              <a:rPr/>
               <a:t>Centrifugation &amp; Sugar Drying</a:t>
             </a:r>
           </a:p>
@@ -3396,7 +3405,7 @@
           <a:lstStyle/>
           <a:p>
             <a:pPr algn="l">
-              <a:defRPr sz="1300" b="0">
+              <a:defRPr sz="1500" b="0">
                 <a:solidFill>
                   <a:srgbClr val="2E7D32"/>
                 </a:solidFill>
@@ -3404,6 +3413,7 @@
               </a:defRPr>
             </a:pPr>
             <a:r>
+              <a:rPr/>
               <a:t>Stasiun Putar &amp; Pengeringan — Pemisahan dan finishing kristal</a:t>
             </a:r>
           </a:p>
@@ -3432,7 +3442,7 @@
           <a:lstStyle/>
           <a:p>
             <a:pPr algn="l">
-              <a:defRPr sz="800" b="0">
+              <a:defRPr sz="1100" b="0">
                 <a:solidFill>
                   <a:srgbClr val="9E9E9E"/>
                 </a:solidFill>
@@ -3440,6 +3450,7 @@
               </a:defRPr>
             </a:pPr>
             <a:r>
+              <a:rPr/>
               <a:t>10 / 21  •  Overview Operasional &amp; Proses Produksi Pabrik Gula  |  Internal Use</a:t>
             </a:r>
           </a:p>
@@ -3468,7 +3479,7 @@
           <a:lstStyle/>
           <a:p>
             <a:pPr algn="l">
-              <a:defRPr sz="1200" b="1">
+              <a:defRPr sz="1500" b="1">
                 <a:solidFill>
                   <a:srgbClr val="1B5E20"/>
                 </a:solidFill>
@@ -3476,6 +3487,7 @@
               </a:defRPr>
             </a:pPr>
             <a:r>
+              <a:rPr/>
               <a:t>CENTRIFUGATION (PEMUTARAN)</a:t>
             </a:r>
           </a:p>
@@ -3507,14 +3519,15 @@
               <a:spcAft>
                 <a:spcPts val="400"/>
               </a:spcAft>
-              <a:defRPr sz="1000">
-                <a:solidFill>
-                  <a:srgbClr val="424242"/>
-                </a:solidFill>
-                <a:latin typeface="Calibri"/>
-              </a:defRPr>
-            </a:pPr>
-            <a:r>
+              <a:defRPr sz="1300">
+                <a:solidFill>
+                  <a:srgbClr val="424242"/>
+                </a:solidFill>
+                <a:latin typeface="Calibri"/>
+              </a:defRPr>
+            </a:pPr>
+            <a:r>
+              <a:rPr/>
               <a:t>• Massecuite dari vacuum pan dimasukkan ke centrifuge</a:t>
             </a:r>
           </a:p>
@@ -3523,14 +3536,15 @@
               <a:spcAft>
                 <a:spcPts val="400"/>
               </a:spcAft>
-              <a:defRPr sz="1000">
-                <a:solidFill>
-                  <a:srgbClr val="424242"/>
-                </a:solidFill>
-                <a:latin typeface="Calibri"/>
-              </a:defRPr>
-            </a:pPr>
-            <a:r>
+              <a:defRPr sz="1300">
+                <a:solidFill>
+                  <a:srgbClr val="424242"/>
+                </a:solidFill>
+                <a:latin typeface="Calibri"/>
+              </a:defRPr>
+            </a:pPr>
+            <a:r>
+              <a:rPr/>
               <a:t>• Mesin berputar 1000–1500 rpm</a:t>
             </a:r>
           </a:p>
@@ -3539,14 +3553,15 @@
               <a:spcAft>
                 <a:spcPts val="400"/>
               </a:spcAft>
-              <a:defRPr sz="1000">
-                <a:solidFill>
-                  <a:srgbClr val="424242"/>
-                </a:solidFill>
-                <a:latin typeface="Calibri"/>
-              </a:defRPr>
-            </a:pPr>
-            <a:r>
+              <a:defRPr sz="1300">
+                <a:solidFill>
+                  <a:srgbClr val="424242"/>
+                </a:solidFill>
+                <a:latin typeface="Calibri"/>
+              </a:defRPr>
+            </a:pPr>
+            <a:r>
+              <a:rPr/>
               <a:t>• Kristal gula tertahan di saringan (screen)</a:t>
             </a:r>
           </a:p>
@@ -3555,14 +3570,15 @@
               <a:spcAft>
                 <a:spcPts val="400"/>
               </a:spcAft>
-              <a:defRPr sz="1000">
-                <a:solidFill>
-                  <a:srgbClr val="424242"/>
-                </a:solidFill>
-                <a:latin typeface="Calibri"/>
-              </a:defRPr>
-            </a:pPr>
-            <a:r>
+              <a:defRPr sz="1300">
+                <a:solidFill>
+                  <a:srgbClr val="424242"/>
+                </a:solidFill>
+                <a:latin typeface="Calibri"/>
+              </a:defRPr>
+            </a:pPr>
+            <a:r>
+              <a:rPr/>
               <a:t>• Molasses (tetes) terlempar keluar melalui lubang screen</a:t>
             </a:r>
           </a:p>
@@ -3571,14 +3587,15 @@
               <a:spcAft>
                 <a:spcPts val="400"/>
               </a:spcAft>
-              <a:defRPr sz="1000">
-                <a:solidFill>
-                  <a:srgbClr val="424242"/>
-                </a:solidFill>
-                <a:latin typeface="Calibri"/>
-              </a:defRPr>
-            </a:pPr>
-            <a:r>
+              <a:defRPr sz="1300">
+                <a:solidFill>
+                  <a:srgbClr val="424242"/>
+                </a:solidFill>
+                <a:latin typeface="Calibri"/>
+              </a:defRPr>
+            </a:pPr>
+            <a:r>
+              <a:rPr/>
               <a:t>• Dicuci dengan air/steam untuk membersihkan kristal</a:t>
             </a:r>
           </a:p>
@@ -3587,7 +3604,7 @@
               <a:spcAft>
                 <a:spcPts val="400"/>
               </a:spcAft>
-              <a:defRPr sz="1000">
+              <a:defRPr sz="1300">
                 <a:solidFill>
                   <a:srgbClr val="424242"/>
                 </a:solidFill>
@@ -3600,14 +3617,15 @@
               <a:spcAft>
                 <a:spcPts val="400"/>
               </a:spcAft>
-              <a:defRPr sz="1000">
-                <a:solidFill>
-                  <a:srgbClr val="424242"/>
-                </a:solidFill>
-                <a:latin typeface="Calibri"/>
-              </a:defRPr>
-            </a:pPr>
-            <a:r>
+              <a:defRPr sz="1300">
+                <a:solidFill>
+                  <a:srgbClr val="424242"/>
+                </a:solidFill>
+                <a:latin typeface="Calibri"/>
+              </a:defRPr>
+            </a:pPr>
+            <a:r>
+              <a:rPr/>
               <a:t>Output: Kristal gula basah + molasses terpisah</a:t>
             </a:r>
           </a:p>
@@ -3616,7 +3634,7 @@
               <a:spcAft>
                 <a:spcPts val="400"/>
               </a:spcAft>
-              <a:defRPr sz="1000">
+              <a:defRPr sz="1300">
                 <a:solidFill>
                   <a:srgbClr val="424242"/>
                 </a:solidFill>
@@ -3629,14 +3647,15 @@
               <a:spcAft>
                 <a:spcPts val="400"/>
               </a:spcAft>
-              <a:defRPr sz="1000">
-                <a:solidFill>
-                  <a:srgbClr val="424242"/>
-                </a:solidFill>
-                <a:latin typeface="Calibri"/>
-              </a:defRPr>
-            </a:pPr>
-            <a:r>
+              <a:defRPr sz="1300">
+                <a:solidFill>
+                  <a:srgbClr val="424242"/>
+                </a:solidFill>
+                <a:latin typeface="Calibri"/>
+              </a:defRPr>
+            </a:pPr>
+            <a:r>
+              <a:rPr/>
               <a:t>Tipe: Batch centrifuge (gula A) &amp; Continuous (gula B/C)</a:t>
             </a:r>
           </a:p>
@@ -3665,7 +3684,7 @@
           <a:lstStyle/>
           <a:p>
             <a:pPr algn="l">
-              <a:defRPr sz="1200" b="1">
+              <a:defRPr sz="1500" b="1">
                 <a:solidFill>
                   <a:srgbClr val="1B5E20"/>
                 </a:solidFill>
@@ -3673,6 +3692,7 @@
               </a:defRPr>
             </a:pPr>
             <a:r>
+              <a:rPr/>
               <a:t>SUGAR DRYING &amp; COOLING</a:t>
             </a:r>
           </a:p>
@@ -3704,14 +3724,15 @@
               <a:spcAft>
                 <a:spcPts val="400"/>
               </a:spcAft>
-              <a:defRPr sz="1000">
-                <a:solidFill>
-                  <a:srgbClr val="424242"/>
-                </a:solidFill>
-                <a:latin typeface="Calibri"/>
-              </a:defRPr>
-            </a:pPr>
-            <a:r>
+              <a:defRPr sz="1300">
+                <a:solidFill>
+                  <a:srgbClr val="424242"/>
+                </a:solidFill>
+                <a:latin typeface="Calibri"/>
+              </a:defRPr>
+            </a:pPr>
+            <a:r>
+              <a:rPr/>
               <a:t>• Gula basah (moisture ~1%) masuk rotary dryer</a:t>
             </a:r>
           </a:p>
@@ -3720,14 +3741,15 @@
               <a:spcAft>
                 <a:spcPts val="400"/>
               </a:spcAft>
-              <a:defRPr sz="1000">
-                <a:solidFill>
-                  <a:srgbClr val="424242"/>
-                </a:solidFill>
-                <a:latin typeface="Calibri"/>
-              </a:defRPr>
-            </a:pPr>
-            <a:r>
+              <a:defRPr sz="1300">
+                <a:solidFill>
+                  <a:srgbClr val="424242"/>
+                </a:solidFill>
+                <a:latin typeface="Calibri"/>
+              </a:defRPr>
+            </a:pPr>
+            <a:r>
+              <a:rPr/>
               <a:t>• Dikeringkan dengan udara panas (suhu ~80°C)</a:t>
             </a:r>
           </a:p>
@@ -3736,14 +3758,15 @@
               <a:spcAft>
                 <a:spcPts val="400"/>
               </a:spcAft>
-              <a:defRPr sz="1000">
-                <a:solidFill>
-                  <a:srgbClr val="424242"/>
-                </a:solidFill>
-                <a:latin typeface="Calibri"/>
-              </a:defRPr>
-            </a:pPr>
-            <a:r>
+              <a:defRPr sz="1300">
+                <a:solidFill>
+                  <a:srgbClr val="424242"/>
+                </a:solidFill>
+                <a:latin typeface="Calibri"/>
+              </a:defRPr>
+            </a:pPr>
+            <a:r>
+              <a:rPr/>
               <a:t>• Target kadar air akhir: &lt; 0,05% (gula SHS)</a:t>
             </a:r>
           </a:p>
@@ -3752,14 +3775,15 @@
               <a:spcAft>
                 <a:spcPts val="400"/>
               </a:spcAft>
-              <a:defRPr sz="1000">
-                <a:solidFill>
-                  <a:srgbClr val="424242"/>
-                </a:solidFill>
-                <a:latin typeface="Calibri"/>
-              </a:defRPr>
-            </a:pPr>
-            <a:r>
+              <a:defRPr sz="1300">
+                <a:solidFill>
+                  <a:srgbClr val="424242"/>
+                </a:solidFill>
+                <a:latin typeface="Calibri"/>
+              </a:defRPr>
+            </a:pPr>
+            <a:r>
+              <a:rPr/>
               <a:t>• Setelah kering → masuk sugar cooler</a:t>
             </a:r>
           </a:p>
@@ -3768,14 +3792,15 @@
               <a:spcAft>
                 <a:spcPts val="400"/>
               </a:spcAft>
-              <a:defRPr sz="1000">
-                <a:solidFill>
-                  <a:srgbClr val="424242"/>
-                </a:solidFill>
-                <a:latin typeface="Calibri"/>
-              </a:defRPr>
-            </a:pPr>
-            <a:r>
+              <a:defRPr sz="1300">
+                <a:solidFill>
+                  <a:srgbClr val="424242"/>
+                </a:solidFill>
+                <a:latin typeface="Calibri"/>
+              </a:defRPr>
+            </a:pPr>
+            <a:r>
+              <a:rPr/>
               <a:t>• Didinginkan ke suhu kamar (~30–35°C)</a:t>
             </a:r>
           </a:p>
@@ -3784,14 +3809,15 @@
               <a:spcAft>
                 <a:spcPts val="400"/>
               </a:spcAft>
-              <a:defRPr sz="1000">
-                <a:solidFill>
-                  <a:srgbClr val="424242"/>
-                </a:solidFill>
-                <a:latin typeface="Calibri"/>
-              </a:defRPr>
-            </a:pPr>
-            <a:r>
+              <a:defRPr sz="1300">
+                <a:solidFill>
+                  <a:srgbClr val="424242"/>
+                </a:solidFill>
+                <a:latin typeface="Calibri"/>
+              </a:defRPr>
+            </a:pPr>
+            <a:r>
+              <a:rPr/>
               <a:t>• Tujuan: mencegah caking (penggumpalan) saat penyimpanan</a:t>
             </a:r>
           </a:p>
@@ -3800,7 +3826,7 @@
               <a:spcAft>
                 <a:spcPts val="400"/>
               </a:spcAft>
-              <a:defRPr sz="1000">
+              <a:defRPr sz="1300">
                 <a:solidFill>
                   <a:srgbClr val="424242"/>
                 </a:solidFill>
@@ -3813,14 +3839,15 @@
               <a:spcAft>
                 <a:spcPts val="400"/>
               </a:spcAft>
-              <a:defRPr sz="1000">
-                <a:solidFill>
-                  <a:srgbClr val="424242"/>
-                </a:solidFill>
-                <a:latin typeface="Calibri"/>
-              </a:defRPr>
-            </a:pPr>
-            <a:r>
+              <a:defRPr sz="1300">
+                <a:solidFill>
+                  <a:srgbClr val="424242"/>
+                </a:solidFill>
+                <a:latin typeface="Calibri"/>
+              </a:defRPr>
+            </a:pPr>
+            <a:r>
+              <a:rPr/>
               <a:t>Quality check setelah drying:</a:t>
             </a:r>
           </a:p>
@@ -3829,14 +3856,15 @@
               <a:spcAft>
                 <a:spcPts val="400"/>
               </a:spcAft>
-              <a:defRPr sz="1000">
-                <a:solidFill>
-                  <a:srgbClr val="424242"/>
-                </a:solidFill>
-                <a:latin typeface="Calibri"/>
-              </a:defRPr>
-            </a:pPr>
-            <a:r>
+              <a:defRPr sz="1300">
+                <a:solidFill>
+                  <a:srgbClr val="424242"/>
+                </a:solidFill>
+                <a:latin typeface="Calibri"/>
+              </a:defRPr>
+            </a:pPr>
+            <a:r>
+              <a:rPr/>
               <a:t>• Kadar air (moisture) &lt; 0,05%</a:t>
             </a:r>
           </a:p>
@@ -3845,14 +3873,15 @@
               <a:spcAft>
                 <a:spcPts val="400"/>
               </a:spcAft>
-              <a:defRPr sz="1000">
-                <a:solidFill>
-                  <a:srgbClr val="424242"/>
-                </a:solidFill>
-                <a:latin typeface="Calibri"/>
-              </a:defRPr>
-            </a:pPr>
-            <a:r>
+              <a:defRPr sz="1300">
+                <a:solidFill>
+                  <a:srgbClr val="424242"/>
+                </a:solidFill>
+                <a:latin typeface="Calibri"/>
+              </a:defRPr>
+            </a:pPr>
+            <a:r>
+              <a:rPr/>
               <a:t>• Warna (ICUMSA): 150–300 untuk GKP</a:t>
             </a:r>
           </a:p>
@@ -3861,14 +3890,15 @@
               <a:spcAft>
                 <a:spcPts val="400"/>
               </a:spcAft>
-              <a:defRPr sz="1000">
-                <a:solidFill>
-                  <a:srgbClr val="424242"/>
-                </a:solidFill>
-                <a:latin typeface="Calibri"/>
-              </a:defRPr>
-            </a:pPr>
-            <a:r>
+              <a:defRPr sz="1300">
+                <a:solidFill>
+                  <a:srgbClr val="424242"/>
+                </a:solidFill>
+                <a:latin typeface="Calibri"/>
+              </a:defRPr>
+            </a:pPr>
+            <a:r>
+              <a:rPr/>
               <a:t>• Ukuran kristal: 0,8–1,1 mm</a:t>
             </a:r>
           </a:p>
@@ -3877,14 +3907,15 @@
               <a:spcAft>
                 <a:spcPts val="400"/>
               </a:spcAft>
-              <a:defRPr sz="1000">
-                <a:solidFill>
-                  <a:srgbClr val="424242"/>
-                </a:solidFill>
-                <a:latin typeface="Calibri"/>
-              </a:defRPr>
-            </a:pPr>
-            <a:r>
+              <a:defRPr sz="1300">
+                <a:solidFill>
+                  <a:srgbClr val="424242"/>
+                </a:solidFill>
+                <a:latin typeface="Calibri"/>
+              </a:defRPr>
+            </a:pPr>
+            <a:r>
+              <a:rPr/>
               <a:t>• Pol ≥ 99,3%</a:t>
             </a:r>
           </a:p>
@@ -3932,7 +3963,7 @@
           <a:lstStyle/>
           <a:p>
             <a:pPr algn="ctr">
-              <a:defRPr sz="1100" b="1">
+              <a:defRPr sz="1400" b="1">
                 <a:solidFill>
                   <a:srgbClr val="1B5E20"/>
                 </a:solidFill>
@@ -3940,6 +3971,7 @@
               </a:defRPr>
             </a:pPr>
             <a:r>
+              <a:rPr/>
               <a:t>Key Takeaway: Centrifuge memisahkan kristal dari molasses. Pengeringan memastikan gula tidak menggumpal saat disimpan.</a:t>
             </a:r>
           </a:p>
@@ -3994,7 +4026,7 @@
           <a:lstStyle/>
           <a:p>
             <a:pPr algn="l">
-              <a:defRPr sz="2800" b="1">
+              <a:defRPr sz="3000" b="1">
                 <a:solidFill>
                   <a:srgbClr val="1B5E20"/>
                 </a:solidFill>
@@ -4002,6 +4034,7 @@
               </a:defRPr>
             </a:pPr>
             <a:r>
+              <a:rPr/>
               <a:t>Packaging &amp; Storage</a:t>
             </a:r>
           </a:p>
@@ -4030,7 +4063,7 @@
           <a:lstStyle/>
           <a:p>
             <a:pPr algn="l">
-              <a:defRPr sz="1300" b="0">
+              <a:defRPr sz="1500" b="0">
                 <a:solidFill>
                   <a:srgbClr val="2E7D32"/>
                 </a:solidFill>
@@ -4038,6 +4071,7 @@
               </a:defRPr>
             </a:pPr>
             <a:r>
+              <a:rPr/>
               <a:t>Stasiun Pengemasan — Dari bulk ke produk siap distribusi</a:t>
             </a:r>
           </a:p>
@@ -4066,7 +4100,7 @@
           <a:lstStyle/>
           <a:p>
             <a:pPr algn="l">
-              <a:defRPr sz="800" b="0">
+              <a:defRPr sz="1100" b="0">
                 <a:solidFill>
                   <a:srgbClr val="9E9E9E"/>
                 </a:solidFill>
@@ -4074,6 +4108,7 @@
               </a:defRPr>
             </a:pPr>
             <a:r>
+              <a:rPr/>
               <a:t>11 / 21  •  Overview Operasional &amp; Proses Produksi Pabrik Gula  |  Internal Use</a:t>
             </a:r>
           </a:p>
@@ -4105,14 +4140,15 @@
               <a:spcAft>
                 <a:spcPts val="400"/>
               </a:spcAft>
-              <a:defRPr sz="1000" b="1">
-                <a:solidFill>
-                  <a:srgbClr val="424242"/>
-                </a:solidFill>
-                <a:latin typeface="Calibri"/>
-              </a:defRPr>
-            </a:pPr>
-            <a:r>
+              <a:defRPr sz="1300" b="1">
+                <a:solidFill>
+                  <a:srgbClr val="424242"/>
+                </a:solidFill>
+                <a:latin typeface="Calibri"/>
+              </a:defRPr>
+            </a:pPr>
+            <a:r>
+              <a:rPr/>
               <a:t>Apa yang terjadi di proses ini?</a:t>
             </a:r>
           </a:p>
@@ -4121,7 +4157,7 @@
               <a:spcAft>
                 <a:spcPts val="400"/>
               </a:spcAft>
-              <a:defRPr sz="1000">
+              <a:defRPr sz="1300">
                 <a:solidFill>
                   <a:srgbClr val="424242"/>
                 </a:solidFill>
@@ -4134,14 +4170,15 @@
               <a:spcAft>
                 <a:spcPts val="400"/>
               </a:spcAft>
-              <a:defRPr sz="1000">
-                <a:solidFill>
-                  <a:srgbClr val="424242"/>
-                </a:solidFill>
-                <a:latin typeface="Calibri"/>
-              </a:defRPr>
-            </a:pPr>
-            <a:r>
+              <a:defRPr sz="1300">
+                <a:solidFill>
+                  <a:srgbClr val="424242"/>
+                </a:solidFill>
+                <a:latin typeface="Calibri"/>
+              </a:defRPr>
+            </a:pPr>
+            <a:r>
+              <a:rPr/>
               <a:t>Alur Pengemasan:</a:t>
             </a:r>
           </a:p>
@@ -4150,14 +4187,15 @@
               <a:spcAft>
                 <a:spcPts val="400"/>
               </a:spcAft>
-              <a:defRPr sz="1000">
-                <a:solidFill>
-                  <a:srgbClr val="424242"/>
-                </a:solidFill>
-                <a:latin typeface="Calibri"/>
-              </a:defRPr>
-            </a:pPr>
-            <a:r>
+              <a:defRPr sz="1300">
+                <a:solidFill>
+                  <a:srgbClr val="424242"/>
+                </a:solidFill>
+                <a:latin typeface="Calibri"/>
+              </a:defRPr>
+            </a:pPr>
+            <a:r>
+              <a:rPr/>
               <a:t>1. Gula kering dari cooler → vibrating screen (ayakan) → pisahkan ukuran</a:t>
             </a:r>
           </a:p>
@@ -4166,14 +4204,15 @@
               <a:spcAft>
                 <a:spcPts val="400"/>
               </a:spcAft>
-              <a:defRPr sz="1000">
-                <a:solidFill>
-                  <a:srgbClr val="424242"/>
-                </a:solidFill>
-                <a:latin typeface="Calibri"/>
-              </a:defRPr>
-            </a:pPr>
-            <a:r>
+              <a:defRPr sz="1300">
+                <a:solidFill>
+                  <a:srgbClr val="424242"/>
+                </a:solidFill>
+                <a:latin typeface="Calibri"/>
+              </a:defRPr>
+            </a:pPr>
+            <a:r>
+              <a:rPr/>
               <a:t>2. Gula sesuai spesifikasi → hopper penampung</a:t>
             </a:r>
           </a:p>
@@ -4182,14 +4221,15 @@
               <a:spcAft>
                 <a:spcPts val="400"/>
               </a:spcAft>
-              <a:defRPr sz="1000">
-                <a:solidFill>
-                  <a:srgbClr val="424242"/>
-                </a:solidFill>
-                <a:latin typeface="Calibri"/>
-              </a:defRPr>
-            </a:pPr>
-            <a:r>
+              <a:defRPr sz="1300">
+                <a:solidFill>
+                  <a:srgbClr val="424242"/>
+                </a:solidFill>
+                <a:latin typeface="Calibri"/>
+              </a:defRPr>
+            </a:pPr>
+            <a:r>
+              <a:rPr/>
               <a:t>3. Penimbangan otomatis (50 kg/karung atau sesuai order)</a:t>
             </a:r>
           </a:p>
@@ -4198,14 +4238,15 @@
               <a:spcAft>
                 <a:spcPts val="400"/>
               </a:spcAft>
-              <a:defRPr sz="1000">
-                <a:solidFill>
-                  <a:srgbClr val="424242"/>
-                </a:solidFill>
-                <a:latin typeface="Calibri"/>
-              </a:defRPr>
-            </a:pPr>
-            <a:r>
+              <a:defRPr sz="1300">
+                <a:solidFill>
+                  <a:srgbClr val="424242"/>
+                </a:solidFill>
+                <a:latin typeface="Calibri"/>
+              </a:defRPr>
+            </a:pPr>
+            <a:r>
+              <a:rPr/>
               <a:t>4. Pengemasan dalam karung (PP woven bag + inner PE liner)</a:t>
             </a:r>
           </a:p>
@@ -4214,14 +4255,15 @@
               <a:spcAft>
                 <a:spcPts val="400"/>
               </a:spcAft>
-              <a:defRPr sz="1000">
-                <a:solidFill>
-                  <a:srgbClr val="424242"/>
-                </a:solidFill>
-                <a:latin typeface="Calibri"/>
-              </a:defRPr>
-            </a:pPr>
-            <a:r>
+              <a:defRPr sz="1300">
+                <a:solidFill>
+                  <a:srgbClr val="424242"/>
+                </a:solidFill>
+                <a:latin typeface="Calibri"/>
+              </a:defRPr>
+            </a:pPr>
+            <a:r>
+              <a:rPr/>
               <a:t>5. Dijahit/sealed → conveyor → gudang</a:t>
             </a:r>
           </a:p>
@@ -4230,7 +4272,7 @@
               <a:spcAft>
                 <a:spcPts val="400"/>
               </a:spcAft>
-              <a:defRPr sz="1000">
+              <a:defRPr sz="1300">
                 <a:solidFill>
                   <a:srgbClr val="424242"/>
                 </a:solidFill>
@@ -4243,14 +4285,15 @@
               <a:spcAft>
                 <a:spcPts val="400"/>
               </a:spcAft>
-              <a:defRPr sz="1000">
-                <a:solidFill>
-                  <a:srgbClr val="424242"/>
-                </a:solidFill>
-                <a:latin typeface="Calibri"/>
-              </a:defRPr>
-            </a:pPr>
-            <a:r>
+              <a:defRPr sz="1300">
+                <a:solidFill>
+                  <a:srgbClr val="424242"/>
+                </a:solidFill>
+                <a:latin typeface="Calibri"/>
+              </a:defRPr>
+            </a:pPr>
+            <a:r>
+              <a:rPr/>
               <a:t>Penyimpanan (Gudang Gula):</a:t>
             </a:r>
           </a:p>
@@ -4259,14 +4302,15 @@
               <a:spcAft>
                 <a:spcPts val="400"/>
               </a:spcAft>
-              <a:defRPr sz="1000">
-                <a:solidFill>
-                  <a:srgbClr val="424242"/>
-                </a:solidFill>
-                <a:latin typeface="Calibri"/>
-              </a:defRPr>
-            </a:pPr>
-            <a:r>
+              <a:defRPr sz="1300">
+                <a:solidFill>
+                  <a:srgbClr val="424242"/>
+                </a:solidFill>
+                <a:latin typeface="Calibri"/>
+              </a:defRPr>
+            </a:pPr>
+            <a:r>
+              <a:rPr/>
               <a:t>• Gudang harus kering, ventilasi baik, suhu &lt;30°C</a:t>
             </a:r>
           </a:p>
@@ -4275,14 +4319,15 @@
               <a:spcAft>
                 <a:spcPts val="400"/>
               </a:spcAft>
-              <a:defRPr sz="1000">
-                <a:solidFill>
-                  <a:srgbClr val="424242"/>
-                </a:solidFill>
-                <a:latin typeface="Calibri"/>
-              </a:defRPr>
-            </a:pPr>
-            <a:r>
+              <a:defRPr sz="1300">
+                <a:solidFill>
+                  <a:srgbClr val="424242"/>
+                </a:solidFill>
+                <a:latin typeface="Calibri"/>
+              </a:defRPr>
+            </a:pPr>
+            <a:r>
+              <a:rPr/>
               <a:t>• Kelembaban relatif (RH) &lt; 65% — mencegah caking</a:t>
             </a:r>
           </a:p>
@@ -4291,14 +4336,15 @@
               <a:spcAft>
                 <a:spcPts val="400"/>
               </a:spcAft>
-              <a:defRPr sz="1000">
-                <a:solidFill>
-                  <a:srgbClr val="424242"/>
-                </a:solidFill>
-                <a:latin typeface="Calibri"/>
-              </a:defRPr>
-            </a:pPr>
-            <a:r>
+              <a:defRPr sz="1300">
+                <a:solidFill>
+                  <a:srgbClr val="424242"/>
+                </a:solidFill>
+                <a:latin typeface="Calibri"/>
+              </a:defRPr>
+            </a:pPr>
+            <a:r>
+              <a:rPr/>
               <a:t>• Sistem FIFO (First In First Out)</a:t>
             </a:r>
           </a:p>
@@ -4307,14 +4353,15 @@
               <a:spcAft>
                 <a:spcPts val="400"/>
               </a:spcAft>
-              <a:defRPr sz="1000">
-                <a:solidFill>
-                  <a:srgbClr val="424242"/>
-                </a:solidFill>
-                <a:latin typeface="Calibri"/>
-              </a:defRPr>
-            </a:pPr>
-            <a:r>
+              <a:defRPr sz="1300">
+                <a:solidFill>
+                  <a:srgbClr val="424242"/>
+                </a:solidFill>
+                <a:latin typeface="Calibri"/>
+              </a:defRPr>
+            </a:pPr>
+            <a:r>
+              <a:rPr/>
               <a:t>• Pallet kayu/plastik — tidak langsung kontak lantai</a:t>
             </a:r>
           </a:p>
@@ -4323,14 +4370,15 @@
               <a:spcAft>
                 <a:spcPts val="400"/>
               </a:spcAft>
-              <a:defRPr sz="1000">
-                <a:solidFill>
-                  <a:srgbClr val="424242"/>
-                </a:solidFill>
-                <a:latin typeface="Calibri"/>
-              </a:defRPr>
-            </a:pPr>
-            <a:r>
+              <a:defRPr sz="1300">
+                <a:solidFill>
+                  <a:srgbClr val="424242"/>
+                </a:solidFill>
+                <a:latin typeface="Calibri"/>
+              </a:defRPr>
+            </a:pPr>
+            <a:r>
+              <a:rPr/>
               <a:t>• Penumpukan maksimum: 30–40 karung</a:t>
             </a:r>
           </a:p>
@@ -4339,7 +4387,7 @@
               <a:spcAft>
                 <a:spcPts val="400"/>
               </a:spcAft>
-              <a:defRPr sz="1000">
+              <a:defRPr sz="1300">
                 <a:solidFill>
                   <a:srgbClr val="424242"/>
                 </a:solidFill>
@@ -4352,14 +4400,15 @@
               <a:spcAft>
                 <a:spcPts val="400"/>
               </a:spcAft>
-              <a:defRPr sz="1000">
-                <a:solidFill>
-                  <a:srgbClr val="424242"/>
-                </a:solidFill>
-                <a:latin typeface="Calibri"/>
-              </a:defRPr>
-            </a:pPr>
-            <a:r>
+              <a:defRPr sz="1300">
+                <a:solidFill>
+                  <a:srgbClr val="424242"/>
+                </a:solidFill>
+                <a:latin typeface="Calibri"/>
+              </a:defRPr>
+            </a:pPr>
+            <a:r>
+              <a:rPr/>
               <a:t>GMP di area packaging:</a:t>
             </a:r>
           </a:p>
@@ -4368,14 +4417,15 @@
               <a:spcAft>
                 <a:spcPts val="400"/>
               </a:spcAft>
-              <a:defRPr sz="1000">
-                <a:solidFill>
-                  <a:srgbClr val="424242"/>
-                </a:solidFill>
-                <a:latin typeface="Calibri"/>
-              </a:defRPr>
-            </a:pPr>
-            <a:r>
+              <a:defRPr sz="1300">
+                <a:solidFill>
+                  <a:srgbClr val="424242"/>
+                </a:solidFill>
+                <a:latin typeface="Calibri"/>
+              </a:defRPr>
+            </a:pPr>
+            <a:r>
+              <a:rPr/>
               <a:t>• Area bersih, bebas hama, tertutup dari cuaca</a:t>
             </a:r>
           </a:p>
@@ -4384,14 +4434,15 @@
               <a:spcAft>
                 <a:spcPts val="400"/>
               </a:spcAft>
-              <a:defRPr sz="1000">
-                <a:solidFill>
-                  <a:srgbClr val="424242"/>
-                </a:solidFill>
-                <a:latin typeface="Calibri"/>
-              </a:defRPr>
-            </a:pPr>
-            <a:r>
+              <a:defRPr sz="1300">
+                <a:solidFill>
+                  <a:srgbClr val="424242"/>
+                </a:solidFill>
+                <a:latin typeface="Calibri"/>
+              </a:defRPr>
+            </a:pPr>
+            <a:r>
+              <a:rPr/>
               <a:t>• Operator menggunakan APD (masker, sarung tangan, hairnet)</a:t>
             </a:r>
           </a:p>
@@ -4400,14 +4451,15 @@
               <a:spcAft>
                 <a:spcPts val="400"/>
               </a:spcAft>
-              <a:defRPr sz="1000">
-                <a:solidFill>
-                  <a:srgbClr val="424242"/>
-                </a:solidFill>
-                <a:latin typeface="Calibri"/>
-              </a:defRPr>
-            </a:pPr>
-            <a:r>
+              <a:defRPr sz="1300">
+                <a:solidFill>
+                  <a:srgbClr val="424242"/>
+                </a:solidFill>
+                <a:latin typeface="Calibri"/>
+              </a:defRPr>
+            </a:pPr>
+            <a:r>
+              <a:rPr/>
               <a:t>• Label lengkap: tanggal produksi, batch, expired date, berat bersih</a:t>
             </a:r>
           </a:p>
@@ -4455,7 +4507,7 @@
           <a:lstStyle/>
           <a:p>
             <a:pPr algn="ctr">
-              <a:defRPr sz="1100" b="1">
+              <a:defRPr sz="1400" b="1">
                 <a:solidFill>
                   <a:srgbClr val="1B5E20"/>
                 </a:solidFill>
@@ -4463,6 +4515,7 @@
               </a:defRPr>
             </a:pPr>
             <a:r>
+              <a:rPr/>
               <a:t>Key Takeaway: Pengemasan &amp; penyimpanan yang baik menjaga kualitas gula sampai ke tangan konsumen.</a:t>
             </a:r>
           </a:p>
@@ -4517,7 +4570,7 @@
           <a:lstStyle/>
           <a:p>
             <a:pPr algn="l">
-              <a:defRPr sz="2800" b="1">
+              <a:defRPr sz="3000" b="1">
                 <a:solidFill>
                   <a:srgbClr val="1B5E20"/>
                 </a:solidFill>
@@ -4525,6 +4578,7 @@
               </a:defRPr>
             </a:pPr>
             <a:r>
+              <a:rPr/>
               <a:t>Utility Systems</a:t>
             </a:r>
           </a:p>
@@ -4553,7 +4607,7 @@
           <a:lstStyle/>
           <a:p>
             <a:pPr algn="l">
-              <a:defRPr sz="1300" b="0">
+              <a:defRPr sz="1500" b="0">
                 <a:solidFill>
                   <a:srgbClr val="2E7D32"/>
                 </a:solidFill>
@@ -4561,6 +4615,7 @@
               </a:defRPr>
             </a:pPr>
             <a:r>
+              <a:rPr/>
               <a:t>Sistem Pendukung — Energi, air, dan infrastruktur operasional</a:t>
             </a:r>
           </a:p>
@@ -4589,7 +4644,7 @@
           <a:lstStyle/>
           <a:p>
             <a:pPr algn="l">
-              <a:defRPr sz="800" b="0">
+              <a:defRPr sz="1100" b="0">
                 <a:solidFill>
                   <a:srgbClr val="9E9E9E"/>
                 </a:solidFill>
@@ -4597,6 +4652,7 @@
               </a:defRPr>
             </a:pPr>
             <a:r>
+              <a:rPr/>
               <a:t>12 / 21  •  Overview Operasional &amp; Proses Produksi Pabrik Gula  |  Internal Use</a:t>
             </a:r>
           </a:p>
@@ -4644,13 +4700,14 @@
           <a:lstStyle/>
           <a:p>
             <a:pPr algn="ctr">
-              <a:defRPr sz="1100" b="1">
+              <a:defRPr sz="1400" b="1">
                 <a:solidFill>
                   <a:srgbClr val="1B5E20"/>
                 </a:solidFill>
               </a:defRPr>
             </a:pPr>
             <a:r>
+              <a:rPr/>
               <a:t>Boiler / Ketel Uap</a:t>
             </a:r>
           </a:p>
@@ -4659,13 +4716,14 @@
               <a:spcBef>
                 <a:spcPts val="200"/>
               </a:spcBef>
-              <a:defRPr sz="900">
-                <a:solidFill>
-                  <a:srgbClr val="424242"/>
-                </a:solidFill>
-              </a:defRPr>
-            </a:pPr>
-            <a:r>
+              <a:defRPr sz="1200">
+                <a:solidFill>
+                  <a:srgbClr val="424242"/>
+                </a:solidFill>
+              </a:defRPr>
+            </a:pPr>
+            <a:r>
+              <a:rPr/>
               <a:t>• Bahan bakar: bagasse (ampas tebu)</a:t>
             </a:r>
           </a:p>
@@ -4674,13 +4732,14 @@
               <a:spcBef>
                 <a:spcPts val="200"/>
               </a:spcBef>
-              <a:defRPr sz="900">
-                <a:solidFill>
-                  <a:srgbClr val="424242"/>
-                </a:solidFill>
-              </a:defRPr>
-            </a:pPr>
-            <a:r>
+              <a:defRPr sz="1200">
+                <a:solidFill>
+                  <a:srgbClr val="424242"/>
+                </a:solidFill>
+              </a:defRPr>
+            </a:pPr>
+            <a:r>
+              <a:rPr/>
               <a:t>• Menghasilkan uap bertekanan tinggi</a:t>
             </a:r>
           </a:p>
@@ -4689,13 +4748,14 @@
               <a:spcBef>
                 <a:spcPts val="200"/>
               </a:spcBef>
-              <a:defRPr sz="900">
-                <a:solidFill>
-                  <a:srgbClr val="424242"/>
-                </a:solidFill>
-              </a:defRPr>
-            </a:pPr>
-            <a:r>
+              <a:defRPr sz="1200">
+                <a:solidFill>
+                  <a:srgbClr val="424242"/>
+                </a:solidFill>
+              </a:defRPr>
+            </a:pPr>
+            <a:r>
+              <a:rPr/>
               <a:t>• Kapasitas: 20–60 ton uap/jam</a:t>
             </a:r>
           </a:p>
@@ -4704,13 +4764,14 @@
               <a:spcBef>
                 <a:spcPts val="200"/>
               </a:spcBef>
-              <a:defRPr sz="900">
-                <a:solidFill>
-                  <a:srgbClr val="424242"/>
-                </a:solidFill>
-              </a:defRPr>
-            </a:pPr>
-            <a:r>
+              <a:defRPr sz="1200">
+                <a:solidFill>
+                  <a:srgbClr val="424242"/>
+                </a:solidFill>
+              </a:defRPr>
+            </a:pPr>
+            <a:r>
+              <a:rPr/>
               <a:t>• Tipe: water tube boiler</a:t>
             </a:r>
           </a:p>
@@ -4719,13 +4780,14 @@
               <a:spcBef>
                 <a:spcPts val="200"/>
               </a:spcBef>
-              <a:defRPr sz="900">
-                <a:solidFill>
-                  <a:srgbClr val="424242"/>
-                </a:solidFill>
-              </a:defRPr>
-            </a:pPr>
-            <a:r>
+              <a:defRPr sz="1200">
+                <a:solidFill>
+                  <a:srgbClr val="424242"/>
+                </a:solidFill>
+              </a:defRPr>
+            </a:pPr>
+            <a:r>
+              <a:rPr/>
               <a:t>• Pabrik gula hampir self-sufficient energi</a:t>
             </a:r>
           </a:p>
@@ -4773,13 +4835,14 @@
           <a:lstStyle/>
           <a:p>
             <a:pPr algn="ctr">
-              <a:defRPr sz="1100" b="1">
+              <a:defRPr sz="1400" b="1">
                 <a:solidFill>
                   <a:srgbClr val="1B5E20"/>
                 </a:solidFill>
               </a:defRPr>
             </a:pPr>
             <a:r>
+              <a:rPr/>
               <a:t>Turbin &amp; Power House</a:t>
             </a:r>
           </a:p>
@@ -4788,13 +4851,14 @@
               <a:spcBef>
                 <a:spcPts val="200"/>
               </a:spcBef>
-              <a:defRPr sz="900">
-                <a:solidFill>
-                  <a:srgbClr val="424242"/>
-                </a:solidFill>
-              </a:defRPr>
-            </a:pPr>
-            <a:r>
+              <a:defRPr sz="1200">
+                <a:solidFill>
+                  <a:srgbClr val="424242"/>
+                </a:solidFill>
+              </a:defRPr>
+            </a:pPr>
+            <a:r>
+              <a:rPr/>
               <a:t>• Uap boiler → turbin → listrik + exhaust steam</a:t>
             </a:r>
           </a:p>
@@ -4803,13 +4867,14 @@
               <a:spcBef>
                 <a:spcPts val="200"/>
               </a:spcBef>
-              <a:defRPr sz="900">
-                <a:solidFill>
-                  <a:srgbClr val="424242"/>
-                </a:solidFill>
-              </a:defRPr>
-            </a:pPr>
-            <a:r>
+              <a:defRPr sz="1200">
+                <a:solidFill>
+                  <a:srgbClr val="424242"/>
+                </a:solidFill>
+              </a:defRPr>
+            </a:pPr>
+            <a:r>
+              <a:rPr/>
               <a:t>• Listrik: 3–8 MW (kebutuhan pabrik)</a:t>
             </a:r>
           </a:p>
@@ -4818,13 +4883,14 @@
               <a:spcBef>
                 <a:spcPts val="200"/>
               </a:spcBef>
-              <a:defRPr sz="900">
-                <a:solidFill>
-                  <a:srgbClr val="424242"/>
-                </a:solidFill>
-              </a:defRPr>
-            </a:pPr>
-            <a:r>
+              <a:defRPr sz="1200">
+                <a:solidFill>
+                  <a:srgbClr val="424242"/>
+                </a:solidFill>
+              </a:defRPr>
+            </a:pPr>
+            <a:r>
+              <a:rPr/>
               <a:t>• Exhaust steam: dipakai proses (evaporator, pan)</a:t>
             </a:r>
           </a:p>
@@ -4833,13 +4899,14 @@
               <a:spcBef>
                 <a:spcPts val="200"/>
               </a:spcBef>
-              <a:defRPr sz="900">
-                <a:solidFill>
-                  <a:srgbClr val="424242"/>
-                </a:solidFill>
-              </a:defRPr>
-            </a:pPr>
-            <a:r>
+              <a:defRPr sz="1200">
+                <a:solidFill>
+                  <a:srgbClr val="424242"/>
+                </a:solidFill>
+              </a:defRPr>
+            </a:pPr>
+            <a:r>
+              <a:rPr/>
               <a:t>• Co-generation: surplus dijual ke PLN</a:t>
             </a:r>
           </a:p>
@@ -4848,13 +4915,14 @@
               <a:spcBef>
                 <a:spcPts val="200"/>
               </a:spcBef>
-              <a:defRPr sz="900">
-                <a:solidFill>
-                  <a:srgbClr val="424242"/>
-                </a:solidFill>
-              </a:defRPr>
-            </a:pPr>
-            <a:r>
+              <a:defRPr sz="1200">
+                <a:solidFill>
+                  <a:srgbClr val="424242"/>
+                </a:solidFill>
+              </a:defRPr>
+            </a:pPr>
+            <a:r>
+              <a:rPr/>
               <a:t>• Back Pressure Turbine Generator (BPTG)</a:t>
             </a:r>
           </a:p>
@@ -4902,13 +4970,14 @@
           <a:lstStyle/>
           <a:p>
             <a:pPr algn="ctr">
-              <a:defRPr sz="1100" b="1">
+              <a:defRPr sz="1400" b="1">
                 <a:solidFill>
                   <a:srgbClr val="1B5E20"/>
                 </a:solidFill>
               </a:defRPr>
             </a:pPr>
             <a:r>
+              <a:rPr/>
               <a:t>Water Treatment Plant</a:t>
             </a:r>
           </a:p>
@@ -4917,13 +4986,14 @@
               <a:spcBef>
                 <a:spcPts val="200"/>
               </a:spcBef>
-              <a:defRPr sz="900">
-                <a:solidFill>
-                  <a:srgbClr val="424242"/>
-                </a:solidFill>
-              </a:defRPr>
-            </a:pPr>
-            <a:r>
+              <a:defRPr sz="1200">
+                <a:solidFill>
+                  <a:srgbClr val="424242"/>
+                </a:solidFill>
+              </a:defRPr>
+            </a:pPr>
+            <a:r>
+              <a:rPr/>
               <a:t>• Sumber: sungai / sumur dalam</a:t>
             </a:r>
           </a:p>
@@ -4932,13 +5002,14 @@
               <a:spcBef>
                 <a:spcPts val="200"/>
               </a:spcBef>
-              <a:defRPr sz="900">
-                <a:solidFill>
-                  <a:srgbClr val="424242"/>
-                </a:solidFill>
-              </a:defRPr>
-            </a:pPr>
-            <a:r>
+              <a:defRPr sz="1200">
+                <a:solidFill>
+                  <a:srgbClr val="424242"/>
+                </a:solidFill>
+              </a:defRPr>
+            </a:pPr>
+            <a:r>
+              <a:rPr/>
               <a:t>• Treatment: koagulasi, filtrasi, softening</a:t>
             </a:r>
           </a:p>
@@ -4947,13 +5018,14 @@
               <a:spcBef>
                 <a:spcPts val="200"/>
               </a:spcBef>
-              <a:defRPr sz="900">
-                <a:solidFill>
-                  <a:srgbClr val="424242"/>
-                </a:solidFill>
-              </a:defRPr>
-            </a:pPr>
-            <a:r>
+              <a:defRPr sz="1200">
+                <a:solidFill>
+                  <a:srgbClr val="424242"/>
+                </a:solidFill>
+              </a:defRPr>
+            </a:pPr>
+            <a:r>
+              <a:rPr/>
               <a:t>• Kebutuhan: 500–1500 m³/hari</a:t>
             </a:r>
           </a:p>
@@ -4962,13 +5034,14 @@
               <a:spcBef>
                 <a:spcPts val="200"/>
               </a:spcBef>
-              <a:defRPr sz="900">
-                <a:solidFill>
-                  <a:srgbClr val="424242"/>
-                </a:solidFill>
-              </a:defRPr>
-            </a:pPr>
-            <a:r>
+              <a:defRPr sz="1200">
+                <a:solidFill>
+                  <a:srgbClr val="424242"/>
+                </a:solidFill>
+              </a:defRPr>
+            </a:pPr>
+            <a:r>
+              <a:rPr/>
               <a:t>• Untuk: boiler feed water, proses, sanitasi</a:t>
             </a:r>
           </a:p>
@@ -4977,13 +5050,14 @@
               <a:spcBef>
                 <a:spcPts val="200"/>
               </a:spcBef>
-              <a:defRPr sz="900">
-                <a:solidFill>
-                  <a:srgbClr val="424242"/>
-                </a:solidFill>
-              </a:defRPr>
-            </a:pPr>
-            <a:r>
+              <a:defRPr sz="1200">
+                <a:solidFill>
+                  <a:srgbClr val="424242"/>
+                </a:solidFill>
+              </a:defRPr>
+            </a:pPr>
+            <a:r>
+              <a:rPr/>
               <a:t>• Kualitas: hardness &lt;5 ppm untuk boiler</a:t>
             </a:r>
           </a:p>
@@ -5031,13 +5105,14 @@
           <a:lstStyle/>
           <a:p>
             <a:pPr algn="ctr">
-              <a:defRPr sz="1100" b="1">
+              <a:defRPr sz="1400" b="1">
                 <a:solidFill>
                   <a:srgbClr val="1B5E20"/>
                 </a:solidFill>
               </a:defRPr>
             </a:pPr>
             <a:r>
+              <a:rPr/>
               <a:t>Instrument &amp; Workshop</a:t>
             </a:r>
           </a:p>
@@ -5046,13 +5121,14 @@
               <a:spcBef>
                 <a:spcPts val="200"/>
               </a:spcBef>
-              <a:defRPr sz="900">
-                <a:solidFill>
-                  <a:srgbClr val="424242"/>
-                </a:solidFill>
-              </a:defRPr>
-            </a:pPr>
-            <a:r>
+              <a:defRPr sz="1200">
+                <a:solidFill>
+                  <a:srgbClr val="424242"/>
+                </a:solidFill>
+              </a:defRPr>
+            </a:pPr>
+            <a:r>
+              <a:rPr/>
               <a:t>• Workshop mekanik &amp; listrik</a:t>
             </a:r>
           </a:p>
@@ -5061,13 +5137,14 @@
               <a:spcBef>
                 <a:spcPts val="200"/>
               </a:spcBef>
-              <a:defRPr sz="900">
-                <a:solidFill>
-                  <a:srgbClr val="424242"/>
-                </a:solidFill>
-              </a:defRPr>
-            </a:pPr>
-            <a:r>
+              <a:defRPr sz="1200">
+                <a:solidFill>
+                  <a:srgbClr val="424242"/>
+                </a:solidFill>
+              </a:defRPr>
+            </a:pPr>
+            <a:r>
+              <a:rPr/>
               <a:t>• Spare parts management</a:t>
             </a:r>
           </a:p>
@@ -5076,13 +5153,14 @@
               <a:spcBef>
                 <a:spcPts val="200"/>
               </a:spcBef>
-              <a:defRPr sz="900">
-                <a:solidFill>
-                  <a:srgbClr val="424242"/>
-                </a:solidFill>
-              </a:defRPr>
-            </a:pPr>
-            <a:r>
+              <a:defRPr sz="1200">
+                <a:solidFill>
+                  <a:srgbClr val="424242"/>
+                </a:solidFill>
+              </a:defRPr>
+            </a:pPr>
+            <a:r>
+              <a:rPr/>
               <a:t>• Preventive maintenance scheduling</a:t>
             </a:r>
           </a:p>
@@ -5091,13 +5169,14 @@
               <a:spcBef>
                 <a:spcPts val="200"/>
               </a:spcBef>
-              <a:defRPr sz="900">
-                <a:solidFill>
-                  <a:srgbClr val="424242"/>
-                </a:solidFill>
-              </a:defRPr>
-            </a:pPr>
-            <a:r>
+              <a:defRPr sz="1200">
+                <a:solidFill>
+                  <a:srgbClr val="424242"/>
+                </a:solidFill>
+              </a:defRPr>
+            </a:pPr>
+            <a:r>
+              <a:rPr/>
               <a:t>• Laboratorium instrumen &amp; kalibrasi</a:t>
             </a:r>
           </a:p>
@@ -5106,13 +5185,14 @@
               <a:spcBef>
                 <a:spcPts val="200"/>
               </a:spcBef>
-              <a:defRPr sz="900">
-                <a:solidFill>
-                  <a:srgbClr val="424242"/>
-                </a:solidFill>
-              </a:defRPr>
-            </a:pPr>
-            <a:r>
+              <a:defRPr sz="1200">
+                <a:solidFill>
+                  <a:srgbClr val="424242"/>
+                </a:solidFill>
+              </a:defRPr>
+            </a:pPr>
+            <a:r>
+              <a:rPr/>
               <a:t>• Off-season: overhaul seluruh mesin</a:t>
             </a:r>
           </a:p>
@@ -5160,7 +5240,7 @@
           <a:lstStyle/>
           <a:p>
             <a:pPr algn="ctr">
-              <a:defRPr sz="1100" b="1">
+              <a:defRPr sz="1400" b="1">
                 <a:solidFill>
                   <a:srgbClr val="1B5E20"/>
                 </a:solidFill>
@@ -5168,6 +5248,7 @@
               </a:defRPr>
             </a:pPr>
             <a:r>
+              <a:rPr/>
               <a:t>Key Takeaway: Pabrik gula bisa mandiri energi dengan membakar bagasse di boiler — konsep self-sufficient &amp; circular economy.</a:t>
             </a:r>
           </a:p>
@@ -5222,7 +5303,7 @@
           <a:lstStyle/>
           <a:p>
             <a:pPr algn="l">
-              <a:defRPr sz="2800" b="1">
+              <a:defRPr sz="3000" b="1">
                 <a:solidFill>
                   <a:srgbClr val="1B5E20"/>
                 </a:solidFill>
@@ -5230,6 +5311,7 @@
               </a:defRPr>
             </a:pPr>
             <a:r>
+              <a:rPr/>
               <a:t>Pemanfaatan Produk Samping (By-Products)</a:t>
             </a:r>
           </a:p>
@@ -5258,7 +5340,7 @@
           <a:lstStyle/>
           <a:p>
             <a:pPr algn="l">
-              <a:defRPr sz="1300" b="0">
+              <a:defRPr sz="1500" b="0">
                 <a:solidFill>
                   <a:srgbClr val="2E7D32"/>
                 </a:solidFill>
@@ -5266,6 +5348,7 @@
               </a:defRPr>
             </a:pPr>
             <a:r>
+              <a:rPr/>
               <a:t>Circular Economy — Tidak ada yang terbuang</a:t>
             </a:r>
           </a:p>
@@ -5294,7 +5377,7 @@
           <a:lstStyle/>
           <a:p>
             <a:pPr algn="l">
-              <a:defRPr sz="800" b="0">
+              <a:defRPr sz="1100" b="0">
                 <a:solidFill>
                   <a:srgbClr val="9E9E9E"/>
                 </a:solidFill>
@@ -5302,6 +5385,7 @@
               </a:defRPr>
             </a:pPr>
             <a:r>
+              <a:rPr/>
               <a:t>13 / 21  •  Overview Operasional &amp; Proses Produksi Pabrik Gula  |  Internal Use</a:t>
             </a:r>
           </a:p>
@@ -5347,13 +5431,14 @@
           <a:lstStyle/>
           <a:p>
             <a:pPr algn="ctr">
-              <a:defRPr sz="1000" b="1">
+              <a:defRPr sz="1300" b="1">
                 <a:solidFill>
                   <a:srgbClr val="FFFFFF"/>
                 </a:solidFill>
               </a:defRPr>
             </a:pPr>
             <a:r>
+              <a:rPr/>
               <a:t>Bagasse (Ampas Tebu)</a:t>
             </a:r>
           </a:p>
@@ -5382,7 +5467,7 @@
           <a:lstStyle/>
           <a:p>
             <a:pPr algn="ctr">
-              <a:defRPr sz="900" b="1">
+              <a:defRPr sz="1200" b="1">
                 <a:solidFill>
                   <a:srgbClr val="2E7D32"/>
                 </a:solidFill>
@@ -5390,6 +5475,7 @@
               </a:defRPr>
             </a:pPr>
             <a:r>
+              <a:rPr/>
               <a:t>~30 ton / 100 ton tebu</a:t>
             </a:r>
           </a:p>
@@ -5418,26 +5504,30 @@
           <a:lstStyle/>
           <a:p>
             <a:pPr algn="l">
-              <a:defRPr sz="900" b="0">
-                <a:solidFill>
-                  <a:srgbClr val="424242"/>
-                </a:solidFill>
-                <a:latin typeface="Calibri"/>
-              </a:defRPr>
-            </a:pPr>
-            <a:r>
+              <a:defRPr sz="1200" b="0">
+                <a:solidFill>
+                  <a:srgbClr val="424242"/>
+                </a:solidFill>
+                <a:latin typeface="Calibri"/>
+              </a:defRPr>
+            </a:pPr>
+            <a:r>
+              <a:rPr/>
               <a:t>• Bahan bakar utama boiler</a:t>
             </a:r>
             <a:br/>
             <a:r>
+              <a:rPr/>
               <a:t>• Co-generation listrik</a:t>
             </a:r>
             <a:br/>
             <a:r>
+              <a:rPr/>
               <a:t>• Potensi: pulp &amp; kertas, pellet biofuel</a:t>
             </a:r>
             <a:br/>
             <a:r>
+              <a:rPr/>
               <a:t>• Revenue: 5–10%</a:t>
             </a:r>
           </a:p>
@@ -5483,13 +5573,14 @@
           <a:lstStyle/>
           <a:p>
             <a:pPr algn="ctr">
-              <a:defRPr sz="1000" b="1">
+              <a:defRPr sz="1300" b="1">
                 <a:solidFill>
                   <a:srgbClr val="FFFFFF"/>
                 </a:solidFill>
               </a:defRPr>
             </a:pPr>
             <a:r>
+              <a:rPr/>
               <a:t>Molasses (Tetes)</a:t>
             </a:r>
           </a:p>
@@ -5518,7 +5609,7 @@
           <a:lstStyle/>
           <a:p>
             <a:pPr algn="ctr">
-              <a:defRPr sz="900" b="1">
+              <a:defRPr sz="1200" b="1">
                 <a:solidFill>
                   <a:srgbClr val="6D4C41"/>
                 </a:solidFill>
@@ -5526,6 +5617,7 @@
               </a:defRPr>
             </a:pPr>
             <a:r>
+              <a:rPr/>
               <a:t>~4–5 ton / 100 ton tebu</a:t>
             </a:r>
           </a:p>
@@ -5554,26 +5646,30 @@
           <a:lstStyle/>
           <a:p>
             <a:pPr algn="l">
-              <a:defRPr sz="900" b="0">
-                <a:solidFill>
-                  <a:srgbClr val="424242"/>
-                </a:solidFill>
-                <a:latin typeface="Calibri"/>
-              </a:defRPr>
-            </a:pPr>
-            <a:r>
+              <a:defRPr sz="1200" b="0">
+                <a:solidFill>
+                  <a:srgbClr val="424242"/>
+                </a:solidFill>
+                <a:latin typeface="Calibri"/>
+              </a:defRPr>
+            </a:pPr>
+            <a:r>
+              <a:rPr/>
               <a:t>• Bahan baku alkohol/etanol</a:t>
             </a:r>
             <a:br/>
             <a:r>
+              <a:rPr/>
               <a:t>• Pakan ternak</a:t>
             </a:r>
             <a:br/>
             <a:r>
+              <a:rPr/>
               <a:t>• MSG, ragi, asam sitrat</a:t>
             </a:r>
             <a:br/>
             <a:r>
+              <a:rPr/>
               <a:t>• Revenue: 10–15%</a:t>
             </a:r>
           </a:p>
@@ -5619,13 +5715,14 @@
           <a:lstStyle/>
           <a:p>
             <a:pPr algn="ctr">
-              <a:defRPr sz="1000" b="1">
+              <a:defRPr sz="1300" b="1">
                 <a:solidFill>
                   <a:srgbClr val="FFFFFF"/>
                 </a:solidFill>
               </a:defRPr>
             </a:pPr>
             <a:r>
+              <a:rPr/>
               <a:t>Blotong (Filter Cake)</a:t>
             </a:r>
           </a:p>
@@ -5654,7 +5751,7 @@
           <a:lstStyle/>
           <a:p>
             <a:pPr algn="ctr">
-              <a:defRPr sz="900" b="1">
+              <a:defRPr sz="1200" b="1">
                 <a:solidFill>
                   <a:srgbClr val="1B5E20"/>
                 </a:solidFill>
@@ -5662,6 +5759,7 @@
               </a:defRPr>
             </a:pPr>
             <a:r>
+              <a:rPr/>
               <a:t>~3–4 ton / 100 ton tebu</a:t>
             </a:r>
           </a:p>
@@ -5690,26 +5788,30 @@
           <a:lstStyle/>
           <a:p>
             <a:pPr algn="l">
-              <a:defRPr sz="900" b="0">
-                <a:solidFill>
-                  <a:srgbClr val="424242"/>
-                </a:solidFill>
-                <a:latin typeface="Calibri"/>
-              </a:defRPr>
-            </a:pPr>
-            <a:r>
+              <a:defRPr sz="1200" b="0">
+                <a:solidFill>
+                  <a:srgbClr val="424242"/>
+                </a:solidFill>
+                <a:latin typeface="Calibri"/>
+              </a:defRPr>
+            </a:pPr>
+            <a:r>
+              <a:rPr/>
               <a:t>• Pupuk organik (N, P, K tinggi)</a:t>
             </a:r>
             <a:br/>
             <a:r>
+              <a:rPr/>
               <a:t>• Soil conditioner kebun tebu</a:t>
             </a:r>
             <a:br/>
             <a:r>
+              <a:rPr/>
               <a:t>• Kompos</a:t>
             </a:r>
             <a:br/>
             <a:r>
+              <a:rPr/>
               <a:t>• Revenue: 2–3%</a:t>
             </a:r>
           </a:p>
@@ -5755,13 +5857,14 @@
           <a:lstStyle/>
           <a:p>
             <a:pPr algn="ctr">
-              <a:defRPr sz="1000" b="1">
+              <a:defRPr sz="1300" b="1">
                 <a:solidFill>
                   <a:srgbClr val="FFFFFF"/>
                 </a:solidFill>
               </a:defRPr>
             </a:pPr>
             <a:r>
+              <a:rPr/>
               <a:t>Listrik Surplus (Co-gen)</a:t>
             </a:r>
           </a:p>
@@ -5790,7 +5893,7 @@
           <a:lstStyle/>
           <a:p>
             <a:pPr algn="ctr">
-              <a:defRPr sz="900" b="1">
+              <a:defRPr sz="1200" b="1">
                 <a:solidFill>
                   <a:srgbClr val="F9A825"/>
                 </a:solidFill>
@@ -5798,6 +5901,7 @@
               </a:defRPr>
             </a:pPr>
             <a:r>
+              <a:rPr/>
               <a:t>Kapasitas 3–8 MW</a:t>
             </a:r>
           </a:p>
@@ -5826,26 +5930,30 @@
           <a:lstStyle/>
           <a:p>
             <a:pPr algn="l">
-              <a:defRPr sz="900" b="0">
-                <a:solidFill>
-                  <a:srgbClr val="424242"/>
-                </a:solidFill>
-                <a:latin typeface="Calibri"/>
-              </a:defRPr>
-            </a:pPr>
-            <a:r>
+              <a:defRPr sz="1200" b="0">
+                <a:solidFill>
+                  <a:srgbClr val="424242"/>
+                </a:solidFill>
+                <a:latin typeface="Calibri"/>
+              </a:defRPr>
+            </a:pPr>
+            <a:r>
+              <a:rPr/>
               <a:t>• Dijual ke PLN (excess power)</a:t>
             </a:r>
             <a:br/>
             <a:r>
+              <a:rPr/>
               <a:t>• Bisa mengurangi biaya energi</a:t>
             </a:r>
             <a:br/>
             <a:r>
+              <a:rPr/>
               <a:t>• Green energy certificate</a:t>
             </a:r>
             <a:br/>
             <a:r>
+              <a:rPr/>
               <a:t>• Revenue: 3–5%</a:t>
             </a:r>
           </a:p>
@@ -5874,7 +5982,7 @@
           <a:lstStyle/>
           <a:p>
             <a:pPr algn="ctr">
-              <a:defRPr sz="1000" b="1">
+              <a:defRPr sz="1300" b="1">
                 <a:solidFill>
                   <a:srgbClr val="1B5E20"/>
                 </a:solidFill>
@@ -5882,6 +5990,7 @@
               </a:defRPr>
             </a:pPr>
             <a:r>
+              <a:rPr/>
               <a:t>Total kontribusi by-product: 15–25% dari revenue pabrik gula. Ini menjadikan pabrik gula sebagai industri circular economy — hampir tidak ada waste.</a:t>
             </a:r>
           </a:p>
@@ -5929,7 +6038,7 @@
           <a:lstStyle/>
           <a:p>
             <a:pPr algn="ctr">
-              <a:defRPr sz="1100" b="1">
+              <a:defRPr sz="1400" b="1">
                 <a:solidFill>
                   <a:srgbClr val="1B5E20"/>
                 </a:solidFill>
@@ -5937,6 +6046,7 @@
               </a:defRPr>
             </a:pPr>
             <a:r>
+              <a:rPr/>
               <a:t>Key Takeaway: By-product bukan limbah, tapi sumber pendapatan tambahan yang signifikan (15–25% revenue).</a:t>
             </a:r>
           </a:p>
@@ -5991,7 +6101,7 @@
           <a:lstStyle/>
           <a:p>
             <a:pPr algn="l">
-              <a:defRPr sz="2800" b="1">
+              <a:defRPr sz="3000" b="1">
                 <a:solidFill>
                   <a:srgbClr val="1B5E20"/>
                 </a:solidFill>
@@ -5999,6 +6109,7 @@
               </a:defRPr>
             </a:pPr>
             <a:r>
+              <a:rPr/>
               <a:t>Good Manufacturing Practice (GMP)</a:t>
             </a:r>
           </a:p>
@@ -6027,7 +6138,7 @@
           <a:lstStyle/>
           <a:p>
             <a:pPr algn="l">
-              <a:defRPr sz="1300" b="0">
+              <a:defRPr sz="1500" b="0">
                 <a:solidFill>
                   <a:srgbClr val="2E7D32"/>
                 </a:solidFill>
@@ -6035,6 +6146,7 @@
               </a:defRPr>
             </a:pPr>
             <a:r>
+              <a:rPr/>
               <a:t>Standar Produksi — Menjamin mutu dan keamanan pangan</a:t>
             </a:r>
           </a:p>
@@ -6063,7 +6175,7 @@
           <a:lstStyle/>
           <a:p>
             <a:pPr algn="l">
-              <a:defRPr sz="800" b="0">
+              <a:defRPr sz="1100" b="0">
                 <a:solidFill>
                   <a:srgbClr val="9E9E9E"/>
                 </a:solidFill>
@@ -6071,6 +6183,7 @@
               </a:defRPr>
             </a:pPr>
             <a:r>
+              <a:rPr/>
               <a:t>14 / 21  •  Overview Operasional &amp; Proses Produksi Pabrik Gula  |  Internal Use</a:t>
             </a:r>
           </a:p>
@@ -6102,14 +6215,15 @@
               <a:spcAft>
                 <a:spcPts val="400"/>
               </a:spcAft>
-              <a:defRPr sz="1000" b="1">
-                <a:solidFill>
-                  <a:srgbClr val="424242"/>
-                </a:solidFill>
-                <a:latin typeface="Calibri"/>
-              </a:defRPr>
-            </a:pPr>
-            <a:r>
+              <a:defRPr sz="1300" b="1">
+                <a:solidFill>
+                  <a:srgbClr val="424242"/>
+                </a:solidFill>
+                <a:latin typeface="Calibri"/>
+              </a:defRPr>
+            </a:pPr>
+            <a:r>
+              <a:rPr/>
               <a:t>Apa itu GMP?</a:t>
             </a:r>
           </a:p>
@@ -6118,14 +6232,15 @@
               <a:spcAft>
                 <a:spcPts val="400"/>
               </a:spcAft>
-              <a:defRPr sz="1000">
-                <a:solidFill>
-                  <a:srgbClr val="424242"/>
-                </a:solidFill>
-                <a:latin typeface="Calibri"/>
-              </a:defRPr>
-            </a:pPr>
-            <a:r>
+              <a:defRPr sz="1300">
+                <a:solidFill>
+                  <a:srgbClr val="424242"/>
+                </a:solidFill>
+                <a:latin typeface="Calibri"/>
+              </a:defRPr>
+            </a:pPr>
+            <a:r>
+              <a:rPr/>
               <a:t>Pedoman cara produksi yang baik untuk memastikan produk aman,</a:t>
             </a:r>
           </a:p>
@@ -6134,14 +6249,15 @@
               <a:spcAft>
                 <a:spcPts val="400"/>
               </a:spcAft>
-              <a:defRPr sz="1000">
-                <a:solidFill>
-                  <a:srgbClr val="424242"/>
-                </a:solidFill>
-                <a:latin typeface="Calibri"/>
-              </a:defRPr>
-            </a:pPr>
-            <a:r>
+              <a:defRPr sz="1300">
+                <a:solidFill>
+                  <a:srgbClr val="424242"/>
+                </a:solidFill>
+                <a:latin typeface="Calibri"/>
+              </a:defRPr>
+            </a:pPr>
+            <a:r>
+              <a:rPr/>
               <a:t>bermutu, dan konsisten — wajib untuk industri pangan (termasuk gula).</a:t>
             </a:r>
           </a:p>
@@ -6150,7 +6266,7 @@
               <a:spcAft>
                 <a:spcPts val="400"/>
               </a:spcAft>
-              <a:defRPr sz="1000">
+              <a:defRPr sz="1300">
                 <a:solidFill>
                   <a:srgbClr val="424242"/>
                 </a:solidFill>
@@ -6163,14 +6279,15 @@
               <a:spcAft>
                 <a:spcPts val="400"/>
               </a:spcAft>
-              <a:defRPr sz="1000">
-                <a:solidFill>
-                  <a:srgbClr val="424242"/>
-                </a:solidFill>
-                <a:latin typeface="Calibri"/>
-              </a:defRPr>
-            </a:pPr>
-            <a:r>
+              <a:defRPr sz="1300">
+                <a:solidFill>
+                  <a:srgbClr val="424242"/>
+                </a:solidFill>
+                <a:latin typeface="Calibri"/>
+              </a:defRPr>
+            </a:pPr>
+            <a:r>
+              <a:rPr/>
               <a:t>5 Pilar GMP di Pabrik Gula:</a:t>
             </a:r>
           </a:p>
@@ -6218,13 +6335,14 @@
           <a:lstStyle/>
           <a:p>
             <a:pPr algn="ctr">
-              <a:defRPr sz="900" b="1">
+              <a:defRPr sz="1200" b="1">
                 <a:solidFill>
                   <a:srgbClr val="1B5E20"/>
                 </a:solidFill>
               </a:defRPr>
             </a:pPr>
             <a:r>
+              <a:rPr/>
               <a:t>1. Bangunan &amp; Fasilitas</a:t>
             </a:r>
           </a:p>
@@ -6233,21 +6351,24 @@
               <a:spcBef>
                 <a:spcPts val="400"/>
               </a:spcBef>
-              <a:defRPr sz="800">
-                <a:solidFill>
-                  <a:srgbClr val="424242"/>
-                </a:solidFill>
-              </a:defRPr>
-            </a:pPr>
-            <a:r>
+              <a:defRPr sz="1100">
+                <a:solidFill>
+                  <a:srgbClr val="424242"/>
+                </a:solidFill>
+              </a:defRPr>
+            </a:pPr>
+            <a:r>
+              <a:rPr/>
               <a:t>• Desain higienis, mudah dibersihkan</a:t>
             </a:r>
             <a:br/>
             <a:r>
+              <a:rPr/>
               <a:t>• Alur proses searah (no cross-contamination)</a:t>
             </a:r>
             <a:br/>
             <a:r>
+              <a:rPr/>
               <a:t>• Ventilasi &amp; penerangan memadai</a:t>
             </a:r>
           </a:p>
@@ -6295,13 +6416,14 @@
           <a:lstStyle/>
           <a:p>
             <a:pPr algn="ctr">
-              <a:defRPr sz="900" b="1">
+              <a:defRPr sz="1200" b="1">
                 <a:solidFill>
                   <a:srgbClr val="1B5E20"/>
                 </a:solidFill>
               </a:defRPr>
             </a:pPr>
             <a:r>
+              <a:rPr/>
               <a:t>2. Peralatan &amp; Mesin</a:t>
             </a:r>
           </a:p>
@@ -6310,21 +6432,24 @@
               <a:spcBef>
                 <a:spcPts val="400"/>
               </a:spcBef>
-              <a:defRPr sz="800">
-                <a:solidFill>
-                  <a:srgbClr val="424242"/>
-                </a:solidFill>
-              </a:defRPr>
-            </a:pPr>
-            <a:r>
+              <a:defRPr sz="1100">
+                <a:solidFill>
+                  <a:srgbClr val="424242"/>
+                </a:solidFill>
+              </a:defRPr>
+            </a:pPr>
+            <a:r>
+              <a:rPr/>
               <a:t>• Food-grade material (stainless steel)</a:t>
             </a:r>
             <a:br/>
             <a:r>
+              <a:rPr/>
               <a:t>• Mudah dibersihkan &amp; dirawat</a:t>
             </a:r>
             <a:br/>
             <a:r>
+              <a:rPr/>
               <a:t>• Kalibrasi rutin alat ukur</a:t>
             </a:r>
           </a:p>
@@ -6372,13 +6497,14 @@
           <a:lstStyle/>
           <a:p>
             <a:pPr algn="ctr">
-              <a:defRPr sz="900" b="1">
+              <a:defRPr sz="1200" b="1">
                 <a:solidFill>
                   <a:srgbClr val="1B5E20"/>
                 </a:solidFill>
               </a:defRPr>
             </a:pPr>
             <a:r>
+              <a:rPr/>
               <a:t>3. Personel / SDM</a:t>
             </a:r>
           </a:p>
@@ -6387,21 +6513,24 @@
               <a:spcBef>
                 <a:spcPts val="400"/>
               </a:spcBef>
-              <a:defRPr sz="800">
-                <a:solidFill>
-                  <a:srgbClr val="424242"/>
-                </a:solidFill>
-              </a:defRPr>
-            </a:pPr>
-            <a:r>
+              <a:defRPr sz="1100">
+                <a:solidFill>
+                  <a:srgbClr val="424242"/>
+                </a:solidFill>
+              </a:defRPr>
+            </a:pPr>
+            <a:r>
+              <a:rPr/>
               <a:t>• Pelatihan hygiene &amp; GMP rutin</a:t>
             </a:r>
             <a:br/>
             <a:r>
+              <a:rPr/>
               <a:t>• APD lengkap di area produksi</a:t>
             </a:r>
             <a:br/>
             <a:r>
+              <a:rPr/>
               <a:t>• Pemeriksaan kesehatan berkala</a:t>
             </a:r>
           </a:p>
@@ -6449,13 +6578,14 @@
           <a:lstStyle/>
           <a:p>
             <a:pPr algn="ctr">
-              <a:defRPr sz="900" b="1">
+              <a:defRPr sz="1200" b="1">
                 <a:solidFill>
                   <a:srgbClr val="1B5E20"/>
                 </a:solidFill>
               </a:defRPr>
             </a:pPr>
             <a:r>
+              <a:rPr/>
               <a:t>4. Proses Produksi</a:t>
             </a:r>
           </a:p>
@@ -6464,21 +6594,24 @@
               <a:spcBef>
                 <a:spcPts val="400"/>
               </a:spcBef>
-              <a:defRPr sz="800">
-                <a:solidFill>
-                  <a:srgbClr val="424242"/>
-                </a:solidFill>
-              </a:defRPr>
-            </a:pPr>
-            <a:r>
+              <a:defRPr sz="1100">
+                <a:solidFill>
+                  <a:srgbClr val="424242"/>
+                </a:solidFill>
+              </a:defRPr>
+            </a:pPr>
+            <a:r>
+              <a:rPr/>
               <a:t>• SOP tertulis &amp; terdokumentasi</a:t>
             </a:r>
             <a:br/>
             <a:r>
+              <a:rPr/>
               <a:t>• Kontrol titik kritis (CCP)</a:t>
             </a:r>
             <a:br/>
             <a:r>
+              <a:rPr/>
               <a:t>• Traceability batch produksi</a:t>
             </a:r>
           </a:p>
@@ -6526,13 +6659,14 @@
           <a:lstStyle/>
           <a:p>
             <a:pPr algn="ctr">
-              <a:defRPr sz="900" b="1">
+              <a:defRPr sz="1200" b="1">
                 <a:solidFill>
                   <a:srgbClr val="1B5E20"/>
                 </a:solidFill>
               </a:defRPr>
             </a:pPr>
             <a:r>
+              <a:rPr/>
               <a:t>5. Sanitasi &amp; Pengendalian Hama</a:t>
             </a:r>
           </a:p>
@@ -6541,21 +6675,24 @@
               <a:spcBef>
                 <a:spcPts val="400"/>
               </a:spcBef>
-              <a:defRPr sz="800">
-                <a:solidFill>
-                  <a:srgbClr val="424242"/>
-                </a:solidFill>
-              </a:defRPr>
-            </a:pPr>
-            <a:r>
+              <a:defRPr sz="1100">
+                <a:solidFill>
+                  <a:srgbClr val="424242"/>
+                </a:solidFill>
+              </a:defRPr>
+            </a:pPr>
+            <a:r>
+              <a:rPr/>
               <a:t>• Jadwal pembersihan teratur</a:t>
             </a:r>
             <a:br/>
             <a:r>
+              <a:rPr/>
               <a:t>• Pest control terintegrasi</a:t>
             </a:r>
             <a:br/>
             <a:r>
+              <a:rPr/>
               <a:t>• Pengelolaan limbah cair &amp; padat</a:t>
             </a:r>
           </a:p>
@@ -6603,7 +6740,7 @@
           <a:lstStyle/>
           <a:p>
             <a:pPr algn="ctr">
-              <a:defRPr sz="1100" b="1">
+              <a:defRPr sz="1400" b="1">
                 <a:solidFill>
                   <a:srgbClr val="1B5E20"/>
                 </a:solidFill>
@@ -6611,6 +6748,7 @@
               </a:defRPr>
             </a:pPr>
             <a:r>
+              <a:rPr/>
               <a:t>Key Takeaway: GMP memastikan setiap tahap produksi menghasilkan gula yang aman &amp; konsisten — dari bahan baku hingga produk akhir.</a:t>
             </a:r>
           </a:p>
@@ -6665,7 +6803,7 @@
           <a:lstStyle/>
           <a:p>
             <a:pPr algn="l">
-              <a:defRPr sz="2800" b="1">
+              <a:defRPr sz="3000" b="1">
                 <a:solidFill>
                   <a:srgbClr val="1B5E20"/>
                 </a:solidFill>
@@ -6673,6 +6811,7 @@
               </a:defRPr>
             </a:pPr>
             <a:r>
+              <a:rPr/>
               <a:t>Quality Control (Pengendalian Mutu)</a:t>
             </a:r>
           </a:p>
@@ -6701,7 +6840,7 @@
           <a:lstStyle/>
           <a:p>
             <a:pPr algn="l">
-              <a:defRPr sz="1300" b="0">
+              <a:defRPr sz="1500" b="0">
                 <a:solidFill>
                   <a:srgbClr val="2E7D32"/>
                 </a:solidFill>
@@ -6709,6 +6848,7 @@
               </a:defRPr>
             </a:pPr>
             <a:r>
+              <a:rPr/>
               <a:t>Laboratorium &amp; Monitoring — Menjaga standar di setiap stasiun</a:t>
             </a:r>
           </a:p>
@@ -6737,7 +6877,7 @@
           <a:lstStyle/>
           <a:p>
             <a:pPr algn="l">
-              <a:defRPr sz="800" b="0">
+              <a:defRPr sz="1100" b="0">
                 <a:solidFill>
                   <a:srgbClr val="9E9E9E"/>
                 </a:solidFill>
@@ -6745,6 +6885,7 @@
               </a:defRPr>
             </a:pPr>
             <a:r>
+              <a:rPr/>
               <a:t>15 / 21  •  Overview Operasional &amp; Proses Produksi Pabrik Gula  |  Internal Use</a:t>
             </a:r>
           </a:p>
@@ -6776,14 +6917,15 @@
               <a:spcAft>
                 <a:spcPts val="400"/>
               </a:spcAft>
-              <a:defRPr sz="1000" b="1">
-                <a:solidFill>
-                  <a:srgbClr val="424242"/>
-                </a:solidFill>
-                <a:latin typeface="Calibri"/>
-              </a:defRPr>
-            </a:pPr>
-            <a:r>
+              <a:defRPr sz="1300" b="1">
+                <a:solidFill>
+                  <a:srgbClr val="424242"/>
+                </a:solidFill>
+                <a:latin typeface="Calibri"/>
+              </a:defRPr>
+            </a:pPr>
+            <a:r>
+              <a:rPr/>
               <a:t>Apa yang terjadi di proses ini?</a:t>
             </a:r>
           </a:p>
@@ -6792,7 +6934,7 @@
               <a:spcAft>
                 <a:spcPts val="400"/>
               </a:spcAft>
-              <a:defRPr sz="1000">
+              <a:defRPr sz="1300">
                 <a:solidFill>
                   <a:srgbClr val="424242"/>
                 </a:solidFill>
@@ -6805,14 +6947,15 @@
               <a:spcAft>
                 <a:spcPts val="400"/>
               </a:spcAft>
-              <a:defRPr sz="1000">
-                <a:solidFill>
-                  <a:srgbClr val="424242"/>
-                </a:solidFill>
-                <a:latin typeface="Calibri"/>
-              </a:defRPr>
-            </a:pPr>
-            <a:r>
+              <a:defRPr sz="1300">
+                <a:solidFill>
+                  <a:srgbClr val="424242"/>
+                </a:solidFill>
+                <a:latin typeface="Calibri"/>
+              </a:defRPr>
+            </a:pPr>
+            <a:r>
+              <a:rPr/>
               <a:t>Tim QC / laboratorium pabrik memantau kualitas di SETIAP stasiun proses,</a:t>
             </a:r>
           </a:p>
@@ -6821,14 +6964,15 @@
               <a:spcAft>
                 <a:spcPts val="400"/>
               </a:spcAft>
-              <a:defRPr sz="1000">
-                <a:solidFill>
-                  <a:srgbClr val="424242"/>
-                </a:solidFill>
-                <a:latin typeface="Calibri"/>
-              </a:defRPr>
-            </a:pPr>
-            <a:r>
+              <a:defRPr sz="1300">
+                <a:solidFill>
+                  <a:srgbClr val="424242"/>
+                </a:solidFill>
+                <a:latin typeface="Calibri"/>
+              </a:defRPr>
+            </a:pPr>
+            <a:r>
+              <a:rPr/>
               <a:t>dari tebu masuk hingga gula siap kirim.</a:t>
             </a:r>
           </a:p>
@@ -6837,7 +6981,7 @@
               <a:spcAft>
                 <a:spcPts val="400"/>
               </a:spcAft>
-              <a:defRPr sz="1000">
+              <a:defRPr sz="1300">
                 <a:solidFill>
                   <a:srgbClr val="424242"/>
                 </a:solidFill>
@@ -6850,14 +6994,15 @@
               <a:spcAft>
                 <a:spcPts val="400"/>
               </a:spcAft>
-              <a:defRPr sz="1000">
-                <a:solidFill>
-                  <a:srgbClr val="424242"/>
-                </a:solidFill>
-                <a:latin typeface="Calibri"/>
-              </a:defRPr>
-            </a:pPr>
-            <a:r>
+              <a:defRPr sz="1300">
+                <a:solidFill>
+                  <a:srgbClr val="424242"/>
+                </a:solidFill>
+                <a:latin typeface="Calibri"/>
+              </a:defRPr>
+            </a:pPr>
+            <a:r>
+              <a:rPr/>
               <a:t>Parameter yang Diuji di Setiap Titik:</a:t>
             </a:r>
           </a:p>
@@ -6905,13 +7050,14 @@
           <a:lstStyle/>
           <a:p>
             <a:pPr algn="ctr">
-              <a:defRPr sz="900" b="1">
+              <a:defRPr sz="1200" b="1">
                 <a:solidFill>
                   <a:srgbClr val="1B5E20"/>
                 </a:solidFill>
               </a:defRPr>
             </a:pPr>
             <a:r>
+              <a:rPr/>
               <a:t>Bahan Baku (Tebu)</a:t>
             </a:r>
           </a:p>
@@ -6920,13 +7066,14 @@
               <a:spcBef>
                 <a:spcPts val="300"/>
               </a:spcBef>
-              <a:defRPr sz="800">
-                <a:solidFill>
-                  <a:srgbClr val="424242"/>
-                </a:solidFill>
-              </a:defRPr>
-            </a:pPr>
-            <a:r>
+              <a:defRPr sz="1100">
+                <a:solidFill>
+                  <a:srgbClr val="424242"/>
+                </a:solidFill>
+              </a:defRPr>
+            </a:pPr>
+            <a:r>
+              <a:rPr/>
               <a:t>Pol, Brix, Trash %, Fiber %</a:t>
             </a:r>
           </a:p>
@@ -6974,13 +7121,14 @@
           <a:lstStyle/>
           <a:p>
             <a:pPr algn="ctr">
-              <a:defRPr sz="900" b="1">
+              <a:defRPr sz="1200" b="1">
                 <a:solidFill>
                   <a:srgbClr val="1B5E20"/>
                 </a:solidFill>
               </a:defRPr>
             </a:pPr>
             <a:r>
+              <a:rPr/>
               <a:t>Nira Mentah</a:t>
             </a:r>
           </a:p>
@@ -6989,13 +7137,14 @@
               <a:spcBef>
                 <a:spcPts val="300"/>
               </a:spcBef>
-              <a:defRPr sz="800">
-                <a:solidFill>
-                  <a:srgbClr val="424242"/>
-                </a:solidFill>
-              </a:defRPr>
-            </a:pPr>
-            <a:r>
+              <a:defRPr sz="1100">
+                <a:solidFill>
+                  <a:srgbClr val="424242"/>
+                </a:solidFill>
+              </a:defRPr>
+            </a:pPr>
+            <a:r>
+              <a:rPr/>
               <a:t>Brix, Pol, pH, Purity</a:t>
             </a:r>
           </a:p>
@@ -7043,13 +7192,14 @@
           <a:lstStyle/>
           <a:p>
             <a:pPr algn="ctr">
-              <a:defRPr sz="900" b="1">
+              <a:defRPr sz="1200" b="1">
                 <a:solidFill>
                   <a:srgbClr val="1B5E20"/>
                 </a:solidFill>
               </a:defRPr>
             </a:pPr>
             <a:r>
+              <a:rPr/>
               <a:t>Nira Jernih</a:t>
             </a:r>
           </a:p>
@@ -7058,13 +7208,14 @@
               <a:spcBef>
                 <a:spcPts val="300"/>
               </a:spcBef>
-              <a:defRPr sz="800">
-                <a:solidFill>
-                  <a:srgbClr val="424242"/>
-                </a:solidFill>
-              </a:defRPr>
-            </a:pPr>
-            <a:r>
+              <a:defRPr sz="1100">
+                <a:solidFill>
+                  <a:srgbClr val="424242"/>
+                </a:solidFill>
+              </a:defRPr>
+            </a:pPr>
+            <a:r>
+              <a:rPr/>
               <a:t>Turbidity, Color, pH</a:t>
             </a:r>
           </a:p>
@@ -7112,13 +7263,14 @@
           <a:lstStyle/>
           <a:p>
             <a:pPr algn="ctr">
-              <a:defRPr sz="900" b="1">
+              <a:defRPr sz="1200" b="1">
                 <a:solidFill>
                   <a:srgbClr val="1B5E20"/>
                 </a:solidFill>
               </a:defRPr>
             </a:pPr>
             <a:r>
+              <a:rPr/>
               <a:t>Nira Kental</a:t>
             </a:r>
           </a:p>
@@ -7127,13 +7279,14 @@
               <a:spcBef>
                 <a:spcPts val="300"/>
               </a:spcBef>
-              <a:defRPr sz="800">
-                <a:solidFill>
-                  <a:srgbClr val="424242"/>
-                </a:solidFill>
-              </a:defRPr>
-            </a:pPr>
-            <a:r>
+              <a:defRPr sz="1100">
+                <a:solidFill>
+                  <a:srgbClr val="424242"/>
+                </a:solidFill>
+              </a:defRPr>
+            </a:pPr>
+            <a:r>
+              <a:rPr/>
               <a:t>Brix (60-65%), Purity</a:t>
             </a:r>
           </a:p>
@@ -7181,13 +7334,14 @@
           <a:lstStyle/>
           <a:p>
             <a:pPr algn="ctr">
-              <a:defRPr sz="900" b="1">
+              <a:defRPr sz="1200" b="1">
                 <a:solidFill>
                   <a:srgbClr val="1B5E20"/>
                 </a:solidFill>
               </a:defRPr>
             </a:pPr>
             <a:r>
+              <a:rPr/>
               <a:t>Massecuite</a:t>
             </a:r>
           </a:p>
@@ -7196,13 +7350,14 @@
               <a:spcBef>
                 <a:spcPts val="300"/>
               </a:spcBef>
-              <a:defRPr sz="800">
-                <a:solidFill>
-                  <a:srgbClr val="424242"/>
-                </a:solidFill>
-              </a:defRPr>
-            </a:pPr>
-            <a:r>
+              <a:defRPr sz="1100">
+                <a:solidFill>
+                  <a:srgbClr val="424242"/>
+                </a:solidFill>
+              </a:defRPr>
+            </a:pPr>
+            <a:r>
+              <a:rPr/>
               <a:t>Brix, Crystal size, Purity</a:t>
             </a:r>
           </a:p>
@@ -7250,13 +7405,14 @@
           <a:lstStyle/>
           <a:p>
             <a:pPr algn="ctr">
-              <a:defRPr sz="900" b="1">
+              <a:defRPr sz="1200" b="1">
                 <a:solidFill>
                   <a:srgbClr val="1B5E20"/>
                 </a:solidFill>
               </a:defRPr>
             </a:pPr>
             <a:r>
+              <a:rPr/>
               <a:t>Gula Produk</a:t>
             </a:r>
           </a:p>
@@ -7265,13 +7421,14 @@
               <a:spcBef>
                 <a:spcPts val="300"/>
               </a:spcBef>
-              <a:defRPr sz="800">
-                <a:solidFill>
-                  <a:srgbClr val="424242"/>
-                </a:solidFill>
-              </a:defRPr>
-            </a:pPr>
-            <a:r>
+              <a:defRPr sz="1100">
+                <a:solidFill>
+                  <a:srgbClr val="424242"/>
+                </a:solidFill>
+              </a:defRPr>
+            </a:pPr>
+            <a:r>
+              <a:rPr/>
               <a:t>Pol ≥99,3%, ICUMSA, Moisture &lt;0,05%</a:t>
             </a:r>
           </a:p>
@@ -7319,13 +7476,14 @@
           <a:lstStyle/>
           <a:p>
             <a:pPr algn="ctr">
-              <a:defRPr sz="900" b="1">
+              <a:defRPr sz="1200" b="1">
                 <a:solidFill>
                   <a:srgbClr val="1B5E20"/>
                 </a:solidFill>
               </a:defRPr>
             </a:pPr>
             <a:r>
+              <a:rPr/>
               <a:t>Molasses</a:t>
             </a:r>
           </a:p>
@@ -7334,13 +7492,14 @@
               <a:spcBef>
                 <a:spcPts val="300"/>
               </a:spcBef>
-              <a:defRPr sz="800">
-                <a:solidFill>
-                  <a:srgbClr val="424242"/>
-                </a:solidFill>
-              </a:defRPr>
-            </a:pPr>
-            <a:r>
+              <a:defRPr sz="1100">
+                <a:solidFill>
+                  <a:srgbClr val="424242"/>
+                </a:solidFill>
+              </a:defRPr>
+            </a:pPr>
+            <a:r>
+              <a:rPr/>
               <a:t>Brix, Pol, Target Purity &lt;35%</a:t>
             </a:r>
           </a:p>
@@ -7388,13 +7547,14 @@
           <a:lstStyle/>
           <a:p>
             <a:pPr algn="ctr">
-              <a:defRPr sz="900" b="1">
+              <a:defRPr sz="1200" b="1">
                 <a:solidFill>
                   <a:srgbClr val="1B5E20"/>
                 </a:solidFill>
               </a:defRPr>
             </a:pPr>
             <a:r>
+              <a:rPr/>
               <a:t>Air Boiler</a:t>
             </a:r>
           </a:p>
@@ -7403,13 +7563,14 @@
               <a:spcBef>
                 <a:spcPts val="300"/>
               </a:spcBef>
-              <a:defRPr sz="800">
-                <a:solidFill>
-                  <a:srgbClr val="424242"/>
-                </a:solidFill>
-              </a:defRPr>
-            </a:pPr>
-            <a:r>
+              <a:defRPr sz="1100">
+                <a:solidFill>
+                  <a:srgbClr val="424242"/>
+                </a:solidFill>
+              </a:defRPr>
+            </a:pPr>
+            <a:r>
+              <a:rPr/>
               <a:t>Hardness, pH, TDS, Silica</a:t>
             </a:r>
           </a:p>
@@ -7457,7 +7618,7 @@
           <a:lstStyle/>
           <a:p>
             <a:pPr algn="ctr">
-              <a:defRPr sz="1100" b="1">
+              <a:defRPr sz="1400" b="1">
                 <a:solidFill>
                   <a:srgbClr val="1B5E20"/>
                 </a:solidFill>
@@ -7465,6 +7626,7 @@
               </a:defRPr>
             </a:pPr>
             <a:r>
+              <a:rPr/>
               <a:t>Key Takeaway: QC berjalan 24 jam — setiap 2 jam sampling dilakukan. Data lab = dasar keputusan operasional.</a:t>
             </a:r>
           </a:p>
@@ -7519,7 +7681,7 @@
           <a:lstStyle/>
           <a:p>
             <a:pPr algn="l">
-              <a:defRPr sz="2800" b="1">
+              <a:defRPr sz="3000" b="1">
                 <a:solidFill>
                   <a:srgbClr val="1B5E20"/>
                 </a:solidFill>
@@ -7527,6 +7689,7 @@
               </a:defRPr>
             </a:pPr>
             <a:r>
+              <a:rPr/>
               <a:t>Pengelolaan Limbah</a:t>
             </a:r>
           </a:p>
@@ -7555,7 +7718,7 @@
           <a:lstStyle/>
           <a:p>
             <a:pPr algn="l">
-              <a:defRPr sz="1300" b="0">
+              <a:defRPr sz="1500" b="0">
                 <a:solidFill>
                   <a:srgbClr val="2E7D32"/>
                 </a:solidFill>
@@ -7563,6 +7726,7 @@
               </a:defRPr>
             </a:pPr>
             <a:r>
+              <a:rPr/>
               <a:t>Waste Management — Mengelola dampak lingkungan</a:t>
             </a:r>
           </a:p>
@@ -7591,7 +7755,7 @@
           <a:lstStyle/>
           <a:p>
             <a:pPr algn="l">
-              <a:defRPr sz="800" b="0">
+              <a:defRPr sz="1100" b="0">
                 <a:solidFill>
                   <a:srgbClr val="9E9E9E"/>
                 </a:solidFill>
@@ -7599,6 +7763,7 @@
               </a:defRPr>
             </a:pPr>
             <a:r>
+              <a:rPr/>
               <a:t>16 / 21  •  Overview Operasional &amp; Proses Produksi Pabrik Gula  |  Internal Use</a:t>
             </a:r>
           </a:p>
@@ -7630,7 +7795,7 @@
               <a:spcAft>
                 <a:spcPts val="400"/>
               </a:spcAft>
-              <a:defRPr sz="1100" b="1">
+              <a:defRPr sz="1400" b="1">
                 <a:solidFill>
                   <a:srgbClr val="1B5E20"/>
                 </a:solidFill>
@@ -7638,6 +7803,7 @@
               </a:defRPr>
             </a:pPr>
             <a:r>
+              <a:rPr/>
               <a:t>Jenis Limbah Pabrik Gula &amp; Pengelolaannya:</a:t>
             </a:r>
           </a:p>
@@ -7685,13 +7851,14 @@
           <a:lstStyle/>
           <a:p>
             <a:pPr algn="ctr">
-              <a:defRPr sz="1100" b="1">
+              <a:defRPr sz="1400" b="1">
                 <a:solidFill>
                   <a:srgbClr val="2E7D32"/>
                 </a:solidFill>
               </a:defRPr>
             </a:pPr>
             <a:r>
+              <a:rPr/>
               <a:t>Limbah Cair</a:t>
             </a:r>
           </a:p>
@@ -7700,13 +7867,14 @@
               <a:spcBef>
                 <a:spcPts val="200"/>
               </a:spcBef>
-              <a:defRPr sz="900">
-                <a:solidFill>
-                  <a:srgbClr val="424242"/>
-                </a:solidFill>
-              </a:defRPr>
-            </a:pPr>
-            <a:r>
+              <a:defRPr sz="1200">
+                <a:solidFill>
+                  <a:srgbClr val="424242"/>
+                </a:solidFill>
+              </a:defRPr>
+            </a:pPr>
+            <a:r>
+              <a:rPr/>
               <a:t>Sumber: air pencucian, kondensor, boiler blowdown</a:t>
             </a:r>
           </a:p>
@@ -7715,13 +7883,14 @@
               <a:spcBef>
                 <a:spcPts val="200"/>
               </a:spcBef>
-              <a:defRPr sz="900">
-                <a:solidFill>
-                  <a:srgbClr val="424242"/>
-                </a:solidFill>
-              </a:defRPr>
-            </a:pPr>
-            <a:r>
+              <a:defRPr sz="1200">
+                <a:solidFill>
+                  <a:srgbClr val="424242"/>
+                </a:solidFill>
+              </a:defRPr>
+            </a:pPr>
+            <a:r>
+              <a:rPr/>
               <a:t>Penanganan:</a:t>
             </a:r>
           </a:p>
@@ -7730,13 +7899,14 @@
               <a:spcBef>
                 <a:spcPts val="200"/>
               </a:spcBef>
-              <a:defRPr sz="900">
-                <a:solidFill>
-                  <a:srgbClr val="424242"/>
-                </a:solidFill>
-              </a:defRPr>
-            </a:pPr>
-            <a:r>
+              <a:defRPr sz="1200">
+                <a:solidFill>
+                  <a:srgbClr val="424242"/>
+                </a:solidFill>
+              </a:defRPr>
+            </a:pPr>
+            <a:r>
+              <a:rPr/>
               <a:t>• IPAL (Instalasi Pengolahan Air Limbah)</a:t>
             </a:r>
           </a:p>
@@ -7745,13 +7915,14 @@
               <a:spcBef>
                 <a:spcPts val="200"/>
               </a:spcBef>
-              <a:defRPr sz="900">
-                <a:solidFill>
-                  <a:srgbClr val="424242"/>
-                </a:solidFill>
-              </a:defRPr>
-            </a:pPr>
-            <a:r>
+              <a:defRPr sz="1200">
+                <a:solidFill>
+                  <a:srgbClr val="424242"/>
+                </a:solidFill>
+              </a:defRPr>
+            </a:pPr>
+            <a:r>
+              <a:rPr/>
               <a:t>• Sistem: screening → equalisasi → aerasi → clarifier</a:t>
             </a:r>
           </a:p>
@@ -7760,13 +7931,14 @@
               <a:spcBef>
                 <a:spcPts val="200"/>
               </a:spcBef>
-              <a:defRPr sz="900">
-                <a:solidFill>
-                  <a:srgbClr val="424242"/>
-                </a:solidFill>
-              </a:defRPr>
-            </a:pPr>
-            <a:r>
+              <a:defRPr sz="1200">
+                <a:solidFill>
+                  <a:srgbClr val="424242"/>
+                </a:solidFill>
+              </a:defRPr>
+            </a:pPr>
+            <a:r>
+              <a:rPr/>
               <a:t>• BOD/COD diturunkan sebelum dibuang</a:t>
             </a:r>
           </a:p>
@@ -7775,13 +7947,14 @@
               <a:spcBef>
                 <a:spcPts val="200"/>
               </a:spcBef>
-              <a:defRPr sz="900">
-                <a:solidFill>
-                  <a:srgbClr val="424242"/>
-                </a:solidFill>
-              </a:defRPr>
-            </a:pPr>
-            <a:r>
+              <a:defRPr sz="1200">
+                <a:solidFill>
+                  <a:srgbClr val="424242"/>
+                </a:solidFill>
+              </a:defRPr>
+            </a:pPr>
+            <a:r>
+              <a:rPr/>
               <a:t>• Target: sesuai baku mutu Permen LH</a:t>
             </a:r>
           </a:p>
@@ -7790,13 +7963,14 @@
               <a:spcBef>
                 <a:spcPts val="200"/>
               </a:spcBef>
-              <a:defRPr sz="900">
-                <a:solidFill>
-                  <a:srgbClr val="424242"/>
-                </a:solidFill>
-              </a:defRPr>
-            </a:pPr>
-            <a:r>
+              <a:defRPr sz="1200">
+                <a:solidFill>
+                  <a:srgbClr val="424242"/>
+                </a:solidFill>
+              </a:defRPr>
+            </a:pPr>
+            <a:r>
+              <a:rPr/>
               <a:t>• Bisa digunakan ulang untuk irigasi kebun</a:t>
             </a:r>
           </a:p>
@@ -7844,13 +8018,14 @@
           <a:lstStyle/>
           <a:p>
             <a:pPr algn="ctr">
-              <a:defRPr sz="1100" b="1">
+              <a:defRPr sz="1400" b="1">
                 <a:solidFill>
                   <a:srgbClr val="6D4C41"/>
                 </a:solidFill>
               </a:defRPr>
             </a:pPr>
             <a:r>
+              <a:rPr/>
               <a:t>Limbah Padat</a:t>
             </a:r>
           </a:p>
@@ -7859,13 +8034,14 @@
               <a:spcBef>
                 <a:spcPts val="200"/>
               </a:spcBef>
-              <a:defRPr sz="900">
-                <a:solidFill>
-                  <a:srgbClr val="424242"/>
-                </a:solidFill>
-              </a:defRPr>
-            </a:pPr>
-            <a:r>
+              <a:defRPr sz="1200">
+                <a:solidFill>
+                  <a:srgbClr val="424242"/>
+                </a:solidFill>
+              </a:defRPr>
+            </a:pPr>
+            <a:r>
+              <a:rPr/>
               <a:t>Sumber: blotong, abu boiler, trash tebu</a:t>
             </a:r>
           </a:p>
@@ -7874,13 +8050,14 @@
               <a:spcBef>
                 <a:spcPts val="200"/>
               </a:spcBef>
-              <a:defRPr sz="900">
-                <a:solidFill>
-                  <a:srgbClr val="424242"/>
-                </a:solidFill>
-              </a:defRPr>
-            </a:pPr>
-            <a:r>
+              <a:defRPr sz="1200">
+                <a:solidFill>
+                  <a:srgbClr val="424242"/>
+                </a:solidFill>
+              </a:defRPr>
+            </a:pPr>
+            <a:r>
+              <a:rPr/>
               <a:t>Penanganan:</a:t>
             </a:r>
           </a:p>
@@ -7889,13 +8066,14 @@
               <a:spcBef>
                 <a:spcPts val="200"/>
               </a:spcBef>
-              <a:defRPr sz="900">
-                <a:solidFill>
-                  <a:srgbClr val="424242"/>
-                </a:solidFill>
-              </a:defRPr>
-            </a:pPr>
-            <a:r>
+              <a:defRPr sz="1200">
+                <a:solidFill>
+                  <a:srgbClr val="424242"/>
+                </a:solidFill>
+              </a:defRPr>
+            </a:pPr>
+            <a:r>
+              <a:rPr/>
               <a:t>• Blotong → pupuk organik / kompos</a:t>
             </a:r>
           </a:p>
@@ -7904,13 +8082,14 @@
               <a:spcBef>
                 <a:spcPts val="200"/>
               </a:spcBef>
-              <a:defRPr sz="900">
-                <a:solidFill>
-                  <a:srgbClr val="424242"/>
-                </a:solidFill>
-              </a:defRPr>
-            </a:pPr>
-            <a:r>
+              <a:defRPr sz="1200">
+                <a:solidFill>
+                  <a:srgbClr val="424242"/>
+                </a:solidFill>
+              </a:defRPr>
+            </a:pPr>
+            <a:r>
+              <a:rPr/>
               <a:t>• Abu boiler (fly ash) → campuran pupuk / landfill</a:t>
             </a:r>
           </a:p>
@@ -7919,13 +8098,14 @@
               <a:spcBef>
                 <a:spcPts val="200"/>
               </a:spcBef>
-              <a:defRPr sz="900">
-                <a:solidFill>
-                  <a:srgbClr val="424242"/>
-                </a:solidFill>
-              </a:defRPr>
-            </a:pPr>
-            <a:r>
+              <a:defRPr sz="1200">
+                <a:solidFill>
+                  <a:srgbClr val="424242"/>
+                </a:solidFill>
+              </a:defRPr>
+            </a:pPr>
+            <a:r>
+              <a:rPr/>
               <a:t>• Trash → dikembalikan ke lahan sebagai mulsa</a:t>
             </a:r>
           </a:p>
@@ -7934,13 +8114,14 @@
               <a:spcBef>
                 <a:spcPts val="200"/>
               </a:spcBef>
-              <a:defRPr sz="900">
-                <a:solidFill>
-                  <a:srgbClr val="424242"/>
-                </a:solidFill>
-              </a:defRPr>
-            </a:pPr>
-            <a:r>
+              <a:defRPr sz="1200">
+                <a:solidFill>
+                  <a:srgbClr val="424242"/>
+                </a:solidFill>
+              </a:defRPr>
+            </a:pPr>
+            <a:r>
+              <a:rPr/>
               <a:t>• Zero waste to landfill (target modern)</a:t>
             </a:r>
           </a:p>
@@ -7949,13 +8130,14 @@
               <a:spcBef>
                 <a:spcPts val="200"/>
               </a:spcBef>
-              <a:defRPr sz="900">
-                <a:solidFill>
-                  <a:srgbClr val="424242"/>
-                </a:solidFill>
-              </a:defRPr>
-            </a:pPr>
-            <a:r>
+              <a:defRPr sz="1200">
+                <a:solidFill>
+                  <a:srgbClr val="424242"/>
+                </a:solidFill>
+              </a:defRPr>
+            </a:pPr>
+            <a:r>
+              <a:rPr/>
               <a:t>• Bagasse habis dipakai sebagai bahan bakar</a:t>
             </a:r>
           </a:p>
@@ -8003,13 +8185,14 @@
           <a:lstStyle/>
           <a:p>
             <a:pPr algn="ctr">
-              <a:defRPr sz="1100" b="1">
-                <a:solidFill>
-                  <a:srgbClr val="424242"/>
-                </a:solidFill>
-              </a:defRPr>
-            </a:pPr>
-            <a:r>
+              <a:defRPr sz="1400" b="1">
+                <a:solidFill>
+                  <a:srgbClr val="424242"/>
+                </a:solidFill>
+              </a:defRPr>
+            </a:pPr>
+            <a:r>
+              <a:rPr/>
               <a:t>Emisi Gas (Udara)</a:t>
             </a:r>
           </a:p>
@@ -8018,13 +8201,14 @@
               <a:spcBef>
                 <a:spcPts val="200"/>
               </a:spcBef>
-              <a:defRPr sz="900">
-                <a:solidFill>
-                  <a:srgbClr val="424242"/>
-                </a:solidFill>
-              </a:defRPr>
-            </a:pPr>
-            <a:r>
+              <a:defRPr sz="1200">
+                <a:solidFill>
+                  <a:srgbClr val="424242"/>
+                </a:solidFill>
+              </a:defRPr>
+            </a:pPr>
+            <a:r>
+              <a:rPr/>
               <a:t>Sumber: cerobong boiler, debu pengering</a:t>
             </a:r>
           </a:p>
@@ -8033,13 +8217,14 @@
               <a:spcBef>
                 <a:spcPts val="200"/>
               </a:spcBef>
-              <a:defRPr sz="900">
-                <a:solidFill>
-                  <a:srgbClr val="424242"/>
-                </a:solidFill>
-              </a:defRPr>
-            </a:pPr>
-            <a:r>
+              <a:defRPr sz="1200">
+                <a:solidFill>
+                  <a:srgbClr val="424242"/>
+                </a:solidFill>
+              </a:defRPr>
+            </a:pPr>
+            <a:r>
+              <a:rPr/>
               <a:t>Penanganan:</a:t>
             </a:r>
           </a:p>
@@ -8048,13 +8233,14 @@
               <a:spcBef>
                 <a:spcPts val="200"/>
               </a:spcBef>
-              <a:defRPr sz="900">
-                <a:solidFill>
-                  <a:srgbClr val="424242"/>
-                </a:solidFill>
-              </a:defRPr>
-            </a:pPr>
-            <a:r>
+              <a:defRPr sz="1200">
+                <a:solidFill>
+                  <a:srgbClr val="424242"/>
+                </a:solidFill>
+              </a:defRPr>
+            </a:pPr>
+            <a:r>
+              <a:rPr/>
               <a:t>• Wet scrubber / cyclone pada cerobong</a:t>
             </a:r>
           </a:p>
@@ -8063,13 +8249,14 @@
               <a:spcBef>
                 <a:spcPts val="200"/>
               </a:spcBef>
-              <a:defRPr sz="900">
-                <a:solidFill>
-                  <a:srgbClr val="424242"/>
-                </a:solidFill>
-              </a:defRPr>
-            </a:pPr>
-            <a:r>
+              <a:defRPr sz="1200">
+                <a:solidFill>
+                  <a:srgbClr val="424242"/>
+                </a:solidFill>
+              </a:defRPr>
+            </a:pPr>
+            <a:r>
+              <a:rPr/>
               <a:t>• Electrostatic precipitator (ESP)</a:t>
             </a:r>
           </a:p>
@@ -8078,13 +8265,14 @@
               <a:spcBef>
                 <a:spcPts val="200"/>
               </a:spcBef>
-              <a:defRPr sz="900">
-                <a:solidFill>
-                  <a:srgbClr val="424242"/>
-                </a:solidFill>
-              </a:defRPr>
-            </a:pPr>
-            <a:r>
+              <a:defRPr sz="1200">
+                <a:solidFill>
+                  <a:srgbClr val="424242"/>
+                </a:solidFill>
+              </a:defRPr>
+            </a:pPr>
+            <a:r>
+              <a:rPr/>
               <a:t>• Monitoring emisi berkala (PM, SO₂, NOx)</a:t>
             </a:r>
           </a:p>
@@ -8093,13 +8281,14 @@
               <a:spcBef>
                 <a:spcPts val="200"/>
               </a:spcBef>
-              <a:defRPr sz="900">
-                <a:solidFill>
-                  <a:srgbClr val="424242"/>
-                </a:solidFill>
-              </a:defRPr>
-            </a:pPr>
-            <a:r>
+              <a:defRPr sz="1200">
+                <a:solidFill>
+                  <a:srgbClr val="424242"/>
+                </a:solidFill>
+              </a:defRPr>
+            </a:pPr>
+            <a:r>
+              <a:rPr/>
               <a:t>• Target: di bawah baku mutu emisi</a:t>
             </a:r>
           </a:p>
@@ -8108,13 +8297,14 @@
               <a:spcBef>
                 <a:spcPts val="200"/>
               </a:spcBef>
-              <a:defRPr sz="900">
-                <a:solidFill>
-                  <a:srgbClr val="424242"/>
-                </a:solidFill>
-              </a:defRPr>
-            </a:pPr>
-            <a:r>
+              <a:defRPr sz="1200">
+                <a:solidFill>
+                  <a:srgbClr val="424242"/>
+                </a:solidFill>
+              </a:defRPr>
+            </a:pPr>
+            <a:r>
+              <a:rPr/>
               <a:t>• Bag filter pada area drying &amp; packaging</a:t>
             </a:r>
           </a:p>
@@ -8162,7 +8352,7 @@
           <a:lstStyle/>
           <a:p>
             <a:pPr algn="ctr">
-              <a:defRPr sz="1100" b="1">
+              <a:defRPr sz="1400" b="1">
                 <a:solidFill>
                   <a:srgbClr val="1B5E20"/>
                 </a:solidFill>
@@ -8170,6 +8360,7 @@
               </a:defRPr>
             </a:pPr>
             <a:r>
+              <a:rPr/>
               <a:t>Key Takeaway: Pabrik gula modern menerapkan prinsip zero waste — semua limbah diolah menjadi produk bernilai atau dibuang sesuai standar.</a:t>
             </a:r>
           </a:p>
@@ -8224,7 +8415,7 @@
           <a:lstStyle/>
           <a:p>
             <a:pPr algn="l">
-              <a:defRPr sz="2800" b="1">
+              <a:defRPr sz="3000" b="1">
                 <a:solidFill>
                   <a:srgbClr val="1B5E20"/>
                 </a:solidFill>
@@ -8232,6 +8423,7 @@
               </a:defRPr>
             </a:pPr>
             <a:r>
+              <a:rPr/>
               <a:t>Sustainability &amp; Efisiensi Energi</a:t>
             </a:r>
           </a:p>
@@ -8260,7 +8452,7 @@
           <a:lstStyle/>
           <a:p>
             <a:pPr algn="l">
-              <a:defRPr sz="1300" b="0">
+              <a:defRPr sz="1500" b="0">
                 <a:solidFill>
                   <a:srgbClr val="2E7D32"/>
                 </a:solidFill>
@@ -8268,6 +8460,7 @@
               </a:defRPr>
             </a:pPr>
             <a:r>
+              <a:rPr/>
               <a:t>Keberlanjutan — Menyeimbangkan produksi dan lingkungan</a:t>
             </a:r>
           </a:p>
@@ -8296,7 +8489,7 @@
           <a:lstStyle/>
           <a:p>
             <a:pPr algn="l">
-              <a:defRPr sz="800" b="0">
+              <a:defRPr sz="1100" b="0">
                 <a:solidFill>
                   <a:srgbClr val="9E9E9E"/>
                 </a:solidFill>
@@ -8304,6 +8497,7 @@
               </a:defRPr>
             </a:pPr>
             <a:r>
+              <a:rPr/>
               <a:t>17 / 21  •  Overview Operasional &amp; Proses Produksi Pabrik Gula  |  Internal Use</a:t>
             </a:r>
           </a:p>
@@ -8335,14 +8529,15 @@
               <a:spcAft>
                 <a:spcPts val="400"/>
               </a:spcAft>
-              <a:defRPr sz="1000" b="1">
-                <a:solidFill>
-                  <a:srgbClr val="424242"/>
-                </a:solidFill>
-                <a:latin typeface="Calibri"/>
-              </a:defRPr>
-            </a:pPr>
-            <a:r>
+              <a:defRPr sz="1300" b="1">
+                <a:solidFill>
+                  <a:srgbClr val="424242"/>
+                </a:solidFill>
+                <a:latin typeface="Calibri"/>
+              </a:defRPr>
+            </a:pPr>
+            <a:r>
+              <a:rPr/>
               <a:t>Mengapa Sustainability Penting di Pabrik Gula?</a:t>
             </a:r>
           </a:p>
@@ -8351,7 +8546,7 @@
               <a:spcAft>
                 <a:spcPts val="400"/>
               </a:spcAft>
-              <a:defRPr sz="1000">
+              <a:defRPr sz="1300">
                 <a:solidFill>
                   <a:srgbClr val="424242"/>
                 </a:solidFill>
@@ -8364,14 +8559,15 @@
               <a:spcAft>
                 <a:spcPts val="400"/>
               </a:spcAft>
-              <a:defRPr sz="1000">
-                <a:solidFill>
-                  <a:srgbClr val="424242"/>
-                </a:solidFill>
-                <a:latin typeface="Calibri"/>
-              </a:defRPr>
-            </a:pPr>
-            <a:r>
+              <a:defRPr sz="1300">
+                <a:solidFill>
+                  <a:srgbClr val="424242"/>
+                </a:solidFill>
+                <a:latin typeface="Calibri"/>
+              </a:defRPr>
+            </a:pPr>
+            <a:r>
+              <a:rPr/>
               <a:t>Pabrik gula memiliki potensi besar untuk menjadi industri berkelanjutan</a:t>
             </a:r>
           </a:p>
@@ -8380,14 +8576,15 @@
               <a:spcAft>
                 <a:spcPts val="400"/>
               </a:spcAft>
-              <a:defRPr sz="1000">
-                <a:solidFill>
-                  <a:srgbClr val="424242"/>
-                </a:solidFill>
-                <a:latin typeface="Calibri"/>
-              </a:defRPr>
-            </a:pPr>
-            <a:r>
+              <a:defRPr sz="1300">
+                <a:solidFill>
+                  <a:srgbClr val="424242"/>
+                </a:solidFill>
+                <a:latin typeface="Calibri"/>
+              </a:defRPr>
+            </a:pPr>
+            <a:r>
+              <a:rPr/>
               <a:t>karena sifat alamiahnya yang circular (produk samping = bahan baku kembali).</a:t>
             </a:r>
           </a:p>
@@ -8396,7 +8593,7 @@
               <a:spcAft>
                 <a:spcPts val="400"/>
               </a:spcAft>
-              <a:defRPr sz="1000">
+              <a:defRPr sz="1300">
                 <a:solidFill>
                   <a:srgbClr val="424242"/>
                 </a:solidFill>
@@ -8409,14 +8606,15 @@
               <a:spcAft>
                 <a:spcPts val="400"/>
               </a:spcAft>
-              <a:defRPr sz="1000">
-                <a:solidFill>
-                  <a:srgbClr val="424242"/>
-                </a:solidFill>
-                <a:latin typeface="Calibri"/>
-              </a:defRPr>
-            </a:pPr>
-            <a:r>
+              <a:defRPr sz="1300">
+                <a:solidFill>
+                  <a:srgbClr val="424242"/>
+                </a:solidFill>
+                <a:latin typeface="Calibri"/>
+              </a:defRPr>
+            </a:pPr>
+            <a:r>
+              <a:rPr/>
               <a:t>Aspek Sustainability di Pabrik Gula:</a:t>
             </a:r>
           </a:p>
@@ -8464,13 +8662,14 @@
           <a:lstStyle/>
           <a:p>
             <a:pPr algn="ctr">
-              <a:defRPr sz="1000" b="1">
+              <a:defRPr sz="1300" b="1">
                 <a:solidFill>
                   <a:srgbClr val="1B5E20"/>
                 </a:solidFill>
               </a:defRPr>
             </a:pPr>
             <a:r>
+              <a:rPr/>
               <a:t>Energi Terbarukan</a:t>
             </a:r>
           </a:p>
@@ -8479,13 +8678,14 @@
               <a:spcBef>
                 <a:spcPts val="200"/>
               </a:spcBef>
-              <a:defRPr sz="900">
-                <a:solidFill>
-                  <a:srgbClr val="424242"/>
-                </a:solidFill>
-              </a:defRPr>
-            </a:pPr>
-            <a:r>
+              <a:defRPr sz="1200">
+                <a:solidFill>
+                  <a:srgbClr val="424242"/>
+                </a:solidFill>
+              </a:defRPr>
+            </a:pPr>
+            <a:r>
+              <a:rPr/>
               <a:t>• Bagasse sebagai biomass fuel (carbon neutral)</a:t>
             </a:r>
           </a:p>
@@ -8494,13 +8694,14 @@
               <a:spcBef>
                 <a:spcPts val="200"/>
               </a:spcBef>
-              <a:defRPr sz="900">
-                <a:solidFill>
-                  <a:srgbClr val="424242"/>
-                </a:solidFill>
-              </a:defRPr>
-            </a:pPr>
-            <a:r>
+              <a:defRPr sz="1200">
+                <a:solidFill>
+                  <a:srgbClr val="424242"/>
+                </a:solidFill>
+              </a:defRPr>
+            </a:pPr>
+            <a:r>
+              <a:rPr/>
               <a:t>• Co-generation: listrik dari uap boiler</a:t>
             </a:r>
           </a:p>
@@ -8509,13 +8710,14 @@
               <a:spcBef>
                 <a:spcPts val="200"/>
               </a:spcBef>
-              <a:defRPr sz="900">
-                <a:solidFill>
-                  <a:srgbClr val="424242"/>
-                </a:solidFill>
-              </a:defRPr>
-            </a:pPr>
-            <a:r>
+              <a:defRPr sz="1200">
+                <a:solidFill>
+                  <a:srgbClr val="424242"/>
+                </a:solidFill>
+              </a:defRPr>
+            </a:pPr>
+            <a:r>
+              <a:rPr/>
               <a:t>• Potensi solar panel di lahan idle</a:t>
             </a:r>
           </a:p>
@@ -8524,13 +8726,14 @@
               <a:spcBef>
                 <a:spcPts val="200"/>
               </a:spcBef>
-              <a:defRPr sz="900">
-                <a:solidFill>
-                  <a:srgbClr val="424242"/>
-                </a:solidFill>
-              </a:defRPr>
-            </a:pPr>
-            <a:r>
+              <a:defRPr sz="1200">
+                <a:solidFill>
+                  <a:srgbClr val="424242"/>
+                </a:solidFill>
+              </a:defRPr>
+            </a:pPr>
+            <a:r>
+              <a:rPr/>
               <a:t>• Target: energy self-sufficient</a:t>
             </a:r>
           </a:p>
@@ -8578,13 +8781,14 @@
           <a:lstStyle/>
           <a:p>
             <a:pPr algn="ctr">
-              <a:defRPr sz="1000" b="1">
+              <a:defRPr sz="1300" b="1">
                 <a:solidFill>
                   <a:srgbClr val="1B5E20"/>
                 </a:solidFill>
               </a:defRPr>
             </a:pPr>
             <a:r>
+              <a:rPr/>
               <a:t>Efisiensi Air</a:t>
             </a:r>
           </a:p>
@@ -8593,13 +8797,14 @@
               <a:spcBef>
                 <a:spcPts val="200"/>
               </a:spcBef>
-              <a:defRPr sz="900">
-                <a:solidFill>
-                  <a:srgbClr val="424242"/>
-                </a:solidFill>
-              </a:defRPr>
-            </a:pPr>
-            <a:r>
+              <a:defRPr sz="1200">
+                <a:solidFill>
+                  <a:srgbClr val="424242"/>
+                </a:solidFill>
+              </a:defRPr>
+            </a:pPr>
+            <a:r>
+              <a:rPr/>
               <a:t>• Recycle condensate untuk boiler feed water</a:t>
             </a:r>
           </a:p>
@@ -8608,13 +8813,14 @@
               <a:spcBef>
                 <a:spcPts val="200"/>
               </a:spcBef>
-              <a:defRPr sz="900">
-                <a:solidFill>
-                  <a:srgbClr val="424242"/>
-                </a:solidFill>
-              </a:defRPr>
-            </a:pPr>
-            <a:r>
+              <a:defRPr sz="1200">
+                <a:solidFill>
+                  <a:srgbClr val="424242"/>
+                </a:solidFill>
+              </a:defRPr>
+            </a:pPr>
+            <a:r>
+              <a:rPr/>
               <a:t>• Reuse air proses untuk irigasi</a:t>
             </a:r>
           </a:p>
@@ -8623,13 +8829,14 @@
               <a:spcBef>
                 <a:spcPts val="200"/>
               </a:spcBef>
-              <a:defRPr sz="900">
-                <a:solidFill>
-                  <a:srgbClr val="424242"/>
-                </a:solidFill>
-              </a:defRPr>
-            </a:pPr>
-            <a:r>
+              <a:defRPr sz="1200">
+                <a:solidFill>
+                  <a:srgbClr val="424242"/>
+                </a:solidFill>
+              </a:defRPr>
+            </a:pPr>
+            <a:r>
+              <a:rPr/>
               <a:t>• Minimasi konsumsi air bersih</a:t>
             </a:r>
           </a:p>
@@ -8638,13 +8845,14 @@
               <a:spcBef>
                 <a:spcPts val="200"/>
               </a:spcBef>
-              <a:defRPr sz="900">
-                <a:solidFill>
-                  <a:srgbClr val="424242"/>
-                </a:solidFill>
-              </a:defRPr>
-            </a:pPr>
-            <a:r>
+              <a:defRPr sz="1200">
+                <a:solidFill>
+                  <a:srgbClr val="424242"/>
+                </a:solidFill>
+              </a:defRPr>
+            </a:pPr>
+            <a:r>
+              <a:rPr/>
               <a:t>• Water footprint tracking</a:t>
             </a:r>
           </a:p>
@@ -8692,13 +8900,14 @@
           <a:lstStyle/>
           <a:p>
             <a:pPr algn="ctr">
-              <a:defRPr sz="1000" b="1">
+              <a:defRPr sz="1300" b="1">
                 <a:solidFill>
                   <a:srgbClr val="1B5E20"/>
                 </a:solidFill>
               </a:defRPr>
             </a:pPr>
             <a:r>
+              <a:rPr/>
               <a:t>Circular Economy</a:t>
             </a:r>
           </a:p>
@@ -8707,13 +8916,14 @@
               <a:spcBef>
                 <a:spcPts val="200"/>
               </a:spcBef>
-              <a:defRPr sz="900">
-                <a:solidFill>
-                  <a:srgbClr val="424242"/>
-                </a:solidFill>
-              </a:defRPr>
-            </a:pPr>
-            <a:r>
+              <a:defRPr sz="1200">
+                <a:solidFill>
+                  <a:srgbClr val="424242"/>
+                </a:solidFill>
+              </a:defRPr>
+            </a:pPr>
+            <a:r>
+              <a:rPr/>
               <a:t>• Blotong → pupuk → kembali ke kebun</a:t>
             </a:r>
           </a:p>
@@ -8722,13 +8932,14 @@
               <a:spcBef>
                 <a:spcPts val="200"/>
               </a:spcBef>
-              <a:defRPr sz="900">
-                <a:solidFill>
-                  <a:srgbClr val="424242"/>
-                </a:solidFill>
-              </a:defRPr>
-            </a:pPr>
-            <a:r>
+              <a:defRPr sz="1200">
+                <a:solidFill>
+                  <a:srgbClr val="424242"/>
+                </a:solidFill>
+              </a:defRPr>
+            </a:pPr>
+            <a:r>
+              <a:rPr/>
               <a:t>• Molasses → industri turunan</a:t>
             </a:r>
           </a:p>
@@ -8737,13 +8948,14 @@
               <a:spcBef>
                 <a:spcPts val="200"/>
               </a:spcBef>
-              <a:defRPr sz="900">
-                <a:solidFill>
-                  <a:srgbClr val="424242"/>
-                </a:solidFill>
-              </a:defRPr>
-            </a:pPr>
-            <a:r>
+              <a:defRPr sz="1200">
+                <a:solidFill>
+                  <a:srgbClr val="424242"/>
+                </a:solidFill>
+              </a:defRPr>
+            </a:pPr>
+            <a:r>
+              <a:rPr/>
               <a:t>• Abu → soil amendment</a:t>
             </a:r>
           </a:p>
@@ -8752,13 +8964,14 @@
               <a:spcBef>
                 <a:spcPts val="200"/>
               </a:spcBef>
-              <a:defRPr sz="900">
-                <a:solidFill>
-                  <a:srgbClr val="424242"/>
-                </a:solidFill>
-              </a:defRPr>
-            </a:pPr>
-            <a:r>
+              <a:defRPr sz="1200">
+                <a:solidFill>
+                  <a:srgbClr val="424242"/>
+                </a:solidFill>
+              </a:defRPr>
+            </a:pPr>
+            <a:r>
+              <a:rPr/>
               <a:t>• Hampir zero waste</a:t>
             </a:r>
           </a:p>
@@ -8806,13 +9019,14 @@
           <a:lstStyle/>
           <a:p>
             <a:pPr algn="ctr">
-              <a:defRPr sz="1000" b="1">
+              <a:defRPr sz="1300" b="1">
                 <a:solidFill>
                   <a:srgbClr val="1B5E20"/>
                 </a:solidFill>
               </a:defRPr>
             </a:pPr>
             <a:r>
+              <a:rPr/>
               <a:t>Carbon Footprint</a:t>
             </a:r>
           </a:p>
@@ -8821,13 +9035,14 @@
               <a:spcBef>
                 <a:spcPts val="200"/>
               </a:spcBef>
-              <a:defRPr sz="900">
-                <a:solidFill>
-                  <a:srgbClr val="424242"/>
-                </a:solidFill>
-              </a:defRPr>
-            </a:pPr>
-            <a:r>
+              <a:defRPr sz="1200">
+                <a:solidFill>
+                  <a:srgbClr val="424242"/>
+                </a:solidFill>
+              </a:defRPr>
+            </a:pPr>
+            <a:r>
+              <a:rPr/>
               <a:t>• Bagasse = biomass (CO₂ netral)</a:t>
             </a:r>
           </a:p>
@@ -8836,13 +9051,14 @@
               <a:spcBef>
                 <a:spcPts val="200"/>
               </a:spcBef>
-              <a:defRPr sz="900">
-                <a:solidFill>
-                  <a:srgbClr val="424242"/>
-                </a:solidFill>
-              </a:defRPr>
-            </a:pPr>
-            <a:r>
+              <a:defRPr sz="1200">
+                <a:solidFill>
+                  <a:srgbClr val="424242"/>
+                </a:solidFill>
+              </a:defRPr>
+            </a:pPr>
+            <a:r>
+              <a:rPr/>
               <a:t>• Mengurangi ketergantungan fossil fuel</a:t>
             </a:r>
           </a:p>
@@ -8851,13 +9067,14 @@
               <a:spcBef>
                 <a:spcPts val="200"/>
               </a:spcBef>
-              <a:defRPr sz="900">
-                <a:solidFill>
-                  <a:srgbClr val="424242"/>
-                </a:solidFill>
-              </a:defRPr>
-            </a:pPr>
-            <a:r>
+              <a:defRPr sz="1200">
+                <a:solidFill>
+                  <a:srgbClr val="424242"/>
+                </a:solidFill>
+              </a:defRPr>
+            </a:pPr>
+            <a:r>
+              <a:rPr/>
               <a:t>• PROPER KLHK (Blue/Green rating)</a:t>
             </a:r>
           </a:p>
@@ -8866,13 +9083,14 @@
               <a:spcBef>
                 <a:spcPts val="200"/>
               </a:spcBef>
-              <a:defRPr sz="900">
-                <a:solidFill>
-                  <a:srgbClr val="424242"/>
-                </a:solidFill>
-              </a:defRPr>
-            </a:pPr>
-            <a:r>
+              <a:defRPr sz="1200">
+                <a:solidFill>
+                  <a:srgbClr val="424242"/>
+                </a:solidFill>
+              </a:defRPr>
+            </a:pPr>
+            <a:r>
+              <a:rPr/>
               <a:t>• Potensi carbon credit trading</a:t>
             </a:r>
           </a:p>
@@ -8920,7 +9138,7 @@
           <a:lstStyle/>
           <a:p>
             <a:pPr algn="ctr">
-              <a:defRPr sz="1100" b="1">
+              <a:defRPr sz="1400" b="1">
                 <a:solidFill>
                   <a:srgbClr val="1B5E20"/>
                 </a:solidFill>
@@ -8928,6 +9146,7 @@
               </a:defRPr>
             </a:pPr>
             <a:r>
+              <a:rPr/>
               <a:t>Key Takeaway: Pabrik gula punya DNA sustainability — bagasse sebagai energi + by-product sebagai revenue = model circular economy.</a:t>
             </a:r>
           </a:p>
@@ -8982,7 +9201,7 @@
           <a:lstStyle/>
           <a:p>
             <a:pPr algn="l">
-              <a:defRPr sz="2800" b="1">
+              <a:defRPr sz="3000" b="1">
                 <a:solidFill>
                   <a:srgbClr val="1B5E20"/>
                 </a:solidFill>
@@ -8990,6 +9209,7 @@
               </a:defRPr>
             </a:pPr>
             <a:r>
+              <a:rPr/>
               <a:t>Keselamatan &amp; Kesehatan Kerja (K3)</a:t>
             </a:r>
           </a:p>
@@ -9018,7 +9238,7 @@
           <a:lstStyle/>
           <a:p>
             <a:pPr algn="l">
-              <a:defRPr sz="1300" b="0">
+              <a:defRPr sz="1500" b="0">
                 <a:solidFill>
                   <a:srgbClr val="2E7D32"/>
                 </a:solidFill>
@@ -9026,6 +9246,7 @@
               </a:defRPr>
             </a:pPr>
             <a:r>
+              <a:rPr/>
               <a:t>Safety First — Operasi aman, produktivitas terjaga</a:t>
             </a:r>
           </a:p>
@@ -9054,7 +9275,7 @@
           <a:lstStyle/>
           <a:p>
             <a:pPr algn="l">
-              <a:defRPr sz="800" b="0">
+              <a:defRPr sz="1100" b="0">
                 <a:solidFill>
                   <a:srgbClr val="9E9E9E"/>
                 </a:solidFill>
@@ -9062,6 +9283,7 @@
               </a:defRPr>
             </a:pPr>
             <a:r>
+              <a:rPr/>
               <a:t>18 / 21  •  Overview Operasional &amp; Proses Produksi Pabrik Gula  |  Internal Use</a:t>
             </a:r>
           </a:p>
@@ -9093,14 +9315,15 @@
               <a:spcAft>
                 <a:spcPts val="400"/>
               </a:spcAft>
-              <a:defRPr sz="1000" b="1">
-                <a:solidFill>
-                  <a:srgbClr val="424242"/>
-                </a:solidFill>
-                <a:latin typeface="Calibri"/>
-              </a:defRPr>
-            </a:pPr>
-            <a:r>
+              <a:defRPr sz="1300" b="1">
+                <a:solidFill>
+                  <a:srgbClr val="424242"/>
+                </a:solidFill>
+                <a:latin typeface="Calibri"/>
+              </a:defRPr>
+            </a:pPr>
+            <a:r>
+              <a:rPr/>
               <a:t>Potensi Bahaya di Pabrik Gula:</a:t>
             </a:r>
           </a:p>
@@ -9109,7 +9332,7 @@
               <a:spcAft>
                 <a:spcPts val="400"/>
               </a:spcAft>
-              <a:defRPr sz="1000">
+              <a:defRPr sz="1300">
                 <a:solidFill>
                   <a:srgbClr val="424242"/>
                 </a:solidFill>
@@ -9122,14 +9345,15 @@
               <a:spcAft>
                 <a:spcPts val="400"/>
               </a:spcAft>
-              <a:defRPr sz="1000">
-                <a:solidFill>
-                  <a:srgbClr val="424242"/>
-                </a:solidFill>
-                <a:latin typeface="Calibri"/>
-              </a:defRPr>
-            </a:pPr>
-            <a:r>
+              <a:defRPr sz="1300">
+                <a:solidFill>
+                  <a:srgbClr val="424242"/>
+                </a:solidFill>
+                <a:latin typeface="Calibri"/>
+              </a:defRPr>
+            </a:pPr>
+            <a:r>
+              <a:rPr/>
               <a:t>• Mesin berputar (gilingan, centrifuge, turbin) → risiko terjerat</a:t>
             </a:r>
           </a:p>
@@ -9138,14 +9362,15 @@
               <a:spcAft>
                 <a:spcPts val="400"/>
               </a:spcAft>
-              <a:defRPr sz="1000">
-                <a:solidFill>
-                  <a:srgbClr val="424242"/>
-                </a:solidFill>
-                <a:latin typeface="Calibri"/>
-              </a:defRPr>
-            </a:pPr>
-            <a:r>
+              <a:defRPr sz="1300">
+                <a:solidFill>
+                  <a:srgbClr val="424242"/>
+                </a:solidFill>
+                <a:latin typeface="Calibri"/>
+              </a:defRPr>
+            </a:pPr>
+            <a:r>
+              <a:rPr/>
               <a:t>• Suhu tinggi (boiler, evaporator, pan masakan) → risiko luka bakar</a:t>
             </a:r>
           </a:p>
@@ -9154,14 +9379,15 @@
               <a:spcAft>
                 <a:spcPts val="400"/>
               </a:spcAft>
-              <a:defRPr sz="1000">
-                <a:solidFill>
-                  <a:srgbClr val="424242"/>
-                </a:solidFill>
-                <a:latin typeface="Calibri"/>
-              </a:defRPr>
-            </a:pPr>
-            <a:r>
+              <a:defRPr sz="1300">
+                <a:solidFill>
+                  <a:srgbClr val="424242"/>
+                </a:solidFill>
+                <a:latin typeface="Calibri"/>
+              </a:defRPr>
+            </a:pPr>
+            <a:r>
+              <a:rPr/>
               <a:t>• Ketinggian (tangki, cerobong, conveyor) → risiko jatuh</a:t>
             </a:r>
           </a:p>
@@ -9170,14 +9396,15 @@
               <a:spcAft>
                 <a:spcPts val="400"/>
               </a:spcAft>
-              <a:defRPr sz="1000">
-                <a:solidFill>
-                  <a:srgbClr val="424242"/>
-                </a:solidFill>
-                <a:latin typeface="Calibri"/>
-              </a:defRPr>
-            </a:pPr>
-            <a:r>
+              <a:defRPr sz="1300">
+                <a:solidFill>
+                  <a:srgbClr val="424242"/>
+                </a:solidFill>
+                <a:latin typeface="Calibri"/>
+              </a:defRPr>
+            </a:pPr>
+            <a:r>
+              <a:rPr/>
               <a:t>• Kebisingan (area gilingan &gt;85 dB) → gangguan pendengaran</a:t>
             </a:r>
           </a:p>
@@ -9186,14 +9413,15 @@
               <a:spcAft>
                 <a:spcPts val="400"/>
               </a:spcAft>
-              <a:defRPr sz="1000">
-                <a:solidFill>
-                  <a:srgbClr val="424242"/>
-                </a:solidFill>
-                <a:latin typeface="Calibri"/>
-              </a:defRPr>
-            </a:pPr>
-            <a:r>
+              <a:defRPr sz="1300">
+                <a:solidFill>
+                  <a:srgbClr val="424242"/>
+                </a:solidFill>
+                <a:latin typeface="Calibri"/>
+              </a:defRPr>
+            </a:pPr>
+            <a:r>
+              <a:rPr/>
               <a:t>• Bahan kimia (kapur, belerang, asam) → iritasi kulit/mata</a:t>
             </a:r>
           </a:p>
@@ -9202,14 +9430,15 @@
               <a:spcAft>
                 <a:spcPts val="400"/>
               </a:spcAft>
-              <a:defRPr sz="1000">
-                <a:solidFill>
-                  <a:srgbClr val="424242"/>
-                </a:solidFill>
-                <a:latin typeface="Calibri"/>
-              </a:defRPr>
-            </a:pPr>
-            <a:r>
+              <a:defRPr sz="1300">
+                <a:solidFill>
+                  <a:srgbClr val="424242"/>
+                </a:solidFill>
+                <a:latin typeface="Calibri"/>
+              </a:defRPr>
+            </a:pPr>
+            <a:r>
+              <a:rPr/>
               <a:t>• Debu gula (area dryer, packaging) → risiko respirasi</a:t>
             </a:r>
           </a:p>
@@ -9241,14 +9470,15 @@
               <a:spcAft>
                 <a:spcPts val="400"/>
               </a:spcAft>
-              <a:defRPr sz="1000" b="1">
-                <a:solidFill>
-                  <a:srgbClr val="424242"/>
-                </a:solidFill>
-                <a:latin typeface="Calibri"/>
-              </a:defRPr>
-            </a:pPr>
-            <a:r>
+              <a:defRPr sz="1300" b="1">
+                <a:solidFill>
+                  <a:srgbClr val="424242"/>
+                </a:solidFill>
+                <a:latin typeface="Calibri"/>
+              </a:defRPr>
+            </a:pPr>
+            <a:r>
+              <a:rPr/>
               <a:t>Penerapan K3 di Pabrik Gula:</a:t>
             </a:r>
           </a:p>
@@ -9257,7 +9487,7 @@
               <a:spcAft>
                 <a:spcPts val="400"/>
               </a:spcAft>
-              <a:defRPr sz="1000">
+              <a:defRPr sz="1300">
                 <a:solidFill>
                   <a:srgbClr val="424242"/>
                 </a:solidFill>
@@ -9270,14 +9500,15 @@
               <a:spcAft>
                 <a:spcPts val="400"/>
               </a:spcAft>
-              <a:defRPr sz="1000">
-                <a:solidFill>
-                  <a:srgbClr val="424242"/>
-                </a:solidFill>
-                <a:latin typeface="Calibri"/>
-              </a:defRPr>
-            </a:pPr>
-            <a:r>
+              <a:defRPr sz="1300">
+                <a:solidFill>
+                  <a:srgbClr val="424242"/>
+                </a:solidFill>
+                <a:latin typeface="Calibri"/>
+              </a:defRPr>
+            </a:pPr>
+            <a:r>
+              <a:rPr/>
               <a:t>1. APD Wajib:</a:t>
             </a:r>
           </a:p>
@@ -9286,14 +9517,15 @@
               <a:spcAft>
                 <a:spcPts val="400"/>
               </a:spcAft>
-              <a:defRPr sz="1000">
-                <a:solidFill>
-                  <a:srgbClr val="424242"/>
-                </a:solidFill>
-                <a:latin typeface="Calibri"/>
-              </a:defRPr>
-            </a:pPr>
-            <a:r>
+              <a:defRPr sz="1300">
+                <a:solidFill>
+                  <a:srgbClr val="424242"/>
+                </a:solidFill>
+                <a:latin typeface="Calibri"/>
+              </a:defRPr>
+            </a:pPr>
+            <a:r>
+              <a:rPr/>
               <a:t>   Helm, safety shoes, earplug, goggle, sarung tangan</a:t>
             </a:r>
           </a:p>
@@ -9302,7 +9534,7 @@
               <a:spcAft>
                 <a:spcPts val="400"/>
               </a:spcAft>
-              <a:defRPr sz="1000">
+              <a:defRPr sz="1300">
                 <a:solidFill>
                   <a:srgbClr val="424242"/>
                 </a:solidFill>
@@ -9315,14 +9547,15 @@
               <a:spcAft>
                 <a:spcPts val="400"/>
               </a:spcAft>
-              <a:defRPr sz="1000">
-                <a:solidFill>
-                  <a:srgbClr val="424242"/>
-                </a:solidFill>
-                <a:latin typeface="Calibri"/>
-              </a:defRPr>
-            </a:pPr>
-            <a:r>
+              <a:defRPr sz="1300">
+                <a:solidFill>
+                  <a:srgbClr val="424242"/>
+                </a:solidFill>
+                <a:latin typeface="Calibri"/>
+              </a:defRPr>
+            </a:pPr>
+            <a:r>
+              <a:rPr/>
               <a:t>2. Sistem Izin Kerja:</a:t>
             </a:r>
           </a:p>
@@ -9331,14 +9564,15 @@
               <a:spcAft>
                 <a:spcPts val="400"/>
               </a:spcAft>
-              <a:defRPr sz="1000">
-                <a:solidFill>
-                  <a:srgbClr val="424242"/>
-                </a:solidFill>
-                <a:latin typeface="Calibri"/>
-              </a:defRPr>
-            </a:pPr>
-            <a:r>
+              <a:defRPr sz="1300">
+                <a:solidFill>
+                  <a:srgbClr val="424242"/>
+                </a:solidFill>
+                <a:latin typeface="Calibri"/>
+              </a:defRPr>
+            </a:pPr>
+            <a:r>
+              <a:rPr/>
               <a:t>   Hot work permit, confined space permit, LOTO</a:t>
             </a:r>
           </a:p>
@@ -9347,7 +9581,7 @@
               <a:spcAft>
                 <a:spcPts val="400"/>
               </a:spcAft>
-              <a:defRPr sz="1000">
+              <a:defRPr sz="1300">
                 <a:solidFill>
                   <a:srgbClr val="424242"/>
                 </a:solidFill>
@@ -9360,14 +9594,15 @@
               <a:spcAft>
                 <a:spcPts val="400"/>
               </a:spcAft>
-              <a:defRPr sz="1000">
-                <a:solidFill>
-                  <a:srgbClr val="424242"/>
-                </a:solidFill>
-                <a:latin typeface="Calibri"/>
-              </a:defRPr>
-            </a:pPr>
-            <a:r>
+              <a:defRPr sz="1300">
+                <a:solidFill>
+                  <a:srgbClr val="424242"/>
+                </a:solidFill>
+                <a:latin typeface="Calibri"/>
+              </a:defRPr>
+            </a:pPr>
+            <a:r>
+              <a:rPr/>
               <a:t>3. Training &amp; Drill:</a:t>
             </a:r>
           </a:p>
@@ -9376,14 +9611,15 @@
               <a:spcAft>
                 <a:spcPts val="400"/>
               </a:spcAft>
-              <a:defRPr sz="1000">
-                <a:solidFill>
-                  <a:srgbClr val="424242"/>
-                </a:solidFill>
-                <a:latin typeface="Calibri"/>
-              </a:defRPr>
-            </a:pPr>
-            <a:r>
+              <a:defRPr sz="1300">
+                <a:solidFill>
+                  <a:srgbClr val="424242"/>
+                </a:solidFill>
+                <a:latin typeface="Calibri"/>
+              </a:defRPr>
+            </a:pPr>
+            <a:r>
+              <a:rPr/>
               <a:t>   Induction safety, fire drill, emergency response</a:t>
             </a:r>
           </a:p>
@@ -9392,7 +9628,7 @@
               <a:spcAft>
                 <a:spcPts val="400"/>
               </a:spcAft>
-              <a:defRPr sz="1000">
+              <a:defRPr sz="1300">
                 <a:solidFill>
                   <a:srgbClr val="424242"/>
                 </a:solidFill>
@@ -9405,14 +9641,15 @@
               <a:spcAft>
                 <a:spcPts val="400"/>
               </a:spcAft>
-              <a:defRPr sz="1000">
-                <a:solidFill>
-                  <a:srgbClr val="424242"/>
-                </a:solidFill>
-                <a:latin typeface="Calibri"/>
-              </a:defRPr>
-            </a:pPr>
-            <a:r>
+              <a:defRPr sz="1300">
+                <a:solidFill>
+                  <a:srgbClr val="424242"/>
+                </a:solidFill>
+                <a:latin typeface="Calibri"/>
+              </a:defRPr>
+            </a:pPr>
+            <a:r>
+              <a:rPr/>
               <a:t>4. Inspeksi Rutin:</a:t>
             </a:r>
           </a:p>
@@ -9421,14 +9658,15 @@
               <a:spcAft>
                 <a:spcPts val="400"/>
               </a:spcAft>
-              <a:defRPr sz="1000">
-                <a:solidFill>
-                  <a:srgbClr val="424242"/>
-                </a:solidFill>
-                <a:latin typeface="Calibri"/>
-              </a:defRPr>
-            </a:pPr>
-            <a:r>
+              <a:defRPr sz="1300">
+                <a:solidFill>
+                  <a:srgbClr val="424242"/>
+                </a:solidFill>
+                <a:latin typeface="Calibri"/>
+              </a:defRPr>
+            </a:pPr>
+            <a:r>
+              <a:rPr/>
               <a:t>   Safety patrol harian, audit K3 bulanan</a:t>
             </a:r>
           </a:p>
@@ -9437,7 +9675,7 @@
               <a:spcAft>
                 <a:spcPts val="400"/>
               </a:spcAft>
-              <a:defRPr sz="1000">
+              <a:defRPr sz="1300">
                 <a:solidFill>
                   <a:srgbClr val="424242"/>
                 </a:solidFill>
@@ -9450,14 +9688,15 @@
               <a:spcAft>
                 <a:spcPts val="400"/>
               </a:spcAft>
-              <a:defRPr sz="1000">
-                <a:solidFill>
-                  <a:srgbClr val="424242"/>
-                </a:solidFill>
-                <a:latin typeface="Calibri"/>
-              </a:defRPr>
-            </a:pPr>
-            <a:r>
+              <a:defRPr sz="1300">
+                <a:solidFill>
+                  <a:srgbClr val="424242"/>
+                </a:solidFill>
+                <a:latin typeface="Calibri"/>
+              </a:defRPr>
+            </a:pPr>
+            <a:r>
+              <a:rPr/>
               <a:t>5. Pelaporan &amp; Investigasi:</a:t>
             </a:r>
           </a:p>
@@ -9466,14 +9705,15 @@
               <a:spcAft>
                 <a:spcPts val="400"/>
               </a:spcAft>
-              <a:defRPr sz="1000">
-                <a:solidFill>
-                  <a:srgbClr val="424242"/>
-                </a:solidFill>
-                <a:latin typeface="Calibri"/>
-              </a:defRPr>
-            </a:pPr>
-            <a:r>
+              <a:defRPr sz="1300">
+                <a:solidFill>
+                  <a:srgbClr val="424242"/>
+                </a:solidFill>
+                <a:latin typeface="Calibri"/>
+              </a:defRPr>
+            </a:pPr>
+            <a:r>
+              <a:rPr/>
               <a:t>   Near-miss reporting, incident investigation</a:t>
             </a:r>
           </a:p>
@@ -9482,7 +9722,7 @@
               <a:spcAft>
                 <a:spcPts val="400"/>
               </a:spcAft>
-              <a:defRPr sz="1000">
+              <a:defRPr sz="1300">
                 <a:solidFill>
                   <a:srgbClr val="424242"/>
                 </a:solidFill>
@@ -9495,14 +9735,15 @@
               <a:spcAft>
                 <a:spcPts val="400"/>
               </a:spcAft>
-              <a:defRPr sz="1000">
-                <a:solidFill>
-                  <a:srgbClr val="424242"/>
-                </a:solidFill>
-                <a:latin typeface="Calibri"/>
-              </a:defRPr>
-            </a:pPr>
-            <a:r>
+              <a:defRPr sz="1300">
+                <a:solidFill>
+                  <a:srgbClr val="424242"/>
+                </a:solidFill>
+                <a:latin typeface="Calibri"/>
+              </a:defRPr>
+            </a:pPr>
+            <a:r>
+              <a:rPr/>
               <a:t>6. Safety Committee:</a:t>
             </a:r>
           </a:p>
@@ -9511,14 +9752,15 @@
               <a:spcAft>
                 <a:spcPts val="400"/>
               </a:spcAft>
-              <a:defRPr sz="1000">
-                <a:solidFill>
-                  <a:srgbClr val="424242"/>
-                </a:solidFill>
-                <a:latin typeface="Calibri"/>
-              </a:defRPr>
-            </a:pPr>
-            <a:r>
+              <a:defRPr sz="1300">
+                <a:solidFill>
+                  <a:srgbClr val="424242"/>
+                </a:solidFill>
+                <a:latin typeface="Calibri"/>
+              </a:defRPr>
+            </a:pPr>
+            <a:r>
+              <a:rPr/>
               <a:t>   P2K3 (Panitia Pembina K3) aktif &amp; meeting rutin</a:t>
             </a:r>
           </a:p>
@@ -9566,7 +9808,7 @@
           <a:lstStyle/>
           <a:p>
             <a:pPr algn="ctr">
-              <a:defRPr sz="1100" b="1">
+              <a:defRPr sz="1400" b="1">
                 <a:solidFill>
                   <a:srgbClr val="1B5E20"/>
                 </a:solidFill>
@@ -9574,6 +9816,7 @@
               </a:defRPr>
             </a:pPr>
             <a:r>
+              <a:rPr/>
               <a:t>Key Takeaway: Zero accident adalah target — K3 bukan sekadar aturan, tapi budaya kerja yang melindungi semua karyawan.</a:t>
             </a:r>
           </a:p>
@@ -9628,7 +9871,7 @@
           <a:lstStyle/>
           <a:p>
             <a:pPr algn="l">
-              <a:defRPr sz="2800" b="1">
+              <a:defRPr sz="3000" b="1">
                 <a:solidFill>
                   <a:srgbClr val="1B5E20"/>
                 </a:solidFill>
@@ -9636,6 +9879,7 @@
               </a:defRPr>
             </a:pPr>
             <a:r>
+              <a:rPr/>
               <a:t>Tantangan Operasional Pabrik Gula</a:t>
             </a:r>
           </a:p>
@@ -9664,7 +9908,7 @@
           <a:lstStyle/>
           <a:p>
             <a:pPr algn="l">
-              <a:defRPr sz="1300" b="0">
+              <a:defRPr sz="1500" b="0">
                 <a:solidFill>
                   <a:srgbClr val="2E7D32"/>
                 </a:solidFill>
@@ -9672,6 +9916,7 @@
               </a:defRPr>
             </a:pPr>
             <a:r>
+              <a:rPr/>
               <a:t>Hambatan &amp; Bottleneck — Yang harus dihadapi industri</a:t>
             </a:r>
           </a:p>
@@ -9700,7 +9945,7 @@
           <a:lstStyle/>
           <a:p>
             <a:pPr algn="l">
-              <a:defRPr sz="800" b="0">
+              <a:defRPr sz="1100" b="0">
                 <a:solidFill>
                   <a:srgbClr val="9E9E9E"/>
                 </a:solidFill>
@@ -9708,6 +9953,7 @@
               </a:defRPr>
             </a:pPr>
             <a:r>
+              <a:rPr/>
               <a:t>19 / 21  •  Overview Operasional &amp; Proses Produksi Pabrik Gula  |  Internal Use</a:t>
             </a:r>
           </a:p>
@@ -9755,13 +10001,14 @@
           <a:lstStyle/>
           <a:p>
             <a:pPr algn="ctr">
-              <a:defRPr sz="1100" b="1">
+              <a:defRPr sz="1400" b="1">
                 <a:solidFill>
                   <a:srgbClr val="2E7D32"/>
                 </a:solidFill>
               </a:defRPr>
             </a:pPr>
             <a:r>
+              <a:rPr/>
               <a:t>Produktivitas Rendah</a:t>
             </a:r>
           </a:p>
@@ -9770,13 +10017,14 @@
               <a:spcBef>
                 <a:spcPts val="600"/>
               </a:spcBef>
-              <a:defRPr sz="900">
-                <a:solidFill>
-                  <a:srgbClr val="424242"/>
-                </a:solidFill>
-              </a:defRPr>
-            </a:pPr>
-            <a:r>
+              <a:defRPr sz="1200">
+                <a:solidFill>
+                  <a:srgbClr val="424242"/>
+                </a:solidFill>
+              </a:defRPr>
+            </a:pPr>
+            <a:r>
+              <a:rPr/>
               <a:t>Rendemen RI 6–8% vs Thailand 10–12%. Penyebab: varietas tebu, umur ratoon, masa tebang.</a:t>
             </a:r>
           </a:p>
@@ -9824,13 +10072,14 @@
           <a:lstStyle/>
           <a:p>
             <a:pPr algn="ctr">
-              <a:defRPr sz="1100" b="1">
+              <a:defRPr sz="1400" b="1">
                 <a:solidFill>
                   <a:srgbClr val="6D4C41"/>
                 </a:solidFill>
               </a:defRPr>
             </a:pPr>
             <a:r>
+              <a:rPr/>
               <a:t>Teknologi Tua</a:t>
             </a:r>
           </a:p>
@@ -9839,13 +10088,14 @@
               <a:spcBef>
                 <a:spcPts val="600"/>
               </a:spcBef>
-              <a:defRPr sz="900">
-                <a:solidFill>
-                  <a:srgbClr val="424242"/>
-                </a:solidFill>
-              </a:defRPr>
-            </a:pPr>
-            <a:r>
+              <a:defRPr sz="1200">
+                <a:solidFill>
+                  <a:srgbClr val="424242"/>
+                </a:solidFill>
+              </a:defRPr>
+            </a:pPr>
+            <a:r>
+              <a:rPr/>
               <a:t>Banyak mesin berusia &gt;30 tahun. Breakdown tinggi, efisiensi rendah, spare parts langka.</a:t>
             </a:r>
           </a:p>
@@ -9893,13 +10143,14 @@
           <a:lstStyle/>
           <a:p>
             <a:pPr algn="ctr">
-              <a:defRPr sz="1100" b="1">
+              <a:defRPr sz="1400" b="1">
                 <a:solidFill>
                   <a:srgbClr val="1B5E20"/>
                 </a:solidFill>
               </a:defRPr>
             </a:pPr>
             <a:r>
+              <a:rPr/>
               <a:t>Kualitas Bahan Baku</a:t>
             </a:r>
           </a:p>
@@ -9908,13 +10159,14 @@
               <a:spcBef>
                 <a:spcPts val="600"/>
               </a:spcBef>
-              <a:defRPr sz="900">
-                <a:solidFill>
-                  <a:srgbClr val="424242"/>
-                </a:solidFill>
-              </a:defRPr>
-            </a:pPr>
-            <a:r>
+              <a:defRPr sz="1200">
+                <a:solidFill>
+                  <a:srgbClr val="424242"/>
+                </a:solidFill>
+              </a:defRPr>
+            </a:pPr>
+            <a:r>
+              <a:rPr/>
               <a:t>Tebu kotor (trash &gt;5%), pol rendah, terlambat giling. Petani belum optimal menerapkan standar.</a:t>
             </a:r>
           </a:p>
@@ -9962,13 +10214,14 @@
           <a:lstStyle/>
           <a:p>
             <a:pPr algn="ctr">
-              <a:defRPr sz="1100" b="1">
+              <a:defRPr sz="1400" b="1">
                 <a:solidFill>
                   <a:srgbClr val="F9A825"/>
                 </a:solidFill>
               </a:defRPr>
             </a:pPr>
             <a:r>
+              <a:rPr/>
               <a:t>Margin Tipis</a:t>
             </a:r>
           </a:p>
@@ -9977,13 +10230,14 @@
               <a:spcBef>
                 <a:spcPts val="600"/>
               </a:spcBef>
-              <a:defRPr sz="900">
-                <a:solidFill>
-                  <a:srgbClr val="424242"/>
-                </a:solidFill>
-              </a:defRPr>
-            </a:pPr>
-            <a:r>
+              <a:defRPr sz="1200">
+                <a:solidFill>
+                  <a:srgbClr val="424242"/>
+                </a:solidFill>
+              </a:defRPr>
+            </a:pPr>
+            <a:r>
+              <a:rPr/>
               <a:t>HPP Rp 9–11rb/kg vs harga jual terkontrol. Sensitif terhadap rendemen &amp; harga tebu.</a:t>
             </a:r>
           </a:p>
@@ -10031,13 +10285,14 @@
           <a:lstStyle/>
           <a:p>
             <a:pPr algn="ctr">
-              <a:defRPr sz="1100" b="1">
-                <a:solidFill>
-                  <a:srgbClr val="424242"/>
-                </a:solidFill>
-              </a:defRPr>
-            </a:pPr>
-            <a:r>
+              <a:defRPr sz="1400" b="1">
+                <a:solidFill>
+                  <a:srgbClr val="424242"/>
+                </a:solidFill>
+              </a:defRPr>
+            </a:pPr>
+            <a:r>
+              <a:rPr/>
               <a:t>SDM &amp; Regenerasi</a:t>
             </a:r>
           </a:p>
@@ -10046,13 +10301,14 @@
               <a:spcBef>
                 <a:spcPts val="600"/>
               </a:spcBef>
-              <a:defRPr sz="900">
-                <a:solidFill>
-                  <a:srgbClr val="424242"/>
-                </a:solidFill>
-              </a:defRPr>
-            </a:pPr>
-            <a:r>
+              <a:defRPr sz="1200">
+                <a:solidFill>
+                  <a:srgbClr val="424242"/>
+                </a:solidFill>
+              </a:defRPr>
+            </a:pPr>
+            <a:r>
+              <a:rPr/>
               <a:t>Operator senior pensiun, generasi muda kurang tertarik. Perlu training intensif &amp; sertifikasi.</a:t>
             </a:r>
           </a:p>
@@ -10100,13 +10356,14 @@
           <a:lstStyle/>
           <a:p>
             <a:pPr algn="ctr">
-              <a:defRPr sz="1100" b="1">
+              <a:defRPr sz="1400" b="1">
                 <a:solidFill>
                   <a:srgbClr val="2E7D32"/>
                 </a:solidFill>
               </a:defRPr>
             </a:pPr>
             <a:r>
+              <a:rPr/>
               <a:t>Risiko Iklim</a:t>
             </a:r>
           </a:p>
@@ -10115,13 +10372,14 @@
               <a:spcBef>
                 <a:spcPts val="600"/>
               </a:spcBef>
-              <a:defRPr sz="900">
-                <a:solidFill>
-                  <a:srgbClr val="424242"/>
-                </a:solidFill>
-              </a:defRPr>
-            </a:pPr>
-            <a:r>
+              <a:defRPr sz="1200">
+                <a:solidFill>
+                  <a:srgbClr val="424242"/>
+                </a:solidFill>
+              </a:defRPr>
+            </a:pPr>
+            <a:r>
+              <a:rPr/>
               <a:t>El Niño/La Niña ganggu jadwal giling. Hujan saat musim giling = tebu basah, rendemen turun.</a:t>
             </a:r>
           </a:p>
@@ -10169,7 +10427,7 @@
           <a:lstStyle/>
           <a:p>
             <a:pPr algn="ctr">
-              <a:defRPr sz="1100" b="1">
+              <a:defRPr sz="1400" b="1">
                 <a:solidFill>
                   <a:srgbClr val="1B5E20"/>
                 </a:solidFill>
@@ -10177,6 +10435,7 @@
               </a:defRPr>
             </a:pPr>
             <a:r>
+              <a:rPr/>
               <a:t>Key Takeaway: Tantangan terbesar: rendemen rendah &amp; teknologi tua. Solusi: modernisasi + digitalisasi + kualitas tebu.</a:t>
             </a:r>
           </a:p>
@@ -10231,7 +10490,7 @@
           <a:lstStyle/>
           <a:p>
             <a:pPr algn="l">
-              <a:defRPr sz="2800" b="1">
+              <a:defRPr sz="3000" b="1">
                 <a:solidFill>
                   <a:srgbClr val="1B5E20"/>
                 </a:solidFill>
@@ -10239,6 +10498,7 @@
               </a:defRPr>
             </a:pPr>
             <a:r>
+              <a:rPr/>
               <a:t>Daftar Isi</a:t>
             </a:r>
           </a:p>
@@ -10267,7 +10527,7 @@
           <a:lstStyle/>
           <a:p>
             <a:pPr algn="l">
-              <a:defRPr sz="1300" b="0">
+              <a:defRPr sz="1500" b="0">
                 <a:solidFill>
                   <a:srgbClr val="2E7D32"/>
                 </a:solidFill>
@@ -10275,6 +10535,7 @@
               </a:defRPr>
             </a:pPr>
             <a:r>
+              <a:rPr/>
               <a:t>Struktur Presentasi — 21 Bagian</a:t>
             </a:r>
           </a:p>
@@ -10303,7 +10564,7 @@
           <a:lstStyle/>
           <a:p>
             <a:pPr algn="l">
-              <a:defRPr sz="800" b="0">
+              <a:defRPr sz="1100" b="0">
                 <a:solidFill>
                   <a:srgbClr val="9E9E9E"/>
                 </a:solidFill>
@@ -10311,6 +10572,7 @@
               </a:defRPr>
             </a:pPr>
             <a:r>
+              <a:rPr/>
               <a:t>2 / 21  •  Overview Operasional &amp; Proses Produksi Pabrik Gula  |  Internal Use</a:t>
             </a:r>
           </a:p>
@@ -10339,7 +10601,7 @@
           <a:lstStyle/>
           <a:p>
             <a:pPr algn="l">
-              <a:defRPr sz="1100" b="1">
+              <a:defRPr sz="1400" b="1">
                 <a:solidFill>
                   <a:srgbClr val="2E7D32"/>
                 </a:solidFill>
@@ -10347,6 +10609,7 @@
               </a:defRPr>
             </a:pPr>
             <a:r>
+              <a:rPr/>
               <a:t>01</a:t>
             </a:r>
           </a:p>
@@ -10375,14 +10638,15 @@
           <a:lstStyle/>
           <a:p>
             <a:pPr algn="l">
-              <a:defRPr sz="1100" b="0">
-                <a:solidFill>
-                  <a:srgbClr val="424242"/>
-                </a:solidFill>
-                <a:latin typeface="Calibri"/>
-              </a:defRPr>
-            </a:pPr>
-            <a:r>
+              <a:defRPr sz="1400" b="0">
+                <a:solidFill>
+                  <a:srgbClr val="424242"/>
+                </a:solidFill>
+                <a:latin typeface="Calibri"/>
+              </a:defRPr>
+            </a:pPr>
+            <a:r>
+              <a:rPr/>
               <a:t>Pendahuluan Industri Gula</a:t>
             </a:r>
           </a:p>
@@ -10411,7 +10675,7 @@
           <a:lstStyle/>
           <a:p>
             <a:pPr algn="l">
-              <a:defRPr sz="1100" b="1">
+              <a:defRPr sz="1400" b="1">
                 <a:solidFill>
                   <a:srgbClr val="2E7D32"/>
                 </a:solidFill>
@@ -10419,6 +10683,7 @@
               </a:defRPr>
             </a:pPr>
             <a:r>
+              <a:rPr/>
               <a:t>02</a:t>
             </a:r>
           </a:p>
@@ -10447,14 +10712,15 @@
           <a:lstStyle/>
           <a:p>
             <a:pPr algn="l">
-              <a:defRPr sz="1100" b="0">
-                <a:solidFill>
-                  <a:srgbClr val="424242"/>
-                </a:solidFill>
-                <a:latin typeface="Calibri"/>
-              </a:defRPr>
-            </a:pPr>
-            <a:r>
+              <a:defRPr sz="1400" b="0">
+                <a:solidFill>
+                  <a:srgbClr val="424242"/>
+                </a:solidFill>
+                <a:latin typeface="Calibri"/>
+              </a:defRPr>
+            </a:pPr>
+            <a:r>
+              <a:rPr/>
               <a:t>Overview Alur Produksi</a:t>
             </a:r>
           </a:p>
@@ -10483,7 +10749,7 @@
           <a:lstStyle/>
           <a:p>
             <a:pPr algn="l">
-              <a:defRPr sz="1100" b="1">
+              <a:defRPr sz="1400" b="1">
                 <a:solidFill>
                   <a:srgbClr val="2E7D32"/>
                 </a:solidFill>
@@ -10491,6 +10757,7 @@
               </a:defRPr>
             </a:pPr>
             <a:r>
+              <a:rPr/>
               <a:t>03</a:t>
             </a:r>
           </a:p>
@@ -10519,14 +10786,15 @@
           <a:lstStyle/>
           <a:p>
             <a:pPr algn="l">
-              <a:defRPr sz="1100" b="0">
-                <a:solidFill>
-                  <a:srgbClr val="424242"/>
-                </a:solidFill>
-                <a:latin typeface="Calibri"/>
-              </a:defRPr>
-            </a:pPr>
-            <a:r>
+              <a:defRPr sz="1400" b="0">
+                <a:solidFill>
+                  <a:srgbClr val="424242"/>
+                </a:solidFill>
+                <a:latin typeface="Calibri"/>
+              </a:defRPr>
+            </a:pPr>
+            <a:r>
+              <a:rPr/>
               <a:t>Penerimaan &amp; Penanganan Tebu</a:t>
             </a:r>
           </a:p>
@@ -10555,7 +10823,7 @@
           <a:lstStyle/>
           <a:p>
             <a:pPr algn="l">
-              <a:defRPr sz="1100" b="1">
+              <a:defRPr sz="1400" b="1">
                 <a:solidFill>
                   <a:srgbClr val="2E7D32"/>
                 </a:solidFill>
@@ -10563,6 +10831,7 @@
               </a:defRPr>
             </a:pPr>
             <a:r>
+              <a:rPr/>
               <a:t>04</a:t>
             </a:r>
           </a:p>
@@ -10591,14 +10860,15 @@
           <a:lstStyle/>
           <a:p>
             <a:pPr algn="l">
-              <a:defRPr sz="1100" b="0">
-                <a:solidFill>
-                  <a:srgbClr val="424242"/>
-                </a:solidFill>
-                <a:latin typeface="Calibri"/>
-              </a:defRPr>
-            </a:pPr>
-            <a:r>
+              <a:defRPr sz="1400" b="0">
+                <a:solidFill>
+                  <a:srgbClr val="424242"/>
+                </a:solidFill>
+                <a:latin typeface="Calibri"/>
+              </a:defRPr>
+            </a:pPr>
+            <a:r>
+              <a:rPr/>
               <a:t>Cane Preparation &amp; Milling</a:t>
             </a:r>
           </a:p>
@@ -10627,7 +10897,7 @@
           <a:lstStyle/>
           <a:p>
             <a:pPr algn="l">
-              <a:defRPr sz="1100" b="1">
+              <a:defRPr sz="1400" b="1">
                 <a:solidFill>
                   <a:srgbClr val="2E7D32"/>
                 </a:solidFill>
@@ -10635,6 +10905,7 @@
               </a:defRPr>
             </a:pPr>
             <a:r>
+              <a:rPr/>
               <a:t>05</a:t>
             </a:r>
           </a:p>
@@ -10663,14 +10934,15 @@
           <a:lstStyle/>
           <a:p>
             <a:pPr algn="l">
-              <a:defRPr sz="1100" b="0">
-                <a:solidFill>
-                  <a:srgbClr val="424242"/>
-                </a:solidFill>
-                <a:latin typeface="Calibri"/>
-              </a:defRPr>
-            </a:pPr>
-            <a:r>
+              <a:defRPr sz="1400" b="0">
+                <a:solidFill>
+                  <a:srgbClr val="424242"/>
+                </a:solidFill>
+                <a:latin typeface="Calibri"/>
+              </a:defRPr>
+            </a:pPr>
+            <a:r>
+              <a:rPr/>
               <a:t>Pemrosesan Nira (Clarification)</a:t>
             </a:r>
           </a:p>
@@ -10699,7 +10971,7 @@
           <a:lstStyle/>
           <a:p>
             <a:pPr algn="l">
-              <a:defRPr sz="1100" b="1">
+              <a:defRPr sz="1400" b="1">
                 <a:solidFill>
                   <a:srgbClr val="2E7D32"/>
                 </a:solidFill>
@@ -10707,6 +10979,7 @@
               </a:defRPr>
             </a:pPr>
             <a:r>
+              <a:rPr/>
               <a:t>06</a:t>
             </a:r>
           </a:p>
@@ -10735,14 +11008,15 @@
           <a:lstStyle/>
           <a:p>
             <a:pPr algn="l">
-              <a:defRPr sz="1100" b="0">
-                <a:solidFill>
-                  <a:srgbClr val="424242"/>
-                </a:solidFill>
-                <a:latin typeface="Calibri"/>
-              </a:defRPr>
-            </a:pPr>
-            <a:r>
+              <a:defRPr sz="1400" b="0">
+                <a:solidFill>
+                  <a:srgbClr val="424242"/>
+                </a:solidFill>
+                <a:latin typeface="Calibri"/>
+              </a:defRPr>
+            </a:pPr>
+            <a:r>
+              <a:rPr/>
               <a:t>Evaporation Process</a:t>
             </a:r>
           </a:p>
@@ -10771,7 +11045,7 @@
           <a:lstStyle/>
           <a:p>
             <a:pPr algn="l">
-              <a:defRPr sz="1100" b="1">
+              <a:defRPr sz="1400" b="1">
                 <a:solidFill>
                   <a:srgbClr val="2E7D32"/>
                 </a:solidFill>
@@ -10779,6 +11053,7 @@
               </a:defRPr>
             </a:pPr>
             <a:r>
+              <a:rPr/>
               <a:t>07</a:t>
             </a:r>
           </a:p>
@@ -10807,14 +11082,15 @@
           <a:lstStyle/>
           <a:p>
             <a:pPr algn="l">
-              <a:defRPr sz="1100" b="0">
-                <a:solidFill>
-                  <a:srgbClr val="424242"/>
-                </a:solidFill>
-                <a:latin typeface="Calibri"/>
-              </a:defRPr>
-            </a:pPr>
-            <a:r>
+              <a:defRPr sz="1400" b="0">
+                <a:solidFill>
+                  <a:srgbClr val="424242"/>
+                </a:solidFill>
+                <a:latin typeface="Calibri"/>
+              </a:defRPr>
+            </a:pPr>
+            <a:r>
+              <a:rPr/>
               <a:t>Crystallization Process</a:t>
             </a:r>
           </a:p>
@@ -10843,7 +11119,7 @@
           <a:lstStyle/>
           <a:p>
             <a:pPr algn="l">
-              <a:defRPr sz="1100" b="1">
+              <a:defRPr sz="1400" b="1">
                 <a:solidFill>
                   <a:srgbClr val="2E7D32"/>
                 </a:solidFill>
@@ -10851,6 +11127,7 @@
               </a:defRPr>
             </a:pPr>
             <a:r>
+              <a:rPr/>
               <a:t>08</a:t>
             </a:r>
           </a:p>
@@ -10879,14 +11156,15 @@
           <a:lstStyle/>
           <a:p>
             <a:pPr algn="l">
-              <a:defRPr sz="1100" b="0">
-                <a:solidFill>
-                  <a:srgbClr val="424242"/>
-                </a:solidFill>
-                <a:latin typeface="Calibri"/>
-              </a:defRPr>
-            </a:pPr>
-            <a:r>
+              <a:defRPr sz="1400" b="0">
+                <a:solidFill>
+                  <a:srgbClr val="424242"/>
+                </a:solidFill>
+                <a:latin typeface="Calibri"/>
+              </a:defRPr>
+            </a:pPr>
+            <a:r>
+              <a:rPr/>
               <a:t>Centrifugation &amp; Sugar Drying</a:t>
             </a:r>
           </a:p>
@@ -10915,7 +11193,7 @@
           <a:lstStyle/>
           <a:p>
             <a:pPr algn="l">
-              <a:defRPr sz="1100" b="1">
+              <a:defRPr sz="1400" b="1">
                 <a:solidFill>
                   <a:srgbClr val="2E7D32"/>
                 </a:solidFill>
@@ -10923,6 +11201,7 @@
               </a:defRPr>
             </a:pPr>
             <a:r>
+              <a:rPr/>
               <a:t>09</a:t>
             </a:r>
           </a:p>
@@ -10951,14 +11230,15 @@
           <a:lstStyle/>
           <a:p>
             <a:pPr algn="l">
-              <a:defRPr sz="1100" b="0">
-                <a:solidFill>
-                  <a:srgbClr val="424242"/>
-                </a:solidFill>
-                <a:latin typeface="Calibri"/>
-              </a:defRPr>
-            </a:pPr>
-            <a:r>
+              <a:defRPr sz="1400" b="0">
+                <a:solidFill>
+                  <a:srgbClr val="424242"/>
+                </a:solidFill>
+                <a:latin typeface="Calibri"/>
+              </a:defRPr>
+            </a:pPr>
+            <a:r>
+              <a:rPr/>
               <a:t>Packaging &amp; Storage</a:t>
             </a:r>
           </a:p>
@@ -10987,7 +11267,7 @@
           <a:lstStyle/>
           <a:p>
             <a:pPr algn="l">
-              <a:defRPr sz="1100" b="1">
+              <a:defRPr sz="1400" b="1">
                 <a:solidFill>
                   <a:srgbClr val="2E7D32"/>
                 </a:solidFill>
@@ -10995,6 +11275,7 @@
               </a:defRPr>
             </a:pPr>
             <a:r>
+              <a:rPr/>
               <a:t>10</a:t>
             </a:r>
           </a:p>
@@ -11023,14 +11304,15 @@
           <a:lstStyle/>
           <a:p>
             <a:pPr algn="l">
-              <a:defRPr sz="1100" b="0">
-                <a:solidFill>
-                  <a:srgbClr val="424242"/>
-                </a:solidFill>
-                <a:latin typeface="Calibri"/>
-              </a:defRPr>
-            </a:pPr>
-            <a:r>
+              <a:defRPr sz="1400" b="0">
+                <a:solidFill>
+                  <a:srgbClr val="424242"/>
+                </a:solidFill>
+                <a:latin typeface="Calibri"/>
+              </a:defRPr>
+            </a:pPr>
+            <a:r>
+              <a:rPr/>
               <a:t>Utility Systems</a:t>
             </a:r>
           </a:p>
@@ -11059,7 +11341,7 @@
           <a:lstStyle/>
           <a:p>
             <a:pPr algn="l">
-              <a:defRPr sz="1100" b="1">
+              <a:defRPr sz="1400" b="1">
                 <a:solidFill>
                   <a:srgbClr val="2E7D32"/>
                 </a:solidFill>
@@ -11067,6 +11349,7 @@
               </a:defRPr>
             </a:pPr>
             <a:r>
+              <a:rPr/>
               <a:t>11</a:t>
             </a:r>
           </a:p>
@@ -11095,14 +11378,15 @@
           <a:lstStyle/>
           <a:p>
             <a:pPr algn="l">
-              <a:defRPr sz="1100" b="0">
-                <a:solidFill>
-                  <a:srgbClr val="424242"/>
-                </a:solidFill>
-                <a:latin typeface="Calibri"/>
-              </a:defRPr>
-            </a:pPr>
-            <a:r>
+              <a:defRPr sz="1400" b="0">
+                <a:solidFill>
+                  <a:srgbClr val="424242"/>
+                </a:solidFill>
+                <a:latin typeface="Calibri"/>
+              </a:defRPr>
+            </a:pPr>
+            <a:r>
+              <a:rPr/>
               <a:t>Pemanfaatan Produk Samping</a:t>
             </a:r>
           </a:p>
@@ -11131,7 +11415,7 @@
           <a:lstStyle/>
           <a:p>
             <a:pPr algn="l">
-              <a:defRPr sz="1100" b="1">
+              <a:defRPr sz="1400" b="1">
                 <a:solidFill>
                   <a:srgbClr val="2E7D32"/>
                 </a:solidFill>
@@ -11139,6 +11423,7 @@
               </a:defRPr>
             </a:pPr>
             <a:r>
+              <a:rPr/>
               <a:t>12</a:t>
             </a:r>
           </a:p>
@@ -11167,14 +11452,15 @@
           <a:lstStyle/>
           <a:p>
             <a:pPr algn="l">
-              <a:defRPr sz="1100" b="0">
-                <a:solidFill>
-                  <a:srgbClr val="424242"/>
-                </a:solidFill>
-                <a:latin typeface="Calibri"/>
-              </a:defRPr>
-            </a:pPr>
-            <a:r>
+              <a:defRPr sz="1400" b="0">
+                <a:solidFill>
+                  <a:srgbClr val="424242"/>
+                </a:solidFill>
+                <a:latin typeface="Calibri"/>
+              </a:defRPr>
+            </a:pPr>
+            <a:r>
+              <a:rPr/>
               <a:t>Good Manufacturing Practice</a:t>
             </a:r>
           </a:p>
@@ -11203,7 +11489,7 @@
           <a:lstStyle/>
           <a:p>
             <a:pPr algn="l">
-              <a:defRPr sz="1100" b="1">
+              <a:defRPr sz="1400" b="1">
                 <a:solidFill>
                   <a:srgbClr val="2E7D32"/>
                 </a:solidFill>
@@ -11211,6 +11497,7 @@
               </a:defRPr>
             </a:pPr>
             <a:r>
+              <a:rPr/>
               <a:t>13</a:t>
             </a:r>
           </a:p>
@@ -11239,14 +11526,15 @@
           <a:lstStyle/>
           <a:p>
             <a:pPr algn="l">
-              <a:defRPr sz="1100" b="0">
-                <a:solidFill>
-                  <a:srgbClr val="424242"/>
-                </a:solidFill>
-                <a:latin typeface="Calibri"/>
-              </a:defRPr>
-            </a:pPr>
-            <a:r>
+              <a:defRPr sz="1400" b="0">
+                <a:solidFill>
+                  <a:srgbClr val="424242"/>
+                </a:solidFill>
+                <a:latin typeface="Calibri"/>
+              </a:defRPr>
+            </a:pPr>
+            <a:r>
+              <a:rPr/>
               <a:t>Quality Control</a:t>
             </a:r>
           </a:p>
@@ -11275,7 +11563,7 @@
           <a:lstStyle/>
           <a:p>
             <a:pPr algn="l">
-              <a:defRPr sz="1100" b="1">
+              <a:defRPr sz="1400" b="1">
                 <a:solidFill>
                   <a:srgbClr val="2E7D32"/>
                 </a:solidFill>
@@ -11283,6 +11571,7 @@
               </a:defRPr>
             </a:pPr>
             <a:r>
+              <a:rPr/>
               <a:t>14</a:t>
             </a:r>
           </a:p>
@@ -11311,14 +11600,15 @@
           <a:lstStyle/>
           <a:p>
             <a:pPr algn="l">
-              <a:defRPr sz="1100" b="0">
-                <a:solidFill>
-                  <a:srgbClr val="424242"/>
-                </a:solidFill>
-                <a:latin typeface="Calibri"/>
-              </a:defRPr>
-            </a:pPr>
-            <a:r>
+              <a:defRPr sz="1400" b="0">
+                <a:solidFill>
+                  <a:srgbClr val="424242"/>
+                </a:solidFill>
+                <a:latin typeface="Calibri"/>
+              </a:defRPr>
+            </a:pPr>
+            <a:r>
+              <a:rPr/>
               <a:t>Pengelolaan Limbah</a:t>
             </a:r>
           </a:p>
@@ -11347,7 +11637,7 @@
           <a:lstStyle/>
           <a:p>
             <a:pPr algn="l">
-              <a:defRPr sz="1100" b="1">
+              <a:defRPr sz="1400" b="1">
                 <a:solidFill>
                   <a:srgbClr val="2E7D32"/>
                 </a:solidFill>
@@ -11355,6 +11645,7 @@
               </a:defRPr>
             </a:pPr>
             <a:r>
+              <a:rPr/>
               <a:t>15</a:t>
             </a:r>
           </a:p>
@@ -11383,14 +11674,15 @@
           <a:lstStyle/>
           <a:p>
             <a:pPr algn="l">
-              <a:defRPr sz="1100" b="0">
-                <a:solidFill>
-                  <a:srgbClr val="424242"/>
-                </a:solidFill>
-                <a:latin typeface="Calibri"/>
-              </a:defRPr>
-            </a:pPr>
-            <a:r>
+              <a:defRPr sz="1400" b="0">
+                <a:solidFill>
+                  <a:srgbClr val="424242"/>
+                </a:solidFill>
+                <a:latin typeface="Calibri"/>
+              </a:defRPr>
+            </a:pPr>
+            <a:r>
+              <a:rPr/>
               <a:t>Sustainability &amp; Efisiensi</a:t>
             </a:r>
           </a:p>
@@ -11419,7 +11711,7 @@
           <a:lstStyle/>
           <a:p>
             <a:pPr algn="l">
-              <a:defRPr sz="1100" b="1">
+              <a:defRPr sz="1400" b="1">
                 <a:solidFill>
                   <a:srgbClr val="2E7D32"/>
                 </a:solidFill>
@@ -11427,6 +11719,7 @@
               </a:defRPr>
             </a:pPr>
             <a:r>
+              <a:rPr/>
               <a:t>16</a:t>
             </a:r>
           </a:p>
@@ -11455,14 +11748,15 @@
           <a:lstStyle/>
           <a:p>
             <a:pPr algn="l">
-              <a:defRPr sz="1100" b="0">
-                <a:solidFill>
-                  <a:srgbClr val="424242"/>
-                </a:solidFill>
-                <a:latin typeface="Calibri"/>
-              </a:defRPr>
-            </a:pPr>
-            <a:r>
+              <a:defRPr sz="1400" b="0">
+                <a:solidFill>
+                  <a:srgbClr val="424242"/>
+                </a:solidFill>
+                <a:latin typeface="Calibri"/>
+              </a:defRPr>
+            </a:pPr>
+            <a:r>
+              <a:rPr/>
               <a:t>Keselamatan Kerja (K3)</a:t>
             </a:r>
           </a:p>
@@ -11491,7 +11785,7 @@
           <a:lstStyle/>
           <a:p>
             <a:pPr algn="l">
-              <a:defRPr sz="1100" b="1">
+              <a:defRPr sz="1400" b="1">
                 <a:solidFill>
                   <a:srgbClr val="2E7D32"/>
                 </a:solidFill>
@@ -11499,6 +11793,7 @@
               </a:defRPr>
             </a:pPr>
             <a:r>
+              <a:rPr/>
               <a:t>17</a:t>
             </a:r>
           </a:p>
@@ -11527,14 +11822,15 @@
           <a:lstStyle/>
           <a:p>
             <a:pPr algn="l">
-              <a:defRPr sz="1100" b="0">
-                <a:solidFill>
-                  <a:srgbClr val="424242"/>
-                </a:solidFill>
-                <a:latin typeface="Calibri"/>
-              </a:defRPr>
-            </a:pPr>
-            <a:r>
+              <a:defRPr sz="1400" b="0">
+                <a:solidFill>
+                  <a:srgbClr val="424242"/>
+                </a:solidFill>
+                <a:latin typeface="Calibri"/>
+              </a:defRPr>
+            </a:pPr>
+            <a:r>
+              <a:rPr/>
               <a:t>Tantangan Operasional</a:t>
             </a:r>
           </a:p>
@@ -11563,7 +11859,7 @@
           <a:lstStyle/>
           <a:p>
             <a:pPr algn="l">
-              <a:defRPr sz="1100" b="1">
+              <a:defRPr sz="1400" b="1">
                 <a:solidFill>
                   <a:srgbClr val="2E7D32"/>
                 </a:solidFill>
@@ -11571,6 +11867,7 @@
               </a:defRPr>
             </a:pPr>
             <a:r>
+              <a:rPr/>
               <a:t>18</a:t>
             </a:r>
           </a:p>
@@ -11599,14 +11896,15 @@
           <a:lstStyle/>
           <a:p>
             <a:pPr algn="l">
-              <a:defRPr sz="1100" b="0">
-                <a:solidFill>
-                  <a:srgbClr val="424242"/>
-                </a:solidFill>
-                <a:latin typeface="Calibri"/>
-              </a:defRPr>
-            </a:pPr>
-            <a:r>
+              <a:defRPr sz="1400" b="0">
+                <a:solidFill>
+                  <a:srgbClr val="424242"/>
+                </a:solidFill>
+                <a:latin typeface="Calibri"/>
+              </a:defRPr>
+            </a:pPr>
+            <a:r>
+              <a:rPr/>
               <a:t>Kesimpulan</a:t>
             </a:r>
           </a:p>
@@ -11661,7 +11959,7 @@
           <a:lstStyle/>
           <a:p>
             <a:pPr algn="l">
-              <a:defRPr sz="2800" b="1">
+              <a:defRPr sz="3000" b="1">
                 <a:solidFill>
                   <a:srgbClr val="1B5E20"/>
                 </a:solidFill>
@@ -11669,6 +11967,7 @@
               </a:defRPr>
             </a:pPr>
             <a:r>
+              <a:rPr/>
               <a:t>Kesimpulan &amp; Ringkasan</a:t>
             </a:r>
           </a:p>
@@ -11697,7 +11996,7 @@
           <a:lstStyle/>
           <a:p>
             <a:pPr algn="l">
-              <a:defRPr sz="1300" b="0">
+              <a:defRPr sz="1500" b="0">
                 <a:solidFill>
                   <a:srgbClr val="2E7D32"/>
                 </a:solidFill>
@@ -11705,6 +12004,7 @@
               </a:defRPr>
             </a:pPr>
             <a:r>
+              <a:rPr/>
               <a:t>5 Key Takeaways dari presentasi ini</a:t>
             </a:r>
           </a:p>
@@ -11733,7 +12033,7 @@
           <a:lstStyle/>
           <a:p>
             <a:pPr algn="l">
-              <a:defRPr sz="800" b="0">
+              <a:defRPr sz="1100" b="0">
                 <a:solidFill>
                   <a:srgbClr val="9E9E9E"/>
                 </a:solidFill>
@@ -11741,6 +12041,7 @@
               </a:defRPr>
             </a:pPr>
             <a:r>
+              <a:rPr/>
               <a:t>20 / 21  •  Overview Operasional &amp; Proses Produksi Pabrik Gula  |  Internal Use</a:t>
             </a:r>
           </a:p>
@@ -11786,13 +12087,14 @@
           <a:lstStyle/>
           <a:p>
             <a:pPr algn="ctr">
-              <a:defRPr sz="1400" b="1">
+              <a:defRPr sz="1600" b="1">
                 <a:solidFill>
                   <a:srgbClr val="FFFFFF"/>
                 </a:solidFill>
               </a:defRPr>
             </a:pPr>
             <a:r>
+              <a:rPr/>
               <a:t>1</a:t>
             </a:r>
           </a:p>
@@ -11821,7 +12123,7 @@
           <a:lstStyle/>
           <a:p>
             <a:pPr algn="l">
-              <a:defRPr sz="1200" b="1">
+              <a:defRPr sz="1500" b="1">
                 <a:solidFill>
                   <a:srgbClr val="1B5E20"/>
                 </a:solidFill>
@@ -11829,6 +12131,7 @@
               </a:defRPr>
             </a:pPr>
             <a:r>
+              <a:rPr/>
               <a:t>Proses Terintegrasi</a:t>
             </a:r>
           </a:p>
@@ -11857,14 +12160,15 @@
           <a:lstStyle/>
           <a:p>
             <a:pPr algn="l">
-              <a:defRPr sz="1000" b="0">
-                <a:solidFill>
-                  <a:srgbClr val="424242"/>
-                </a:solidFill>
-                <a:latin typeface="Calibri"/>
-              </a:defRPr>
-            </a:pPr>
-            <a:r>
+              <a:defRPr sz="1300" b="0">
+                <a:solidFill>
+                  <a:srgbClr val="424242"/>
+                </a:solidFill>
+                <a:latin typeface="Calibri"/>
+              </a:defRPr>
+            </a:pPr>
+            <a:r>
+              <a:rPr/>
               <a:t>Pabrik gula menjalankan 9 tahapan proses kontinu selama 24/7 di musim giling. Dari tebu masuk hingga gula terkemas = 24–48 jam.</a:t>
             </a:r>
           </a:p>
@@ -11910,13 +12214,14 @@
           <a:lstStyle/>
           <a:p>
             <a:pPr algn="ctr">
-              <a:defRPr sz="1400" b="1">
+              <a:defRPr sz="1600" b="1">
                 <a:solidFill>
                   <a:srgbClr val="FFFFFF"/>
                 </a:solidFill>
               </a:defRPr>
             </a:pPr>
             <a:r>
+              <a:rPr/>
               <a:t>2</a:t>
             </a:r>
           </a:p>
@@ -11945,7 +12250,7 @@
           <a:lstStyle/>
           <a:p>
             <a:pPr algn="l">
-              <a:defRPr sz="1200" b="1">
+              <a:defRPr sz="1500" b="1">
                 <a:solidFill>
                   <a:srgbClr val="1B5E20"/>
                 </a:solidFill>
@@ -11953,6 +12258,7 @@
               </a:defRPr>
             </a:pPr>
             <a:r>
+              <a:rPr/>
               <a:t>Multi Revenue Stream</a:t>
             </a:r>
           </a:p>
@@ -11981,14 +12287,15 @@
           <a:lstStyle/>
           <a:p>
             <a:pPr algn="l">
-              <a:defRPr sz="1000" b="0">
-                <a:solidFill>
-                  <a:srgbClr val="424242"/>
-                </a:solidFill>
-                <a:latin typeface="Calibri"/>
-              </a:defRPr>
-            </a:pPr>
-            <a:r>
+              <a:defRPr sz="1300" b="0">
+                <a:solidFill>
+                  <a:srgbClr val="424242"/>
+                </a:solidFill>
+                <a:latin typeface="Calibri"/>
+              </a:defRPr>
+            </a:pPr>
+            <a:r>
+              <a:rPr/>
               <a:t>Gula (70–80% revenue) + by-product 15–25% (molasses, bagasse, blotong, listrik). Model circular economy.</a:t>
             </a:r>
           </a:p>
@@ -12034,13 +12341,14 @@
           <a:lstStyle/>
           <a:p>
             <a:pPr algn="ctr">
-              <a:defRPr sz="1400" b="1">
+              <a:defRPr sz="1600" b="1">
                 <a:solidFill>
                   <a:srgbClr val="FFFFFF"/>
                 </a:solidFill>
               </a:defRPr>
             </a:pPr>
             <a:r>
+              <a:rPr/>
               <a:t>3</a:t>
             </a:r>
           </a:p>
@@ -12069,7 +12377,7 @@
           <a:lstStyle/>
           <a:p>
             <a:pPr algn="l">
-              <a:defRPr sz="1200" b="1">
+              <a:defRPr sz="1500" b="1">
                 <a:solidFill>
                   <a:srgbClr val="1B5E20"/>
                 </a:solidFill>
@@ -12077,6 +12385,7 @@
               </a:defRPr>
             </a:pPr>
             <a:r>
+              <a:rPr/>
               <a:t>KPI Raja: Rendemen</a:t>
             </a:r>
           </a:p>
@@ -12105,14 +12414,15 @@
           <a:lstStyle/>
           <a:p>
             <a:pPr algn="l">
-              <a:defRPr sz="1000" b="0">
-                <a:solidFill>
-                  <a:srgbClr val="424242"/>
-                </a:solidFill>
-                <a:latin typeface="Calibri"/>
-              </a:defRPr>
-            </a:pPr>
-            <a:r>
+              <a:defRPr sz="1300" b="0">
+                <a:solidFill>
+                  <a:srgbClr val="424242"/>
+                </a:solidFill>
+                <a:latin typeface="Calibri"/>
+              </a:defRPr>
+            </a:pPr>
+            <a:r>
+              <a:rPr/>
               <a:t>Rendemen 8–10% = ukuran keberhasilan utama. Naik 1% rendemen bisa naikkan profit secara signifikan.</a:t>
             </a:r>
           </a:p>
@@ -12158,13 +12468,14 @@
           <a:lstStyle/>
           <a:p>
             <a:pPr algn="ctr">
-              <a:defRPr sz="1400" b="1">
+              <a:defRPr sz="1600" b="1">
                 <a:solidFill>
                   <a:srgbClr val="FFFFFF"/>
                 </a:solidFill>
               </a:defRPr>
             </a:pPr>
             <a:r>
+              <a:rPr/>
               <a:t>4</a:t>
             </a:r>
           </a:p>
@@ -12193,7 +12504,7 @@
           <a:lstStyle/>
           <a:p>
             <a:pPr algn="l">
-              <a:defRPr sz="1200" b="1">
+              <a:defRPr sz="1500" b="1">
                 <a:solidFill>
                   <a:srgbClr val="1B5E20"/>
                 </a:solidFill>
@@ -12201,6 +12512,7 @@
               </a:defRPr>
             </a:pPr>
             <a:r>
+              <a:rPr/>
               <a:t>GMP &amp; QC Ketat</a:t>
             </a:r>
           </a:p>
@@ -12229,14 +12541,15 @@
           <a:lstStyle/>
           <a:p>
             <a:pPr algn="l">
-              <a:defRPr sz="1000" b="0">
-                <a:solidFill>
-                  <a:srgbClr val="424242"/>
-                </a:solidFill>
-                <a:latin typeface="Calibri"/>
-              </a:defRPr>
-            </a:pPr>
-            <a:r>
+              <a:defRPr sz="1300" b="0">
+                <a:solidFill>
+                  <a:srgbClr val="424242"/>
+                </a:solidFill>
+                <a:latin typeface="Calibri"/>
+              </a:defRPr>
+            </a:pPr>
+            <a:r>
+              <a:rPr/>
               <a:t>Kualitas dijaga dari bahan baku hingga produk akhir. Lab beroperasi 24 jam, sampling tiap 2 jam.</a:t>
             </a:r>
           </a:p>
@@ -12282,13 +12595,14 @@
           <a:lstStyle/>
           <a:p>
             <a:pPr algn="ctr">
-              <a:defRPr sz="1400" b="1">
+              <a:defRPr sz="1600" b="1">
                 <a:solidFill>
                   <a:srgbClr val="FFFFFF"/>
                 </a:solidFill>
               </a:defRPr>
             </a:pPr>
             <a:r>
+              <a:rPr/>
               <a:t>5</a:t>
             </a:r>
           </a:p>
@@ -12317,7 +12631,7 @@
           <a:lstStyle/>
           <a:p>
             <a:pPr algn="l">
-              <a:defRPr sz="1200" b="1">
+              <a:defRPr sz="1500" b="1">
                 <a:solidFill>
                   <a:srgbClr val="1B5E20"/>
                 </a:solidFill>
@@ -12325,6 +12639,7 @@
               </a:defRPr>
             </a:pPr>
             <a:r>
+              <a:rPr/>
               <a:t>Peluang Besar</a:t>
             </a:r>
           </a:p>
@@ -12353,14 +12668,15 @@
           <a:lstStyle/>
           <a:p>
             <a:pPr algn="l">
-              <a:defRPr sz="1000" b="0">
-                <a:solidFill>
-                  <a:srgbClr val="424242"/>
-                </a:solidFill>
-                <a:latin typeface="Calibri"/>
-              </a:defRPr>
-            </a:pPr>
-            <a:r>
+              <a:defRPr sz="1300" b="0">
+                <a:solidFill>
+                  <a:srgbClr val="424242"/>
+                </a:solidFill>
+                <a:latin typeface="Calibri"/>
+              </a:defRPr>
+            </a:pPr>
+            <a:r>
+              <a:rPr/>
               <a:t>Digitalisasi, modernisasi, co-generation, dan diversifikasi = potensi peningkatan EBITDA 20–30%.</a:t>
             </a:r>
           </a:p>
@@ -12415,7 +12731,7 @@
           <a:lstStyle/>
           <a:p>
             <a:pPr algn="l">
-              <a:defRPr sz="3600" b="1">
+              <a:defRPr sz="4000" b="1">
                 <a:solidFill>
                   <a:srgbClr val="FFFFFF"/>
                 </a:solidFill>
@@ -12423,6 +12739,7 @@
               </a:defRPr>
             </a:pPr>
             <a:r>
+              <a:rPr/>
               <a:t>Terima Kasih</a:t>
             </a:r>
           </a:p>
@@ -12451,7 +12768,7 @@
           <a:lstStyle/>
           <a:p>
             <a:pPr algn="l">
-              <a:defRPr sz="1600" b="0">
+              <a:defRPr sz="1800" b="0">
                 <a:solidFill>
                   <a:srgbClr val="A5D6A7"/>
                 </a:solidFill>
@@ -12459,6 +12776,7 @@
               </a:defRPr>
             </a:pPr>
             <a:r>
+              <a:rPr/>
               <a:t>Siap menerima pertanyaan, diskusi, &amp; masukan.</a:t>
             </a:r>
           </a:p>
@@ -12503,7 +12821,9 @@
           <a:bodyPr rtlCol="0" anchor="ctr"/>
           <a:lstStyle/>
           <a:p>
-            <a:pPr algn="ctr"/>
+            <a:pPr algn="ctr">
+              <a:defRPr/>
+            </a:pPr>
           </a:p>
         </p:txBody>
       </p:sp>
@@ -12533,7 +12853,7 @@
               <a:spcAft>
                 <a:spcPts val="400"/>
               </a:spcAft>
-              <a:defRPr sz="1000" b="1">
+              <a:defRPr sz="1300" b="1">
                 <a:solidFill>
                   <a:srgbClr val="C8E6C9"/>
                 </a:solidFill>
@@ -12541,6 +12861,7 @@
               </a:defRPr>
             </a:pPr>
             <a:r>
+              <a:rPr/>
               <a:t>Referensi Utama:</a:t>
             </a:r>
           </a:p>
@@ -12549,7 +12870,7 @@
               <a:spcAft>
                 <a:spcPts val="400"/>
               </a:spcAft>
-              <a:defRPr sz="1000">
+              <a:defRPr sz="1300">
                 <a:solidFill>
                   <a:srgbClr val="C8E6C9"/>
                 </a:solidFill>
@@ -12557,6 +12878,7 @@
               </a:defRPr>
             </a:pPr>
             <a:r>
+              <a:rPr/>
               <a:t>• Hugot, E. — Handbook of Cane Sugar Engineering (1960)</a:t>
             </a:r>
           </a:p>
@@ -12565,7 +12887,7 @@
               <a:spcAft>
                 <a:spcPts val="400"/>
               </a:spcAft>
-              <a:defRPr sz="1000">
+              <a:defRPr sz="1300">
                 <a:solidFill>
                   <a:srgbClr val="C8E6C9"/>
                 </a:solidFill>
@@ -12573,6 +12895,7 @@
               </a:defRPr>
             </a:pPr>
             <a:r>
+              <a:rPr/>
               <a:t>• Good Management Practices Manual for the Cane Sugar Industry</a:t>
             </a:r>
           </a:p>
@@ -12581,7 +12904,7 @@
               <a:spcAft>
                 <a:spcPts val="400"/>
               </a:spcAft>
-              <a:defRPr sz="1000">
+              <a:defRPr sz="1300">
                 <a:solidFill>
                   <a:srgbClr val="C8E6C9"/>
                 </a:solidFill>
@@ -12589,6 +12912,7 @@
               </a:defRPr>
             </a:pPr>
             <a:r>
+              <a:rPr/>
               <a:t>• Laporan Kerja Praktik: Rika Aisyah &amp; Vera Arum (2031910045/052)</a:t>
             </a:r>
           </a:p>
@@ -12597,7 +12921,7 @@
               <a:spcAft>
                 <a:spcPts val="400"/>
               </a:spcAft>
-              <a:defRPr sz="1000">
+              <a:defRPr sz="1300">
                 <a:solidFill>
                   <a:srgbClr val="C8E6C9"/>
                 </a:solidFill>
@@ -12605,6 +12929,7 @@
               </a:defRPr>
             </a:pPr>
             <a:r>
+              <a:rPr/>
               <a:t>• Denik Sentoso — Naskah Publikasi Jurnal</a:t>
             </a:r>
           </a:p>
@@ -12613,7 +12938,7 @@
               <a:spcAft>
                 <a:spcPts val="400"/>
               </a:spcAft>
-              <a:defRPr sz="1000">
+              <a:defRPr sz="1300">
                 <a:solidFill>
                   <a:srgbClr val="C8E6C9"/>
                 </a:solidFill>
@@ -12621,6 +12946,7 @@
               </a:defRPr>
             </a:pPr>
             <a:r>
+              <a:rPr/>
               <a:t>• Jurnal Teknologi Gula — Article Text 6234</a:t>
             </a:r>
           </a:p>
@@ -12629,7 +12955,7 @@
               <a:spcAft>
                 <a:spcPts val="400"/>
               </a:spcAft>
-              <a:defRPr sz="1000">
+              <a:defRPr sz="1300">
                 <a:solidFill>
                   <a:srgbClr val="C8E6C9"/>
                 </a:solidFill>
@@ -12642,7 +12968,7 @@
               <a:spcAft>
                 <a:spcPts val="400"/>
               </a:spcAft>
-              <a:defRPr sz="1000">
+              <a:defRPr sz="1300">
                 <a:solidFill>
                   <a:srgbClr val="C8E6C9"/>
                 </a:solidFill>
@@ -12650,6 +12976,7 @@
               </a:defRPr>
             </a:pPr>
             <a:r>
+              <a:rPr/>
               <a:t>Presentasi Internal  •  2026  •  Overview Operasional &amp; Proses Produksi Pabrik Gula</a:t>
             </a:r>
           </a:p>
@@ -12704,7 +13031,7 @@
           <a:lstStyle/>
           <a:p>
             <a:pPr algn="l">
-              <a:defRPr sz="2800" b="1">
+              <a:defRPr sz="3000" b="1">
                 <a:solidFill>
                   <a:srgbClr val="1B5E20"/>
                 </a:solidFill>
@@ -12712,6 +13039,7 @@
               </a:defRPr>
             </a:pPr>
             <a:r>
+              <a:rPr/>
               <a:t>Pendahuluan: Industri Gula Indonesia</a:t>
             </a:r>
           </a:p>
@@ -12740,7 +13068,7 @@
           <a:lstStyle/>
           <a:p>
             <a:pPr algn="l">
-              <a:defRPr sz="1300" b="0">
+              <a:defRPr sz="1500" b="0">
                 <a:solidFill>
                   <a:srgbClr val="2E7D32"/>
                 </a:solidFill>
@@ -12748,6 +13076,7 @@
               </a:defRPr>
             </a:pPr>
             <a:r>
+              <a:rPr/>
               <a:t>Posisi strategis &amp; konteks operasional</a:t>
             </a:r>
           </a:p>
@@ -12776,7 +13105,7 @@
           <a:lstStyle/>
           <a:p>
             <a:pPr algn="l">
-              <a:defRPr sz="800" b="0">
+              <a:defRPr sz="1100" b="0">
                 <a:solidFill>
                   <a:srgbClr val="9E9E9E"/>
                 </a:solidFill>
@@ -12784,6 +13113,7 @@
               </a:defRPr>
             </a:pPr>
             <a:r>
+              <a:rPr/>
               <a:t>3 / 21  •  Overview Operasional &amp; Proses Produksi Pabrik Gula  |  Internal Use</a:t>
             </a:r>
           </a:p>
@@ -12831,7 +13161,7 @@
           <a:lstStyle/>
           <a:p>
             <a:pPr algn="ctr">
-              <a:defRPr sz="2200" b="1">
+              <a:defRPr sz="2400" b="1">
                 <a:solidFill>
                   <a:srgbClr val="1B5E20"/>
                 </a:solidFill>
@@ -12839,18 +13169,20 @@
               </a:defRPr>
             </a:pPr>
             <a:r>
+              <a:rPr/>
               <a:t>~2,2 jt ton</a:t>
             </a:r>
           </a:p>
           <a:p>
             <a:pPr algn="ctr">
-              <a:defRPr sz="1000">
-                <a:solidFill>
-                  <a:srgbClr val="424242"/>
-                </a:solidFill>
-              </a:defRPr>
-            </a:pPr>
-            <a:r>
+              <a:defRPr sz="1300">
+                <a:solidFill>
+                  <a:srgbClr val="424242"/>
+                </a:solidFill>
+              </a:defRPr>
+            </a:pPr>
+            <a:r>
+              <a:rPr/>
               <a:t>Produksi nasional/tahun</a:t>
             </a:r>
           </a:p>
@@ -12898,7 +13230,7 @@
           <a:lstStyle/>
           <a:p>
             <a:pPr algn="ctr">
-              <a:defRPr sz="2200" b="1">
+              <a:defRPr sz="2400" b="1">
                 <a:solidFill>
                   <a:srgbClr val="1B5E20"/>
                 </a:solidFill>
@@ -12906,18 +13238,20 @@
               </a:defRPr>
             </a:pPr>
             <a:r>
+              <a:rPr/>
               <a:t>~5-6 jt ton</a:t>
             </a:r>
           </a:p>
           <a:p>
             <a:pPr algn="ctr">
-              <a:defRPr sz="1000">
-                <a:solidFill>
-                  <a:srgbClr val="424242"/>
-                </a:solidFill>
-              </a:defRPr>
-            </a:pPr>
-            <a:r>
+              <a:defRPr sz="1300">
+                <a:solidFill>
+                  <a:srgbClr val="424242"/>
+                </a:solidFill>
+              </a:defRPr>
+            </a:pPr>
+            <a:r>
+              <a:rPr/>
               <a:t>Konsumsi nasional/tahun</a:t>
             </a:r>
           </a:p>
@@ -12965,7 +13299,7 @@
           <a:lstStyle/>
           <a:p>
             <a:pPr algn="ctr">
-              <a:defRPr sz="2200" b="1">
+              <a:defRPr sz="2400" b="1">
                 <a:solidFill>
                   <a:srgbClr val="1B5E20"/>
                 </a:solidFill>
@@ -12973,18 +13307,20 @@
               </a:defRPr>
             </a:pPr>
             <a:r>
+              <a:rPr/>
               <a:t>~50%</a:t>
             </a:r>
           </a:p>
           <a:p>
             <a:pPr algn="ctr">
-              <a:defRPr sz="1000">
-                <a:solidFill>
-                  <a:srgbClr val="424242"/>
-                </a:solidFill>
-              </a:defRPr>
-            </a:pPr>
-            <a:r>
+              <a:defRPr sz="1300">
+                <a:solidFill>
+                  <a:srgbClr val="424242"/>
+                </a:solidFill>
+              </a:defRPr>
+            </a:pPr>
+            <a:r>
+              <a:rPr/>
               <a:t>Ketergantungan impor</a:t>
             </a:r>
           </a:p>
@@ -13032,7 +13368,7 @@
           <a:lstStyle/>
           <a:p>
             <a:pPr algn="ctr">
-              <a:defRPr sz="2200" b="1">
+              <a:defRPr sz="2400" b="1">
                 <a:solidFill>
                   <a:srgbClr val="1B5E20"/>
                 </a:solidFill>
@@ -13040,18 +13376,20 @@
               </a:defRPr>
             </a:pPr>
             <a:r>
+              <a:rPr/>
               <a:t>~60 PG</a:t>
             </a:r>
           </a:p>
           <a:p>
             <a:pPr algn="ctr">
-              <a:defRPr sz="1000">
-                <a:solidFill>
-                  <a:srgbClr val="424242"/>
-                </a:solidFill>
-              </a:defRPr>
-            </a:pPr>
-            <a:r>
+              <a:defRPr sz="1300">
+                <a:solidFill>
+                  <a:srgbClr val="424242"/>
+                </a:solidFill>
+              </a:defRPr>
+            </a:pPr>
+            <a:r>
+              <a:rPr/>
               <a:t>Pabrik gula aktif</a:t>
             </a:r>
           </a:p>
@@ -13083,14 +13421,15 @@
               <a:spcAft>
                 <a:spcPts val="400"/>
               </a:spcAft>
-              <a:defRPr sz="1100">
-                <a:solidFill>
-                  <a:srgbClr val="424242"/>
-                </a:solidFill>
-                <a:latin typeface="Calibri"/>
-              </a:defRPr>
-            </a:pPr>
-            <a:r>
+              <a:defRPr sz="1400">
+                <a:solidFill>
+                  <a:srgbClr val="424242"/>
+                </a:solidFill>
+                <a:latin typeface="Calibri"/>
+              </a:defRPr>
+            </a:pPr>
+            <a:r>
+              <a:rPr/>
               <a:t>• Musim giling: April – November (6–7 bulan operasi)</a:t>
             </a:r>
           </a:p>
@@ -13099,14 +13438,15 @@
               <a:spcAft>
                 <a:spcPts val="400"/>
               </a:spcAft>
-              <a:defRPr sz="1100">
-                <a:solidFill>
-                  <a:srgbClr val="424242"/>
-                </a:solidFill>
-                <a:latin typeface="Calibri"/>
-              </a:defRPr>
-            </a:pPr>
-            <a:r>
+              <a:defRPr sz="1400">
+                <a:solidFill>
+                  <a:srgbClr val="424242"/>
+                </a:solidFill>
+                <a:latin typeface="Calibri"/>
+              </a:defRPr>
+            </a:pPr>
+            <a:r>
+              <a:rPr/>
               <a:t>• Pemain utama: PTPN (BUMN), swasta nasional, pabrik gula rakyat</a:t>
             </a:r>
           </a:p>
@@ -13115,14 +13455,15 @@
               <a:spcAft>
                 <a:spcPts val="400"/>
               </a:spcAft>
-              <a:defRPr sz="1100">
-                <a:solidFill>
-                  <a:srgbClr val="424242"/>
-                </a:solidFill>
-                <a:latin typeface="Calibri"/>
-              </a:defRPr>
-            </a:pPr>
-            <a:r>
+              <a:defRPr sz="1400">
+                <a:solidFill>
+                  <a:srgbClr val="424242"/>
+                </a:solidFill>
+                <a:latin typeface="Calibri"/>
+              </a:defRPr>
+            </a:pPr>
+            <a:r>
+              <a:rPr/>
               <a:t>• Komoditas strategis: pangan, devisa negara, lapangan kerja</a:t>
             </a:r>
           </a:p>
@@ -13131,14 +13472,15 @@
               <a:spcAft>
                 <a:spcPts val="400"/>
               </a:spcAft>
-              <a:defRPr sz="1100">
-                <a:solidFill>
-                  <a:srgbClr val="424242"/>
-                </a:solidFill>
-                <a:latin typeface="Calibri"/>
-              </a:defRPr>
-            </a:pPr>
-            <a:r>
+              <a:defRPr sz="1400">
+                <a:solidFill>
+                  <a:srgbClr val="424242"/>
+                </a:solidFill>
+                <a:latin typeface="Calibri"/>
+              </a:defRPr>
+            </a:pPr>
+            <a:r>
+              <a:rPr/>
               <a:t>• Lead time tebu → gula: 24–48 jam (proses kontinu non-stop)</a:t>
             </a:r>
           </a:p>
@@ -13147,14 +13489,15 @@
               <a:spcAft>
                 <a:spcPts val="400"/>
               </a:spcAft>
-              <a:defRPr sz="1100">
-                <a:solidFill>
-                  <a:srgbClr val="424242"/>
-                </a:solidFill>
-                <a:latin typeface="Calibri"/>
-              </a:defRPr>
-            </a:pPr>
-            <a:r>
+              <a:defRPr sz="1400">
+                <a:solidFill>
+                  <a:srgbClr val="424242"/>
+                </a:solidFill>
+                <a:latin typeface="Calibri"/>
+              </a:defRPr>
+            </a:pPr>
+            <a:r>
+              <a:rPr/>
               <a:t>• Kapasitas pabrik: 3.000 – 6.000 TCD (Ton Cane per Day)</a:t>
             </a:r>
           </a:p>
@@ -13202,7 +13545,7 @@
           <a:lstStyle/>
           <a:p>
             <a:pPr algn="ctr">
-              <a:defRPr sz="1100" b="1">
+              <a:defRPr sz="1400" b="1">
                 <a:solidFill>
                   <a:srgbClr val="1B5E20"/>
                 </a:solidFill>
@@ -13210,6 +13553,7 @@
               </a:defRPr>
             </a:pPr>
             <a:r>
+              <a:rPr/>
               <a:t>Key Takeaway: Pabrik gula adalah industri terintegrasi hulu-hilir dengan gap besar antara produksi dan konsumsi nasional.</a:t>
             </a:r>
           </a:p>
@@ -13264,7 +13608,7 @@
           <a:lstStyle/>
           <a:p>
             <a:pPr algn="l">
-              <a:defRPr sz="2800" b="1">
+              <a:defRPr sz="3000" b="1">
                 <a:solidFill>
                   <a:srgbClr val="1B5E20"/>
                 </a:solidFill>
@@ -13272,6 +13616,7 @@
               </a:defRPr>
             </a:pPr>
             <a:r>
+              <a:rPr/>
               <a:t>Overview Alur Produksi Pabrik Gula</a:t>
             </a:r>
           </a:p>
@@ -13300,7 +13645,7 @@
           <a:lstStyle/>
           <a:p>
             <a:pPr algn="l">
-              <a:defRPr sz="1300" b="0">
+              <a:defRPr sz="1500" b="0">
                 <a:solidFill>
                   <a:srgbClr val="2E7D32"/>
                 </a:solidFill>
@@ -13308,6 +13653,7 @@
               </a:defRPr>
             </a:pPr>
             <a:r>
+              <a:rPr/>
               <a:t>9 Tahapan Utama — Dari Tebu Masuk hingga Gula Terkemas</a:t>
             </a:r>
           </a:p>
@@ -13336,7 +13682,7 @@
           <a:lstStyle/>
           <a:p>
             <a:pPr algn="l">
-              <a:defRPr sz="800" b="0">
+              <a:defRPr sz="1100" b="0">
                 <a:solidFill>
                   <a:srgbClr val="9E9E9E"/>
                 </a:solidFill>
@@ -13344,6 +13690,7 @@
               </a:defRPr>
             </a:pPr>
             <a:r>
+              <a:rPr/>
               <a:t>4 / 21  •  Overview Operasional &amp; Proses Produksi Pabrik Gula  |  Internal Use</a:t>
             </a:r>
           </a:p>
@@ -13389,29 +13736,32 @@
           <a:lstStyle/>
           <a:p>
             <a:pPr algn="ctr">
-              <a:defRPr sz="1600" b="1">
+              <a:defRPr sz="1800" b="1">
                 <a:solidFill>
                   <a:srgbClr val="FFFFFF"/>
                 </a:solidFill>
               </a:defRPr>
             </a:pPr>
             <a:r>
+              <a:rPr/>
               <a:t>1</a:t>
             </a:r>
           </a:p>
           <a:p>
             <a:pPr algn="ctr">
-              <a:defRPr sz="900">
+              <a:defRPr sz="1200">
                 <a:solidFill>
                   <a:srgbClr val="FFFFFF"/>
                 </a:solidFill>
               </a:defRPr>
             </a:pPr>
             <a:r>
+              <a:rPr/>
               <a:t>Penerimaan</a:t>
             </a:r>
             <a:br/>
             <a:r>
+              <a:rPr/>
               <a:t>Tebu</a:t>
             </a:r>
           </a:p>
@@ -13456,7 +13806,9 @@
           <a:bodyPr rtlCol="0" anchor="ctr"/>
           <a:lstStyle/>
           <a:p>
-            <a:pPr algn="ctr"/>
+            <a:pPr algn="ctr">
+              <a:defRPr/>
+            </a:pPr>
           </a:p>
         </p:txBody>
       </p:sp>
@@ -13500,29 +13852,32 @@
           <a:lstStyle/>
           <a:p>
             <a:pPr algn="ctr">
-              <a:defRPr sz="1600" b="1">
+              <a:defRPr sz="1800" b="1">
                 <a:solidFill>
                   <a:srgbClr val="FFFFFF"/>
                 </a:solidFill>
               </a:defRPr>
             </a:pPr>
             <a:r>
+              <a:rPr/>
               <a:t>2</a:t>
             </a:r>
           </a:p>
           <a:p>
             <a:pPr algn="ctr">
-              <a:defRPr sz="900">
+              <a:defRPr sz="1200">
                 <a:solidFill>
                   <a:srgbClr val="FFFFFF"/>
                 </a:solidFill>
               </a:defRPr>
             </a:pPr>
             <a:r>
+              <a:rPr/>
               <a:t>Cane</a:t>
             </a:r>
             <a:br/>
             <a:r>
+              <a:rPr/>
               <a:t>Handling</a:t>
             </a:r>
           </a:p>
@@ -13567,7 +13922,9 @@
           <a:bodyPr rtlCol="0" anchor="ctr"/>
           <a:lstStyle/>
           <a:p>
-            <a:pPr algn="ctr"/>
+            <a:pPr algn="ctr">
+              <a:defRPr/>
+            </a:pPr>
           </a:p>
         </p:txBody>
       </p:sp>
@@ -13611,29 +13968,32 @@
           <a:lstStyle/>
           <a:p>
             <a:pPr algn="ctr">
-              <a:defRPr sz="1600" b="1">
+              <a:defRPr sz="1800" b="1">
                 <a:solidFill>
                   <a:srgbClr val="FFFFFF"/>
                 </a:solidFill>
               </a:defRPr>
             </a:pPr>
             <a:r>
+              <a:rPr/>
               <a:t>3</a:t>
             </a:r>
           </a:p>
           <a:p>
             <a:pPr algn="ctr">
-              <a:defRPr sz="900">
+              <a:defRPr sz="1200">
                 <a:solidFill>
                   <a:srgbClr val="FFFFFF"/>
                 </a:solidFill>
               </a:defRPr>
             </a:pPr>
             <a:r>
+              <a:rPr/>
               <a:t>Milling</a:t>
             </a:r>
             <a:br/>
             <a:r>
+              <a:rPr/>
               <a:t>(Gilingan)</a:t>
             </a:r>
           </a:p>
@@ -13678,7 +14038,9 @@
           <a:bodyPr rtlCol="0" anchor="ctr"/>
           <a:lstStyle/>
           <a:p>
-            <a:pPr algn="ctr"/>
+            <a:pPr algn="ctr">
+              <a:defRPr/>
+            </a:pPr>
           </a:p>
         </p:txBody>
       </p:sp>
@@ -13722,29 +14084,32 @@
           <a:lstStyle/>
           <a:p>
             <a:pPr algn="ctr">
-              <a:defRPr sz="1600" b="1">
+              <a:defRPr sz="1800" b="1">
                 <a:solidFill>
                   <a:srgbClr val="FFFFFF"/>
                 </a:solidFill>
               </a:defRPr>
             </a:pPr>
             <a:r>
+              <a:rPr/>
               <a:t>4</a:t>
             </a:r>
           </a:p>
           <a:p>
             <a:pPr algn="ctr">
-              <a:defRPr sz="900">
+              <a:defRPr sz="1200">
                 <a:solidFill>
                   <a:srgbClr val="FFFFFF"/>
                 </a:solidFill>
               </a:defRPr>
             </a:pPr>
             <a:r>
+              <a:rPr/>
               <a:t>Pemurnian</a:t>
             </a:r>
             <a:br/>
             <a:r>
+              <a:rPr/>
               <a:t>Nira</a:t>
             </a:r>
           </a:p>
@@ -13789,7 +14154,9 @@
           <a:bodyPr rtlCol="0" anchor="ctr"/>
           <a:lstStyle/>
           <a:p>
-            <a:pPr algn="ctr"/>
+            <a:pPr algn="ctr">
+              <a:defRPr/>
+            </a:pPr>
           </a:p>
         </p:txBody>
       </p:sp>
@@ -13833,25 +14200,27 @@
           <a:lstStyle/>
           <a:p>
             <a:pPr algn="ctr">
-              <a:defRPr sz="1600" b="1">
+              <a:defRPr sz="1800" b="1">
                 <a:solidFill>
                   <a:srgbClr val="FFFFFF"/>
                 </a:solidFill>
               </a:defRPr>
             </a:pPr>
             <a:r>
+              <a:rPr/>
               <a:t>5</a:t>
             </a:r>
           </a:p>
           <a:p>
             <a:pPr algn="ctr">
-              <a:defRPr sz="900">
+              <a:defRPr sz="1200">
                 <a:solidFill>
                   <a:srgbClr val="FFFFFF"/>
                 </a:solidFill>
               </a:defRPr>
             </a:pPr>
             <a:r>
+              <a:rPr/>
               <a:t>Evaporasi</a:t>
             </a:r>
           </a:p>
@@ -13896,7 +14265,9 @@
           <a:bodyPr rtlCol="0" anchor="ctr"/>
           <a:lstStyle/>
           <a:p>
-            <a:pPr algn="ctr"/>
+            <a:pPr algn="ctr">
+              <a:defRPr/>
+            </a:pPr>
           </a:p>
         </p:txBody>
       </p:sp>
@@ -13940,25 +14311,27 @@
           <a:lstStyle/>
           <a:p>
             <a:pPr algn="ctr">
-              <a:defRPr sz="1600" b="1">
+              <a:defRPr sz="1800" b="1">
                 <a:solidFill>
                   <a:srgbClr val="FFFFFF"/>
                 </a:solidFill>
               </a:defRPr>
             </a:pPr>
             <a:r>
+              <a:rPr/>
               <a:t>6</a:t>
             </a:r>
           </a:p>
           <a:p>
             <a:pPr algn="ctr">
-              <a:defRPr sz="900">
+              <a:defRPr sz="1200">
                 <a:solidFill>
                   <a:srgbClr val="FFFFFF"/>
                 </a:solidFill>
               </a:defRPr>
             </a:pPr>
             <a:r>
+              <a:rPr/>
               <a:t>Kristalisasi</a:t>
             </a:r>
           </a:p>
@@ -14003,7 +14376,9 @@
           <a:bodyPr rtlCol="0" anchor="ctr"/>
           <a:lstStyle/>
           <a:p>
-            <a:pPr algn="ctr"/>
+            <a:pPr algn="ctr">
+              <a:defRPr/>
+            </a:pPr>
           </a:p>
         </p:txBody>
       </p:sp>
@@ -14047,25 +14422,27 @@
           <a:lstStyle/>
           <a:p>
             <a:pPr algn="ctr">
-              <a:defRPr sz="1600" b="1">
+              <a:defRPr sz="1800" b="1">
                 <a:solidFill>
                   <a:srgbClr val="FFFFFF"/>
                 </a:solidFill>
               </a:defRPr>
             </a:pPr>
             <a:r>
+              <a:rPr/>
               <a:t>7</a:t>
             </a:r>
           </a:p>
           <a:p>
             <a:pPr algn="ctr">
-              <a:defRPr sz="900">
+              <a:defRPr sz="1200">
                 <a:solidFill>
                   <a:srgbClr val="FFFFFF"/>
                 </a:solidFill>
               </a:defRPr>
             </a:pPr>
             <a:r>
+              <a:rPr/>
               <a:t>Centrifugasi</a:t>
             </a:r>
           </a:p>
@@ -14110,7 +14487,9 @@
           <a:bodyPr rtlCol="0" anchor="ctr"/>
           <a:lstStyle/>
           <a:p>
-            <a:pPr algn="ctr"/>
+            <a:pPr algn="ctr">
+              <a:defRPr/>
+            </a:pPr>
           </a:p>
         </p:txBody>
       </p:sp>
@@ -14154,29 +14533,32 @@
           <a:lstStyle/>
           <a:p>
             <a:pPr algn="ctr">
-              <a:defRPr sz="1600" b="1">
+              <a:defRPr sz="1800" b="1">
                 <a:solidFill>
                   <a:srgbClr val="FFFFFF"/>
                 </a:solidFill>
               </a:defRPr>
             </a:pPr>
             <a:r>
+              <a:rPr/>
               <a:t>8</a:t>
             </a:r>
           </a:p>
           <a:p>
             <a:pPr algn="ctr">
-              <a:defRPr sz="900">
+              <a:defRPr sz="1200">
                 <a:solidFill>
                   <a:srgbClr val="FFFFFF"/>
                 </a:solidFill>
               </a:defRPr>
             </a:pPr>
             <a:r>
+              <a:rPr/>
               <a:t>Pengeringan</a:t>
             </a:r>
             <a:br/>
             <a:r>
+              <a:rPr/>
               <a:t>&amp; Pendinginan</a:t>
             </a:r>
           </a:p>
@@ -14221,7 +14603,9 @@
           <a:bodyPr rtlCol="0" anchor="ctr"/>
           <a:lstStyle/>
           <a:p>
-            <a:pPr algn="ctr"/>
+            <a:pPr algn="ctr">
+              <a:defRPr/>
+            </a:pPr>
           </a:p>
         </p:txBody>
       </p:sp>
@@ -14265,29 +14649,32 @@
           <a:lstStyle/>
           <a:p>
             <a:pPr algn="ctr">
-              <a:defRPr sz="1600" b="1">
+              <a:defRPr sz="1800" b="1">
                 <a:solidFill>
                   <a:srgbClr val="FFFFFF"/>
                 </a:solidFill>
               </a:defRPr>
             </a:pPr>
             <a:r>
+              <a:rPr/>
               <a:t>9</a:t>
             </a:r>
           </a:p>
           <a:p>
             <a:pPr algn="ctr">
-              <a:defRPr sz="900">
+              <a:defRPr sz="1200">
                 <a:solidFill>
                   <a:srgbClr val="FFFFFF"/>
                 </a:solidFill>
               </a:defRPr>
             </a:pPr>
             <a:r>
+              <a:rPr/>
               <a:t>Pengemasan</a:t>
             </a:r>
             <a:br/>
             <a:r>
+              <a:rPr/>
               <a:t>&amp; Gudang</a:t>
             </a:r>
           </a:p>
@@ -14316,7 +14703,7 @@
           <a:lstStyle/>
           <a:p>
             <a:pPr algn="l">
-              <a:defRPr sz="900" b="1">
+              <a:defRPr sz="1200" b="1">
                 <a:solidFill>
                   <a:srgbClr val="2E7D32"/>
                 </a:solidFill>
@@ -14324,6 +14711,7 @@
               </a:defRPr>
             </a:pPr>
             <a:r>
+              <a:rPr/>
               <a:t>PERSIAPAN BAHAN BAKU</a:t>
             </a:r>
           </a:p>
@@ -14352,7 +14740,7 @@
           <a:lstStyle/>
           <a:p>
             <a:pPr algn="l">
-              <a:defRPr sz="900" b="1">
+              <a:defRPr sz="1200" b="1">
                 <a:solidFill>
                   <a:srgbClr val="1B5E20"/>
                 </a:solidFill>
@@ -14360,6 +14748,7 @@
               </a:defRPr>
             </a:pPr>
             <a:r>
+              <a:rPr/>
               <a:t>PENGOLAHAN INTI</a:t>
             </a:r>
           </a:p>
@@ -14388,7 +14777,7 @@
           <a:lstStyle/>
           <a:p>
             <a:pPr algn="l">
-              <a:defRPr sz="900" b="1">
+              <a:defRPr sz="1200" b="1">
                 <a:solidFill>
                   <a:srgbClr val="6D4C41"/>
                 </a:solidFill>
@@ -14396,6 +14785,7 @@
               </a:defRPr>
             </a:pPr>
             <a:r>
+              <a:rPr/>
               <a:t>FINISHING &amp; OUTPUT</a:t>
             </a:r>
           </a:p>
@@ -14427,14 +14817,15 @@
               <a:spcAft>
                 <a:spcPts val="400"/>
               </a:spcAft>
-              <a:defRPr sz="1000" b="1">
-                <a:solidFill>
-                  <a:srgbClr val="424242"/>
-                </a:solidFill>
-                <a:latin typeface="Calibri"/>
-              </a:defRPr>
-            </a:pPr>
-            <a:r>
+              <a:defRPr sz="1300" b="1">
+                <a:solidFill>
+                  <a:srgbClr val="424242"/>
+                </a:solidFill>
+                <a:latin typeface="Calibri"/>
+              </a:defRPr>
+            </a:pPr>
+            <a:r>
+              <a:rPr/>
               <a:t>Apa yang terjadi di proses ini?</a:t>
             </a:r>
           </a:p>
@@ -14443,14 +14834,15 @@
               <a:spcAft>
                 <a:spcPts val="400"/>
               </a:spcAft>
-              <a:defRPr sz="1000">
-                <a:solidFill>
-                  <a:srgbClr val="424242"/>
-                </a:solidFill>
-                <a:latin typeface="Calibri"/>
-              </a:defRPr>
-            </a:pPr>
-            <a:r>
+              <a:defRPr sz="1300">
+                <a:solidFill>
+                  <a:srgbClr val="424242"/>
+                </a:solidFill>
+                <a:latin typeface="Calibri"/>
+              </a:defRPr>
+            </a:pPr>
+            <a:r>
+              <a:rPr/>
               <a:t>Tebu segar ditimbang → dicacah → digiling untuk diambil niranya → nira dimurnikan →</a:t>
             </a:r>
           </a:p>
@@ -14459,14 +14851,15 @@
               <a:spcAft>
                 <a:spcPts val="400"/>
               </a:spcAft>
-              <a:defRPr sz="1000">
-                <a:solidFill>
-                  <a:srgbClr val="424242"/>
-                </a:solidFill>
-                <a:latin typeface="Calibri"/>
-              </a:defRPr>
-            </a:pPr>
-            <a:r>
+              <a:defRPr sz="1300">
+                <a:solidFill>
+                  <a:srgbClr val="424242"/>
+                </a:solidFill>
+                <a:latin typeface="Calibri"/>
+              </a:defRPr>
+            </a:pPr>
+            <a:r>
+              <a:rPr/>
               <a:t>air diuapkan → gula dikristalkan → dipisahkan → dikeringkan → dikemas siap jual.</a:t>
             </a:r>
           </a:p>
@@ -14475,7 +14868,7 @@
               <a:spcAft>
                 <a:spcPts val="400"/>
               </a:spcAft>
-              <a:defRPr sz="1000">
+              <a:defRPr sz="1300">
                 <a:solidFill>
                   <a:srgbClr val="424242"/>
                 </a:solidFill>
@@ -14488,14 +14881,15 @@
               <a:spcAft>
                 <a:spcPts val="400"/>
               </a:spcAft>
-              <a:defRPr sz="1000">
-                <a:solidFill>
-                  <a:srgbClr val="424242"/>
-                </a:solidFill>
-                <a:latin typeface="Calibri"/>
-              </a:defRPr>
-            </a:pPr>
-            <a:r>
+              <a:defRPr sz="1300">
+                <a:solidFill>
+                  <a:srgbClr val="424242"/>
+                </a:solidFill>
+                <a:latin typeface="Calibri"/>
+              </a:defRPr>
+            </a:pPr>
+            <a:r>
+              <a:rPr/>
               <a:t>Analogi sederhana: 100 ton tebu masuk → keluar 8–10 ton gula + 30 ton ampas (bagasse) + 4–5 ton tetes (molasses)</a:t>
             </a:r>
           </a:p>
@@ -14543,7 +14937,7 @@
           <a:lstStyle/>
           <a:p>
             <a:pPr algn="ctr">
-              <a:defRPr sz="1100" b="1">
+              <a:defRPr sz="1400" b="1">
                 <a:solidFill>
                   <a:srgbClr val="1B5E20"/>
                 </a:solidFill>
@@ -14551,6 +14945,7 @@
               </a:defRPr>
             </a:pPr>
             <a:r>
+              <a:rPr/>
               <a:t>Key Takeaway: Total proses berjalan kontinu 24/7 selama musim giling. Setiap jam keterlambatan = kehilangan 0,1% pol.</a:t>
             </a:r>
           </a:p>
@@ -14605,7 +15000,7 @@
           <a:lstStyle/>
           <a:p>
             <a:pPr algn="l">
-              <a:defRPr sz="2800" b="1">
+              <a:defRPr sz="3000" b="1">
                 <a:solidFill>
                   <a:srgbClr val="1B5E20"/>
                 </a:solidFill>
@@ -14613,6 +15008,7 @@
               </a:defRPr>
             </a:pPr>
             <a:r>
+              <a:rPr/>
               <a:t>Penerimaan &amp; Penanganan Tebu</a:t>
             </a:r>
           </a:p>
@@ -14641,7 +15037,7 @@
           <a:lstStyle/>
           <a:p>
             <a:pPr algn="l">
-              <a:defRPr sz="1300" b="0">
+              <a:defRPr sz="1500" b="0">
                 <a:solidFill>
                   <a:srgbClr val="2E7D32"/>
                 </a:solidFill>
@@ -14649,6 +15045,7 @@
               </a:defRPr>
             </a:pPr>
             <a:r>
+              <a:rPr/>
               <a:t>Stasiun Pertama — Gerbang kualitas bahan baku</a:t>
             </a:r>
           </a:p>
@@ -14677,7 +15074,7 @@
           <a:lstStyle/>
           <a:p>
             <a:pPr algn="l">
-              <a:defRPr sz="800" b="0">
+              <a:defRPr sz="1100" b="0">
                 <a:solidFill>
                   <a:srgbClr val="9E9E9E"/>
                 </a:solidFill>
@@ -14685,6 +15082,7 @@
               </a:defRPr>
             </a:pPr>
             <a:r>
+              <a:rPr/>
               <a:t>5 / 21  •  Overview Operasional &amp; Proses Produksi Pabrik Gula  |  Internal Use</a:t>
             </a:r>
           </a:p>
@@ -14732,25 +15130,27 @@
           <a:lstStyle/>
           <a:p>
             <a:pPr algn="ctr">
-              <a:defRPr sz="1100" b="1">
+              <a:defRPr sz="1400" b="1">
                 <a:solidFill>
                   <a:srgbClr val="1B5E20"/>
                 </a:solidFill>
               </a:defRPr>
             </a:pPr>
             <a:r>
+              <a:rPr/>
               <a:t>⟶ Truk Masuk</a:t>
             </a:r>
           </a:p>
           <a:p>
             <a:pPr algn="ctr">
-              <a:defRPr sz="900">
-                <a:solidFill>
-                  <a:srgbClr val="424242"/>
-                </a:solidFill>
-              </a:defRPr>
-            </a:pPr>
-            <a:r>
+              <a:defRPr sz="1200">
+                <a:solidFill>
+                  <a:srgbClr val="424242"/>
+                </a:solidFill>
+              </a:defRPr>
+            </a:pPr>
+            <a:r>
+              <a:rPr/>
               <a:t>Tebu dari kebun tiba di pabrik</a:t>
             </a:r>
           </a:p>
@@ -14798,25 +15198,27 @@
           <a:lstStyle/>
           <a:p>
             <a:pPr algn="ctr">
-              <a:defRPr sz="1100" b="1">
+              <a:defRPr sz="1400" b="1">
                 <a:solidFill>
                   <a:srgbClr val="1B5E20"/>
                 </a:solidFill>
               </a:defRPr>
             </a:pPr>
             <a:r>
+              <a:rPr/>
               <a:t>⟶ Timbangan</a:t>
             </a:r>
           </a:p>
           <a:p>
             <a:pPr algn="ctr">
-              <a:defRPr sz="900">
-                <a:solidFill>
-                  <a:srgbClr val="424242"/>
-                </a:solidFill>
-              </a:defRPr>
-            </a:pPr>
-            <a:r>
+              <a:defRPr sz="1200">
+                <a:solidFill>
+                  <a:srgbClr val="424242"/>
+                </a:solidFill>
+              </a:defRPr>
+            </a:pPr>
+            <a:r>
+              <a:rPr/>
               <a:t>Ditimbang bruto &amp; tarra</a:t>
             </a:r>
           </a:p>
@@ -14864,25 +15266,27 @@
           <a:lstStyle/>
           <a:p>
             <a:pPr algn="ctr">
-              <a:defRPr sz="1100" b="1">
+              <a:defRPr sz="1400" b="1">
                 <a:solidFill>
                   <a:srgbClr val="1B5E20"/>
                 </a:solidFill>
               </a:defRPr>
             </a:pPr>
             <a:r>
+              <a:rPr/>
               <a:t>⟶ Sampling</a:t>
             </a:r>
           </a:p>
           <a:p>
             <a:pPr algn="ctr">
-              <a:defRPr sz="900">
-                <a:solidFill>
-                  <a:srgbClr val="424242"/>
-                </a:solidFill>
-              </a:defRPr>
-            </a:pPr>
-            <a:r>
+              <a:defRPr sz="1200">
+                <a:solidFill>
+                  <a:srgbClr val="424242"/>
+                </a:solidFill>
+              </a:defRPr>
+            </a:pPr>
+            <a:r>
+              <a:rPr/>
               <a:t>Cek pol, brix, kadar trash</a:t>
             </a:r>
           </a:p>
@@ -14930,25 +15334,27 @@
           <a:lstStyle/>
           <a:p>
             <a:pPr algn="ctr">
-              <a:defRPr sz="1100" b="1">
+              <a:defRPr sz="1400" b="1">
                 <a:solidFill>
                   <a:srgbClr val="1B5E20"/>
                 </a:solidFill>
               </a:defRPr>
             </a:pPr>
             <a:r>
+              <a:rPr/>
               <a:t>⟶ Cane Yard</a:t>
             </a:r>
           </a:p>
           <a:p>
             <a:pPr algn="ctr">
-              <a:defRPr sz="900">
-                <a:solidFill>
-                  <a:srgbClr val="424242"/>
-                </a:solidFill>
-              </a:defRPr>
-            </a:pPr>
-            <a:r>
+              <a:defRPr sz="1200">
+                <a:solidFill>
+                  <a:srgbClr val="424242"/>
+                </a:solidFill>
+              </a:defRPr>
+            </a:pPr>
+            <a:r>
+              <a:rPr/>
               <a:t>Antri di emplasement (maks 24 jam)</a:t>
             </a:r>
           </a:p>
@@ -14996,25 +15402,27 @@
           <a:lstStyle/>
           <a:p>
             <a:pPr algn="ctr">
-              <a:defRPr sz="1100" b="1">
+              <a:defRPr sz="1400" b="1">
                 <a:solidFill>
                   <a:srgbClr val="1B5E20"/>
                 </a:solidFill>
               </a:defRPr>
             </a:pPr>
             <a:r>
+              <a:rPr/>
               <a:t>⟶ Feeding Table</a:t>
             </a:r>
           </a:p>
           <a:p>
             <a:pPr algn="ctr">
-              <a:defRPr sz="900">
-                <a:solidFill>
-                  <a:srgbClr val="424242"/>
-                </a:solidFill>
-              </a:defRPr>
-            </a:pPr>
-            <a:r>
+              <a:defRPr sz="1200">
+                <a:solidFill>
+                  <a:srgbClr val="424242"/>
+                </a:solidFill>
+              </a:defRPr>
+            </a:pPr>
+            <a:r>
+              <a:rPr/>
               <a:t>Dipindah ke meja tebu menuju gilingan</a:t>
             </a:r>
           </a:p>
@@ -15046,14 +15454,15 @@
               <a:spcAft>
                 <a:spcPts val="400"/>
               </a:spcAft>
-              <a:defRPr sz="1000" b="1">
-                <a:solidFill>
-                  <a:srgbClr val="424242"/>
-                </a:solidFill>
-                <a:latin typeface="Calibri"/>
-              </a:defRPr>
-            </a:pPr>
-            <a:r>
+              <a:defRPr sz="1300" b="1">
+                <a:solidFill>
+                  <a:srgbClr val="424242"/>
+                </a:solidFill>
+                <a:latin typeface="Calibri"/>
+              </a:defRPr>
+            </a:pPr>
+            <a:r>
+              <a:rPr/>
               <a:t>Apa yang terjadi di proses ini?</a:t>
             </a:r>
           </a:p>
@@ -15062,7 +15471,7 @@
               <a:spcAft>
                 <a:spcPts val="400"/>
               </a:spcAft>
-              <a:defRPr sz="1000">
+              <a:defRPr sz="1300">
                 <a:solidFill>
                   <a:srgbClr val="424242"/>
                 </a:solidFill>
@@ -15075,14 +15484,15 @@
               <a:spcAft>
                 <a:spcPts val="400"/>
               </a:spcAft>
-              <a:defRPr sz="1000">
-                <a:solidFill>
-                  <a:srgbClr val="424242"/>
-                </a:solidFill>
-                <a:latin typeface="Calibri"/>
-              </a:defRPr>
-            </a:pPr>
-            <a:r>
+              <a:defRPr sz="1300">
+                <a:solidFill>
+                  <a:srgbClr val="424242"/>
+                </a:solidFill>
+                <a:latin typeface="Calibri"/>
+              </a:defRPr>
+            </a:pPr>
+            <a:r>
+              <a:rPr/>
               <a:t>• Tebu dari kebun diangkut truk, ditimbang untuk mengetahui berat bersih</a:t>
             </a:r>
           </a:p>
@@ -15091,14 +15501,15 @@
               <a:spcAft>
                 <a:spcPts val="400"/>
               </a:spcAft>
-              <a:defRPr sz="1000">
-                <a:solidFill>
-                  <a:srgbClr val="424242"/>
-                </a:solidFill>
-                <a:latin typeface="Calibri"/>
-              </a:defRPr>
-            </a:pPr>
-            <a:r>
+              <a:defRPr sz="1300">
+                <a:solidFill>
+                  <a:srgbClr val="424242"/>
+                </a:solidFill>
+                <a:latin typeface="Calibri"/>
+              </a:defRPr>
+            </a:pPr>
+            <a:r>
+              <a:rPr/>
               <a:t>• Dilakukan sampling: diukur kadar gula (pol), padatan terlarut (brix), dan kadar kotoran (trash)</a:t>
             </a:r>
           </a:p>
@@ -15107,14 +15518,15 @@
               <a:spcAft>
                 <a:spcPts val="400"/>
               </a:spcAft>
-              <a:defRPr sz="1000">
-                <a:solidFill>
-                  <a:srgbClr val="424242"/>
-                </a:solidFill>
-                <a:latin typeface="Calibri"/>
-              </a:defRPr>
-            </a:pPr>
-            <a:r>
+              <a:defRPr sz="1300">
+                <a:solidFill>
+                  <a:srgbClr val="424242"/>
+                </a:solidFill>
+                <a:latin typeface="Calibri"/>
+              </a:defRPr>
+            </a:pPr>
+            <a:r>
+              <a:rPr/>
               <a:t>• Hasil sampling menentukan kualitas tebu &amp; pembayaran ke petani</a:t>
             </a:r>
           </a:p>
@@ -15123,14 +15535,15 @@
               <a:spcAft>
                 <a:spcPts val="400"/>
               </a:spcAft>
-              <a:defRPr sz="1000">
-                <a:solidFill>
-                  <a:srgbClr val="424242"/>
-                </a:solidFill>
-                <a:latin typeface="Calibri"/>
-              </a:defRPr>
-            </a:pPr>
-            <a:r>
+              <a:defRPr sz="1300">
+                <a:solidFill>
+                  <a:srgbClr val="424242"/>
+                </a:solidFill>
+                <a:latin typeface="Calibri"/>
+              </a:defRPr>
+            </a:pPr>
+            <a:r>
+              <a:rPr/>
               <a:t>• Tebu menunggu di cane yard (emplasement) — TIDAK BOLEH &gt;24 jam karena pol turun</a:t>
             </a:r>
           </a:p>
@@ -15139,14 +15552,15 @@
               <a:spcAft>
                 <a:spcPts val="400"/>
               </a:spcAft>
-              <a:defRPr sz="1000">
-                <a:solidFill>
-                  <a:srgbClr val="424242"/>
-                </a:solidFill>
-                <a:latin typeface="Calibri"/>
-              </a:defRPr>
-            </a:pPr>
-            <a:r>
+              <a:defRPr sz="1300">
+                <a:solidFill>
+                  <a:srgbClr val="424242"/>
+                </a:solidFill>
+                <a:latin typeface="Calibri"/>
+              </a:defRPr>
+            </a:pPr>
+            <a:r>
+              <a:rPr/>
               <a:t>• Sistem FIFO (First In First Out) untuk menjaga kesegaran tebu</a:t>
             </a:r>
           </a:p>
@@ -15155,7 +15569,7 @@
               <a:spcAft>
                 <a:spcPts val="400"/>
               </a:spcAft>
-              <a:defRPr sz="1000">
+              <a:defRPr sz="1300">
                 <a:solidFill>
                   <a:srgbClr val="424242"/>
                 </a:solidFill>
@@ -15168,14 +15582,15 @@
               <a:spcAft>
                 <a:spcPts val="400"/>
               </a:spcAft>
-              <a:defRPr sz="1000">
-                <a:solidFill>
-                  <a:srgbClr val="424242"/>
-                </a:solidFill>
-                <a:latin typeface="Calibri"/>
-              </a:defRPr>
-            </a:pPr>
-            <a:r>
+              <a:defRPr sz="1300">
+                <a:solidFill>
+                  <a:srgbClr val="424242"/>
+                </a:solidFill>
+                <a:latin typeface="Calibri"/>
+              </a:defRPr>
+            </a:pPr>
+            <a:r>
+              <a:rPr/>
               <a:t>Parameter kritis: Pol tebu ≥8%, Trash &lt;5%, Waktu tunggu &lt;24 jam</a:t>
             </a:r>
           </a:p>
@@ -15223,7 +15638,7 @@
           <a:lstStyle/>
           <a:p>
             <a:pPr algn="ctr">
-              <a:defRPr sz="1100" b="1">
+              <a:defRPr sz="1400" b="1">
                 <a:solidFill>
                   <a:srgbClr val="1B5E20"/>
                 </a:solidFill>
@@ -15231,6 +15646,7 @@
               </a:defRPr>
             </a:pPr>
             <a:r>
+              <a:rPr/>
               <a:t>Key Takeaway: Kualitas tebu di titik ini menentukan rendemen akhir. Tebu terlambat = gula hilang.</a:t>
             </a:r>
           </a:p>
@@ -15285,7 +15701,7 @@
           <a:lstStyle/>
           <a:p>
             <a:pPr algn="l">
-              <a:defRPr sz="2800" b="1">
+              <a:defRPr sz="3000" b="1">
                 <a:solidFill>
                   <a:srgbClr val="1B5E20"/>
                 </a:solidFill>
@@ -15293,6 +15709,7 @@
               </a:defRPr>
             </a:pPr>
             <a:r>
+              <a:rPr/>
               <a:t>Cane Preparation &amp; Milling</a:t>
             </a:r>
           </a:p>
@@ -15321,7 +15738,7 @@
           <a:lstStyle/>
           <a:p>
             <a:pPr algn="l">
-              <a:defRPr sz="1300" b="0">
+              <a:defRPr sz="1500" b="0">
                 <a:solidFill>
                   <a:srgbClr val="2E7D32"/>
                 </a:solidFill>
@@ -15329,6 +15746,7 @@
               </a:defRPr>
             </a:pPr>
             <a:r>
+              <a:rPr/>
               <a:t>Stasiun Gilingan — Jantung ekstraksi gula</a:t>
             </a:r>
           </a:p>
@@ -15357,7 +15775,7 @@
           <a:lstStyle/>
           <a:p>
             <a:pPr algn="l">
-              <a:defRPr sz="800" b="0">
+              <a:defRPr sz="1100" b="0">
                 <a:solidFill>
                   <a:srgbClr val="9E9E9E"/>
                 </a:solidFill>
@@ -15365,6 +15783,7 @@
               </a:defRPr>
             </a:pPr>
             <a:r>
+              <a:rPr/>
               <a:t>6 / 21  •  Overview Operasional &amp; Proses Produksi Pabrik Gula  |  Internal Use</a:t>
             </a:r>
           </a:p>
@@ -15393,7 +15812,7 @@
           <a:lstStyle/>
           <a:p>
             <a:pPr algn="l">
-              <a:defRPr sz="1200" b="1">
+              <a:defRPr sz="1500" b="1">
                 <a:solidFill>
                   <a:srgbClr val="1B5E20"/>
                 </a:solidFill>
@@ -15401,6 +15820,7 @@
               </a:defRPr>
             </a:pPr>
             <a:r>
+              <a:rPr/>
               <a:t>CANE PREPARATION</a:t>
             </a:r>
           </a:p>
@@ -15432,14 +15852,15 @@
               <a:spcAft>
                 <a:spcPts val="400"/>
               </a:spcAft>
-              <a:defRPr sz="1000">
-                <a:solidFill>
-                  <a:srgbClr val="424242"/>
-                </a:solidFill>
-                <a:latin typeface="Calibri"/>
-              </a:defRPr>
-            </a:pPr>
-            <a:r>
+              <a:defRPr sz="1300">
+                <a:solidFill>
+                  <a:srgbClr val="424242"/>
+                </a:solidFill>
+                <a:latin typeface="Calibri"/>
+              </a:defRPr>
+            </a:pPr>
+            <a:r>
+              <a:rPr/>
               <a:t>1. Cane Leveller — meratakan tebu di conveyor</a:t>
             </a:r>
           </a:p>
@@ -15448,14 +15869,15 @@
               <a:spcAft>
                 <a:spcPts val="400"/>
               </a:spcAft>
-              <a:defRPr sz="1000">
-                <a:solidFill>
-                  <a:srgbClr val="424242"/>
-                </a:solidFill>
-                <a:latin typeface="Calibri"/>
-              </a:defRPr>
-            </a:pPr>
-            <a:r>
+              <a:defRPr sz="1300">
+                <a:solidFill>
+                  <a:srgbClr val="424242"/>
+                </a:solidFill>
+                <a:latin typeface="Calibri"/>
+              </a:defRPr>
+            </a:pPr>
+            <a:r>
+              <a:rPr/>
               <a:t>2. Cane Cutter (I &amp; II) — memotong tebu jadi potongan pendek</a:t>
             </a:r>
           </a:p>
@@ -15464,14 +15886,15 @@
               <a:spcAft>
                 <a:spcPts val="400"/>
               </a:spcAft>
-              <a:defRPr sz="1000">
-                <a:solidFill>
-                  <a:srgbClr val="424242"/>
-                </a:solidFill>
-                <a:latin typeface="Calibri"/>
-              </a:defRPr>
-            </a:pPr>
-            <a:r>
+              <a:defRPr sz="1300">
+                <a:solidFill>
+                  <a:srgbClr val="424242"/>
+                </a:solidFill>
+                <a:latin typeface="Calibri"/>
+              </a:defRPr>
+            </a:pPr>
+            <a:r>
+              <a:rPr/>
               <a:t>3. Unigrator / Shredder — mencacah tebu jadi serat halus</a:t>
             </a:r>
           </a:p>
@@ -15480,7 +15903,7 @@
               <a:spcAft>
                 <a:spcPts val="400"/>
               </a:spcAft>
-              <a:defRPr sz="1000">
+              <a:defRPr sz="1300">
                 <a:solidFill>
                   <a:srgbClr val="424242"/>
                 </a:solidFill>
@@ -15493,14 +15916,15 @@
               <a:spcAft>
                 <a:spcPts val="400"/>
               </a:spcAft>
-              <a:defRPr sz="1000">
-                <a:solidFill>
-                  <a:srgbClr val="424242"/>
-                </a:solidFill>
-                <a:latin typeface="Calibri"/>
-              </a:defRPr>
-            </a:pPr>
-            <a:r>
+              <a:defRPr sz="1300">
+                <a:solidFill>
+                  <a:srgbClr val="424242"/>
+                </a:solidFill>
+                <a:latin typeface="Calibri"/>
+              </a:defRPr>
+            </a:pPr>
+            <a:r>
+              <a:rPr/>
               <a:t>Tujuan: membuka sel-sel tebu agar nira mudah diekstraksi.</a:t>
             </a:r>
           </a:p>
@@ -15509,14 +15933,15 @@
               <a:spcAft>
                 <a:spcPts val="400"/>
               </a:spcAft>
-              <a:defRPr sz="1000">
-                <a:solidFill>
-                  <a:srgbClr val="424242"/>
-                </a:solidFill>
-                <a:latin typeface="Calibri"/>
-              </a:defRPr>
-            </a:pPr>
-            <a:r>
+              <a:defRPr sz="1300">
+                <a:solidFill>
+                  <a:srgbClr val="424242"/>
+                </a:solidFill>
+                <a:latin typeface="Calibri"/>
+              </a:defRPr>
+            </a:pPr>
+            <a:r>
+              <a:rPr/>
               <a:t>Preparation Index (PI) target: &gt;85%</a:t>
             </a:r>
           </a:p>
@@ -15525,14 +15950,15 @@
               <a:spcAft>
                 <a:spcPts val="400"/>
               </a:spcAft>
-              <a:defRPr sz="1000">
-                <a:solidFill>
-                  <a:srgbClr val="424242"/>
-                </a:solidFill>
-                <a:latin typeface="Calibri"/>
-              </a:defRPr>
-            </a:pPr>
-            <a:r>
+              <a:defRPr sz="1300">
+                <a:solidFill>
+                  <a:srgbClr val="424242"/>
+                </a:solidFill>
+                <a:latin typeface="Calibri"/>
+              </a:defRPr>
+            </a:pPr>
+            <a:r>
+              <a:rPr/>
               <a:t>(PI = seberapa banyak sel tebu yang terbuka)</a:t>
             </a:r>
           </a:p>
@@ -15561,7 +15987,7 @@
           <a:lstStyle/>
           <a:p>
             <a:pPr algn="l">
-              <a:defRPr sz="1200" b="1">
+              <a:defRPr sz="1500" b="1">
                 <a:solidFill>
                   <a:srgbClr val="1B5E20"/>
                 </a:solidFill>
@@ -15569,6 +15995,7 @@
               </a:defRPr>
             </a:pPr>
             <a:r>
+              <a:rPr/>
               <a:t>MILLING (GILINGAN)</a:t>
             </a:r>
           </a:p>
@@ -15600,14 +16027,15 @@
               <a:spcAft>
                 <a:spcPts val="400"/>
               </a:spcAft>
-              <a:defRPr sz="1000">
-                <a:solidFill>
-                  <a:srgbClr val="424242"/>
-                </a:solidFill>
-                <a:latin typeface="Calibri"/>
-              </a:defRPr>
-            </a:pPr>
-            <a:r>
+              <a:defRPr sz="1300">
+                <a:solidFill>
+                  <a:srgbClr val="424242"/>
+                </a:solidFill>
+                <a:latin typeface="Calibri"/>
+              </a:defRPr>
+            </a:pPr>
+            <a:r>
+              <a:rPr/>
               <a:t>• Terdiri dari 4–6 unit gilingan (tandem mill)</a:t>
             </a:r>
           </a:p>
@@ -15616,14 +16044,15 @@
               <a:spcAft>
                 <a:spcPts val="400"/>
               </a:spcAft>
-              <a:defRPr sz="1000">
-                <a:solidFill>
-                  <a:srgbClr val="424242"/>
-                </a:solidFill>
-                <a:latin typeface="Calibri"/>
-              </a:defRPr>
-            </a:pPr>
-            <a:r>
+              <a:defRPr sz="1300">
+                <a:solidFill>
+                  <a:srgbClr val="424242"/>
+                </a:solidFill>
+                <a:latin typeface="Calibri"/>
+              </a:defRPr>
+            </a:pPr>
+            <a:r>
+              <a:rPr/>
               <a:t>• Setiap unit: 3 roll (top, feed, discharge)</a:t>
             </a:r>
           </a:p>
@@ -15632,14 +16061,15 @@
               <a:spcAft>
                 <a:spcPts val="400"/>
               </a:spcAft>
-              <a:defRPr sz="1000">
-                <a:solidFill>
-                  <a:srgbClr val="424242"/>
-                </a:solidFill>
-                <a:latin typeface="Calibri"/>
-              </a:defRPr>
-            </a:pPr>
-            <a:r>
+              <a:defRPr sz="1300">
+                <a:solidFill>
+                  <a:srgbClr val="424242"/>
+                </a:solidFill>
+                <a:latin typeface="Calibri"/>
+              </a:defRPr>
+            </a:pPr>
+            <a:r>
+              <a:rPr/>
               <a:t>• Tebu dicacah diperas bertahap dari gilingan I → terakhir</a:t>
             </a:r>
           </a:p>
@@ -15648,14 +16078,15 @@
               <a:spcAft>
                 <a:spcPts val="400"/>
               </a:spcAft>
-              <a:defRPr sz="1000">
-                <a:solidFill>
-                  <a:srgbClr val="424242"/>
-                </a:solidFill>
-                <a:latin typeface="Calibri"/>
-              </a:defRPr>
-            </a:pPr>
-            <a:r>
+              <a:defRPr sz="1300">
+                <a:solidFill>
+                  <a:srgbClr val="424242"/>
+                </a:solidFill>
+                <a:latin typeface="Calibri"/>
+              </a:defRPr>
+            </a:pPr>
+            <a:r>
+              <a:rPr/>
               <a:t>• Ditambahkan air imbibisi di gilingan akhir</a:t>
             </a:r>
           </a:p>
@@ -15664,14 +16095,15 @@
               <a:spcAft>
                 <a:spcPts val="400"/>
               </a:spcAft>
-              <a:defRPr sz="1000">
-                <a:solidFill>
-                  <a:srgbClr val="424242"/>
-                </a:solidFill>
-                <a:latin typeface="Calibri"/>
-              </a:defRPr>
-            </a:pPr>
-            <a:r>
+              <a:defRPr sz="1300">
+                <a:solidFill>
+                  <a:srgbClr val="424242"/>
+                </a:solidFill>
+                <a:latin typeface="Calibri"/>
+              </a:defRPr>
+            </a:pPr>
+            <a:r>
+              <a:rPr/>
               <a:t>  (untuk melarutkan sisa gula dalam ampas)</a:t>
             </a:r>
           </a:p>
@@ -15680,7 +16112,7 @@
               <a:spcAft>
                 <a:spcPts val="400"/>
               </a:spcAft>
-              <a:defRPr sz="1000">
+              <a:defRPr sz="1300">
                 <a:solidFill>
                   <a:srgbClr val="424242"/>
                 </a:solidFill>
@@ -15693,14 +16125,15 @@
               <a:spcAft>
                 <a:spcPts val="400"/>
               </a:spcAft>
-              <a:defRPr sz="1000">
-                <a:solidFill>
-                  <a:srgbClr val="424242"/>
-                </a:solidFill>
-                <a:latin typeface="Calibri"/>
-              </a:defRPr>
-            </a:pPr>
-            <a:r>
+              <a:defRPr sz="1300">
+                <a:solidFill>
+                  <a:srgbClr val="424242"/>
+                </a:solidFill>
+                <a:latin typeface="Calibri"/>
+              </a:defRPr>
+            </a:pPr>
+            <a:r>
+              <a:rPr/>
               <a:t>OUTPUT:</a:t>
             </a:r>
           </a:p>
@@ -15709,14 +16142,15 @@
               <a:spcAft>
                 <a:spcPts val="400"/>
               </a:spcAft>
-              <a:defRPr sz="1000">
-                <a:solidFill>
-                  <a:srgbClr val="424242"/>
-                </a:solidFill>
-                <a:latin typeface="Calibri"/>
-              </a:defRPr>
-            </a:pPr>
-            <a:r>
+              <a:defRPr sz="1300">
+                <a:solidFill>
+                  <a:srgbClr val="424242"/>
+                </a:solidFill>
+                <a:latin typeface="Calibri"/>
+              </a:defRPr>
+            </a:pPr>
+            <a:r>
+              <a:rPr/>
               <a:t>  → Nira mentah (mixed juice): brix ~12–15%</a:t>
             </a:r>
           </a:p>
@@ -15725,14 +16159,15 @@
               <a:spcAft>
                 <a:spcPts val="400"/>
               </a:spcAft>
-              <a:defRPr sz="1000">
-                <a:solidFill>
-                  <a:srgbClr val="424242"/>
-                </a:solidFill>
-                <a:latin typeface="Calibri"/>
-              </a:defRPr>
-            </a:pPr>
-            <a:r>
+              <a:defRPr sz="1300">
+                <a:solidFill>
+                  <a:srgbClr val="424242"/>
+                </a:solidFill>
+                <a:latin typeface="Calibri"/>
+              </a:defRPr>
+            </a:pPr>
+            <a:r>
+              <a:rPr/>
               <a:t>  → Ampas/Bagasse: kadar air ~50%, jadi bahan bakar boiler</a:t>
             </a:r>
           </a:p>
@@ -15741,7 +16176,7 @@
               <a:spcAft>
                 <a:spcPts val="400"/>
               </a:spcAft>
-              <a:defRPr sz="1000">
+              <a:defRPr sz="1300">
                 <a:solidFill>
                   <a:srgbClr val="424242"/>
                 </a:solidFill>
@@ -15754,14 +16189,15 @@
               <a:spcAft>
                 <a:spcPts val="400"/>
               </a:spcAft>
-              <a:defRPr sz="1000">
-                <a:solidFill>
-                  <a:srgbClr val="424242"/>
-                </a:solidFill>
-                <a:latin typeface="Calibri"/>
-              </a:defRPr>
-            </a:pPr>
-            <a:r>
+              <a:defRPr sz="1300">
+                <a:solidFill>
+                  <a:srgbClr val="424242"/>
+                </a:solidFill>
+                <a:latin typeface="Calibri"/>
+              </a:defRPr>
+            </a:pPr>
+            <a:r>
+              <a:rPr/>
               <a:t>Target: Pol extraction &gt;95%, Moisture bagasse &lt;50%</a:t>
             </a:r>
           </a:p>
@@ -15809,7 +16245,7 @@
           <a:lstStyle/>
           <a:p>
             <a:pPr algn="ctr">
-              <a:defRPr sz="1100" b="1">
+              <a:defRPr sz="1400" b="1">
                 <a:solidFill>
                   <a:srgbClr val="1B5E20"/>
                 </a:solidFill>
@@ -15817,6 +16253,7 @@
               </a:defRPr>
             </a:pPr>
             <a:r>
+              <a:rPr/>
               <a:t>Key Takeaway: Milling adalah jantung pabrik — ekstraksi optimal di sini menentukan recovery pol keseluruhan (target &gt;95%).</a:t>
             </a:r>
           </a:p>
@@ -15871,7 +16308,7 @@
           <a:lstStyle/>
           <a:p>
             <a:pPr algn="l">
-              <a:defRPr sz="2800" b="1">
+              <a:defRPr sz="3000" b="1">
                 <a:solidFill>
                   <a:srgbClr val="1B5E20"/>
                 </a:solidFill>
@@ -15879,6 +16316,7 @@
               </a:defRPr>
             </a:pPr>
             <a:r>
+              <a:rPr/>
               <a:t>Pemrosesan Nira (Clarification)</a:t>
             </a:r>
           </a:p>
@@ -15907,7 +16345,7 @@
           <a:lstStyle/>
           <a:p>
             <a:pPr algn="l">
-              <a:defRPr sz="1300" b="0">
+              <a:defRPr sz="1500" b="0">
                 <a:solidFill>
                   <a:srgbClr val="2E7D32"/>
                 </a:solidFill>
@@ -15915,6 +16353,7 @@
               </a:defRPr>
             </a:pPr>
             <a:r>
+              <a:rPr/>
               <a:t>Stasiun Pemurnian — Membersihkan nira dari pengotor</a:t>
             </a:r>
           </a:p>
@@ -15943,7 +16382,7 @@
           <a:lstStyle/>
           <a:p>
             <a:pPr algn="l">
-              <a:defRPr sz="800" b="0">
+              <a:defRPr sz="1100" b="0">
                 <a:solidFill>
                   <a:srgbClr val="9E9E9E"/>
                 </a:solidFill>
@@ -15951,6 +16390,7 @@
               </a:defRPr>
             </a:pPr>
             <a:r>
+              <a:rPr/>
               <a:t>7 / 21  •  Overview Operasional &amp; Proses Produksi Pabrik Gula  |  Internal Use</a:t>
             </a:r>
           </a:p>
@@ -15998,13 +16438,14 @@
           <a:lstStyle/>
           <a:p>
             <a:pPr algn="ctr">
-              <a:defRPr sz="1000" b="1">
+              <a:defRPr sz="1300" b="1">
                 <a:solidFill>
                   <a:srgbClr val="1B5E20"/>
                 </a:solidFill>
               </a:defRPr>
             </a:pPr>
             <a:r>
+              <a:rPr/>
               <a:t>1. Timbangan Nira</a:t>
             </a:r>
           </a:p>
@@ -16013,13 +16454,14 @@
               <a:spcBef>
                 <a:spcPts val="400"/>
               </a:spcBef>
-              <a:defRPr sz="900">
-                <a:solidFill>
-                  <a:srgbClr val="424242"/>
-                </a:solidFill>
-              </a:defRPr>
-            </a:pPr>
-            <a:r>
+              <a:defRPr sz="1200">
+                <a:solidFill>
+                  <a:srgbClr val="424242"/>
+                </a:solidFill>
+              </a:defRPr>
+            </a:pPr>
+            <a:r>
+              <a:rPr/>
               <a:t>Nira mentah ditimbang untuk kontrol massa</a:t>
             </a:r>
           </a:p>
@@ -16067,13 +16509,14 @@
           <a:lstStyle/>
           <a:p>
             <a:pPr algn="ctr">
-              <a:defRPr sz="1000" b="1">
+              <a:defRPr sz="1300" b="1">
                 <a:solidFill>
                   <a:srgbClr val="1B5E20"/>
                 </a:solidFill>
               </a:defRPr>
             </a:pPr>
             <a:r>
+              <a:rPr/>
               <a:t>2. Pemanasan I</a:t>
             </a:r>
           </a:p>
@@ -16082,13 +16525,14 @@
               <a:spcBef>
                 <a:spcPts val="400"/>
               </a:spcBef>
-              <a:defRPr sz="900">
-                <a:solidFill>
-                  <a:srgbClr val="424242"/>
-                </a:solidFill>
-              </a:defRPr>
-            </a:pPr>
-            <a:r>
+              <a:defRPr sz="1200">
+                <a:solidFill>
+                  <a:srgbClr val="424242"/>
+                </a:solidFill>
+              </a:defRPr>
+            </a:pPr>
+            <a:r>
+              <a:rPr/>
               <a:t>Dipanaskan 70–75°C (juice heater)</a:t>
             </a:r>
           </a:p>
@@ -16136,13 +16580,14 @@
           <a:lstStyle/>
           <a:p>
             <a:pPr algn="ctr">
-              <a:defRPr sz="1000" b="1">
+              <a:defRPr sz="1300" b="1">
                 <a:solidFill>
                   <a:srgbClr val="1B5E20"/>
                 </a:solidFill>
               </a:defRPr>
             </a:pPr>
             <a:r>
+              <a:rPr/>
               <a:t>3. Defekasi</a:t>
             </a:r>
           </a:p>
@@ -16151,13 +16596,14 @@
               <a:spcBef>
                 <a:spcPts val="400"/>
               </a:spcBef>
-              <a:defRPr sz="900">
-                <a:solidFill>
-                  <a:srgbClr val="424242"/>
-                </a:solidFill>
-              </a:defRPr>
-            </a:pPr>
-            <a:r>
+              <a:defRPr sz="1200">
+                <a:solidFill>
+                  <a:srgbClr val="424242"/>
+                </a:solidFill>
+              </a:defRPr>
+            </a:pPr>
+            <a:r>
+              <a:rPr/>
               <a:t>Ditambah susu kapur Ca(OH)₂ → pH naik ~7–8</a:t>
             </a:r>
           </a:p>
@@ -16205,13 +16651,14 @@
           <a:lstStyle/>
           <a:p>
             <a:pPr algn="ctr">
-              <a:defRPr sz="1000" b="1">
+              <a:defRPr sz="1300" b="1">
                 <a:solidFill>
                   <a:srgbClr val="1B5E20"/>
                 </a:solidFill>
               </a:defRPr>
             </a:pPr>
             <a:r>
+              <a:rPr/>
               <a:t>4. Sulfitasi</a:t>
             </a:r>
           </a:p>
@@ -16220,17 +16667,19 @@
               <a:spcBef>
                 <a:spcPts val="400"/>
               </a:spcBef>
-              <a:defRPr sz="900">
-                <a:solidFill>
-                  <a:srgbClr val="424242"/>
-                </a:solidFill>
-              </a:defRPr>
-            </a:pPr>
-            <a:r>
+              <a:defRPr sz="1200">
+                <a:solidFill>
+                  <a:srgbClr val="424242"/>
+                </a:solidFill>
+              </a:defRPr>
+            </a:pPr>
+            <a:r>
+              <a:rPr/>
               <a:t>Ditambah gas SO₂ → pH turun ~6,8–7,2</a:t>
             </a:r>
             <a:br/>
             <a:r>
+              <a:rPr/>
               <a:t>(membantu pemucatan warna)</a:t>
             </a:r>
           </a:p>
@@ -16278,13 +16727,14 @@
           <a:lstStyle/>
           <a:p>
             <a:pPr algn="ctr">
-              <a:defRPr sz="1000" b="1">
+              <a:defRPr sz="1300" b="1">
                 <a:solidFill>
                   <a:srgbClr val="1B5E20"/>
                 </a:solidFill>
               </a:defRPr>
             </a:pPr>
             <a:r>
+              <a:rPr/>
               <a:t>5. Pemanasan II</a:t>
             </a:r>
           </a:p>
@@ -16293,13 +16743,14 @@
               <a:spcBef>
                 <a:spcPts val="400"/>
               </a:spcBef>
-              <a:defRPr sz="900">
-                <a:solidFill>
-                  <a:srgbClr val="424242"/>
-                </a:solidFill>
-              </a:defRPr>
-            </a:pPr>
-            <a:r>
+              <a:defRPr sz="1200">
+                <a:solidFill>
+                  <a:srgbClr val="424242"/>
+                </a:solidFill>
+              </a:defRPr>
+            </a:pPr>
+            <a:r>
+              <a:rPr/>
               <a:t>Dipanaskan 100–105°C</a:t>
             </a:r>
           </a:p>
@@ -16347,13 +16798,14 @@
           <a:lstStyle/>
           <a:p>
             <a:pPr algn="ctr">
-              <a:defRPr sz="1000" b="1">
+              <a:defRPr sz="1300" b="1">
                 <a:solidFill>
                   <a:srgbClr val="1B5E20"/>
                 </a:solidFill>
               </a:defRPr>
             </a:pPr>
             <a:r>
+              <a:rPr/>
               <a:t>6. Flash Tank</a:t>
             </a:r>
           </a:p>
@@ -16362,13 +16814,14 @@
               <a:spcBef>
                 <a:spcPts val="400"/>
               </a:spcBef>
-              <a:defRPr sz="900">
-                <a:solidFill>
-                  <a:srgbClr val="424242"/>
-                </a:solidFill>
-              </a:defRPr>
-            </a:pPr>
-            <a:r>
+              <a:defRPr sz="1200">
+                <a:solidFill>
+                  <a:srgbClr val="424242"/>
+                </a:solidFill>
+              </a:defRPr>
+            </a:pPr>
+            <a:r>
+              <a:rPr/>
               <a:t>Menghilangkan gas terlarut</a:t>
             </a:r>
           </a:p>
@@ -16416,13 +16869,14 @@
           <a:lstStyle/>
           <a:p>
             <a:pPr algn="ctr">
-              <a:defRPr sz="1000" b="1">
+              <a:defRPr sz="1300" b="1">
                 <a:solidFill>
                   <a:srgbClr val="1B5E20"/>
                 </a:solidFill>
               </a:defRPr>
             </a:pPr>
             <a:r>
+              <a:rPr/>
               <a:t>7. Clarifier</a:t>
             </a:r>
           </a:p>
@@ -16431,17 +16885,19 @@
               <a:spcBef>
                 <a:spcPts val="400"/>
               </a:spcBef>
-              <a:defRPr sz="900">
-                <a:solidFill>
-                  <a:srgbClr val="424242"/>
-                </a:solidFill>
-              </a:defRPr>
-            </a:pPr>
-            <a:r>
+              <a:defRPr sz="1200">
+                <a:solidFill>
+                  <a:srgbClr val="424242"/>
+                </a:solidFill>
+              </a:defRPr>
+            </a:pPr>
+            <a:r>
+              <a:rPr/>
               <a:t>Pengendapan kotoran (2–3 jam)</a:t>
             </a:r>
             <a:br/>
             <a:r>
+              <a:rPr/>
               <a:t>Hasil: nira jernih + endapan (mud)</a:t>
             </a:r>
           </a:p>
@@ -16489,13 +16945,14 @@
           <a:lstStyle/>
           <a:p>
             <a:pPr algn="ctr">
-              <a:defRPr sz="1000" b="1">
+              <a:defRPr sz="1300" b="1">
                 <a:solidFill>
                   <a:srgbClr val="1B5E20"/>
                 </a:solidFill>
               </a:defRPr>
             </a:pPr>
             <a:r>
+              <a:rPr/>
               <a:t>8. Rotary Vacuum Filter</a:t>
             </a:r>
           </a:p>
@@ -16504,17 +16961,19 @@
               <a:spcBef>
                 <a:spcPts val="400"/>
               </a:spcBef>
-              <a:defRPr sz="900">
-                <a:solidFill>
-                  <a:srgbClr val="424242"/>
-                </a:solidFill>
-              </a:defRPr>
-            </a:pPr>
-            <a:r>
+              <a:defRPr sz="1200">
+                <a:solidFill>
+                  <a:srgbClr val="424242"/>
+                </a:solidFill>
+              </a:defRPr>
+            </a:pPr>
+            <a:r>
+              <a:rPr/>
               <a:t>Mud disaring → blotong (filter cake)</a:t>
             </a:r>
             <a:br/>
             <a:r>
+              <a:rPr/>
               <a:t>Nira saring kembali ke proses</a:t>
             </a:r>
           </a:p>
@@ -16562,7 +17021,7 @@
           <a:lstStyle/>
           <a:p>
             <a:pPr algn="ctr">
-              <a:defRPr sz="1100" b="1">
+              <a:defRPr sz="1400" b="1">
                 <a:solidFill>
                   <a:srgbClr val="1B5E20"/>
                 </a:solidFill>
@@ -16570,6 +17029,7 @@
               </a:defRPr>
             </a:pPr>
             <a:r>
+              <a:rPr/>
               <a:t>Key Takeaway: Pemurnian menghasilkan nira jernih (clear juice) + blotong sebagai by-product pupuk organik.</a:t>
             </a:r>
           </a:p>
@@ -16624,7 +17084,7 @@
           <a:lstStyle/>
           <a:p>
             <a:pPr algn="l">
-              <a:defRPr sz="2800" b="1">
+              <a:defRPr sz="3000" b="1">
                 <a:solidFill>
                   <a:srgbClr val="1B5E20"/>
                 </a:solidFill>
@@ -16632,6 +17092,7 @@
               </a:defRPr>
             </a:pPr>
             <a:r>
+              <a:rPr/>
               <a:t>Evaporation Process</a:t>
             </a:r>
           </a:p>
@@ -16660,7 +17121,7 @@
           <a:lstStyle/>
           <a:p>
             <a:pPr algn="l">
-              <a:defRPr sz="1300" b="0">
+              <a:defRPr sz="1500" b="0">
                 <a:solidFill>
                   <a:srgbClr val="2E7D32"/>
                 </a:solidFill>
@@ -16668,6 +17129,7 @@
               </a:defRPr>
             </a:pPr>
             <a:r>
+              <a:rPr/>
               <a:t>Stasiun Penguapan — Menaikkan konsentrasi nira</a:t>
             </a:r>
           </a:p>
@@ -16696,7 +17158,7 @@
           <a:lstStyle/>
           <a:p>
             <a:pPr algn="l">
-              <a:defRPr sz="800" b="0">
+              <a:defRPr sz="1100" b="0">
                 <a:solidFill>
                   <a:srgbClr val="9E9E9E"/>
                 </a:solidFill>
@@ -16704,6 +17166,7 @@
               </a:defRPr>
             </a:pPr>
             <a:r>
+              <a:rPr/>
               <a:t>8 / 21  •  Overview Operasional &amp; Proses Produksi Pabrik Gula  |  Internal Use</a:t>
             </a:r>
           </a:p>
@@ -16735,14 +17198,15 @@
               <a:spcAft>
                 <a:spcPts val="400"/>
               </a:spcAft>
-              <a:defRPr sz="1000" b="1">
-                <a:solidFill>
-                  <a:srgbClr val="424242"/>
-                </a:solidFill>
-                <a:latin typeface="Calibri"/>
-              </a:defRPr>
-            </a:pPr>
-            <a:r>
+              <a:defRPr sz="1300" b="1">
+                <a:solidFill>
+                  <a:srgbClr val="424242"/>
+                </a:solidFill>
+                <a:latin typeface="Calibri"/>
+              </a:defRPr>
+            </a:pPr>
+            <a:r>
+              <a:rPr/>
               <a:t>Apa yang terjadi di proses ini?</a:t>
             </a:r>
           </a:p>
@@ -16751,7 +17215,7 @@
               <a:spcAft>
                 <a:spcPts val="400"/>
               </a:spcAft>
-              <a:defRPr sz="1000">
+              <a:defRPr sz="1300">
                 <a:solidFill>
                   <a:srgbClr val="424242"/>
                 </a:solidFill>
@@ -16764,14 +17228,15 @@
               <a:spcAft>
                 <a:spcPts val="400"/>
               </a:spcAft>
-              <a:defRPr sz="1000">
-                <a:solidFill>
-                  <a:srgbClr val="424242"/>
-                </a:solidFill>
-                <a:latin typeface="Calibri"/>
-              </a:defRPr>
-            </a:pPr>
-            <a:r>
+              <a:defRPr sz="1300">
+                <a:solidFill>
+                  <a:srgbClr val="424242"/>
+                </a:solidFill>
+                <a:latin typeface="Calibri"/>
+              </a:defRPr>
+            </a:pPr>
+            <a:r>
+              <a:rPr/>
               <a:t>Nira jernih (brix ~12–15%) diuapkan airnya secara bertahap hingga</a:t>
             </a:r>
           </a:p>
@@ -16780,14 +17245,15 @@
               <a:spcAft>
                 <a:spcPts val="400"/>
               </a:spcAft>
-              <a:defRPr sz="1000">
-                <a:solidFill>
-                  <a:srgbClr val="424242"/>
-                </a:solidFill>
-                <a:latin typeface="Calibri"/>
-              </a:defRPr>
-            </a:pPr>
-            <a:r>
+              <a:defRPr sz="1300">
+                <a:solidFill>
+                  <a:srgbClr val="424242"/>
+                </a:solidFill>
+                <a:latin typeface="Calibri"/>
+              </a:defRPr>
+            </a:pPr>
+            <a:r>
+              <a:rPr/>
               <a:t>menjadi nira kental / thick juice (brix ~60–65%).</a:t>
             </a:r>
           </a:p>
@@ -16796,7 +17262,7 @@
               <a:spcAft>
                 <a:spcPts val="400"/>
               </a:spcAft>
-              <a:defRPr sz="1000">
+              <a:defRPr sz="1300">
                 <a:solidFill>
                   <a:srgbClr val="424242"/>
                 </a:solidFill>
@@ -16809,14 +17275,15 @@
               <a:spcAft>
                 <a:spcPts val="400"/>
               </a:spcAft>
-              <a:defRPr sz="1000">
-                <a:solidFill>
-                  <a:srgbClr val="424242"/>
-                </a:solidFill>
-                <a:latin typeface="Calibri"/>
-              </a:defRPr>
-            </a:pPr>
-            <a:r>
+              <a:defRPr sz="1300">
+                <a:solidFill>
+                  <a:srgbClr val="424242"/>
+                </a:solidFill>
+                <a:latin typeface="Calibri"/>
+              </a:defRPr>
+            </a:pPr>
+            <a:r>
+              <a:rPr/>
               <a:t>Sistem: Multiple Effect Evaporator (biasanya 4–5 badan/effect)</a:t>
             </a:r>
           </a:p>
@@ -16825,7 +17292,7 @@
               <a:spcAft>
                 <a:spcPts val="400"/>
               </a:spcAft>
-              <a:defRPr sz="1000">
+              <a:defRPr sz="1300">
                 <a:solidFill>
                   <a:srgbClr val="424242"/>
                 </a:solidFill>
@@ -16838,14 +17305,15 @@
               <a:spcAft>
                 <a:spcPts val="400"/>
               </a:spcAft>
-              <a:defRPr sz="1000">
-                <a:solidFill>
-                  <a:srgbClr val="424242"/>
-                </a:solidFill>
-                <a:latin typeface="Calibri"/>
-              </a:defRPr>
-            </a:pPr>
-            <a:r>
+              <a:defRPr sz="1300">
+                <a:solidFill>
+                  <a:srgbClr val="424242"/>
+                </a:solidFill>
+                <a:latin typeface="Calibri"/>
+              </a:defRPr>
+            </a:pPr>
+            <a:r>
+              <a:rPr/>
               <a:t>Cara kerja:</a:t>
             </a:r>
           </a:p>
@@ -16854,14 +17322,15 @@
               <a:spcAft>
                 <a:spcPts val="400"/>
               </a:spcAft>
-              <a:defRPr sz="1000">
-                <a:solidFill>
-                  <a:srgbClr val="424242"/>
-                </a:solidFill>
-                <a:latin typeface="Calibri"/>
-              </a:defRPr>
-            </a:pPr>
-            <a:r>
+              <a:defRPr sz="1300">
+                <a:solidFill>
+                  <a:srgbClr val="424242"/>
+                </a:solidFill>
+                <a:latin typeface="Calibri"/>
+              </a:defRPr>
+            </a:pPr>
+            <a:r>
+              <a:rPr/>
               <a:t>• Effect 1: dipanaskan uap bekas turbin (exhaust steam)</a:t>
             </a:r>
           </a:p>
@@ -16870,14 +17339,15 @@
               <a:spcAft>
                 <a:spcPts val="400"/>
               </a:spcAft>
-              <a:defRPr sz="1000">
-                <a:solidFill>
-                  <a:srgbClr val="424242"/>
-                </a:solidFill>
-                <a:latin typeface="Calibri"/>
-              </a:defRPr>
-            </a:pPr>
-            <a:r>
+              <a:defRPr sz="1300">
+                <a:solidFill>
+                  <a:srgbClr val="424242"/>
+                </a:solidFill>
+                <a:latin typeface="Calibri"/>
+              </a:defRPr>
+            </a:pPr>
+            <a:r>
+              <a:rPr/>
               <a:t>• Effect 2–5: uap dari effect sebelumnya dipakai memanaskan effect berikutnya</a:t>
             </a:r>
           </a:p>
@@ -16886,14 +17356,15 @@
               <a:spcAft>
                 <a:spcPts val="400"/>
               </a:spcAft>
-              <a:defRPr sz="1000">
-                <a:solidFill>
-                  <a:srgbClr val="424242"/>
-                </a:solidFill>
-                <a:latin typeface="Calibri"/>
-              </a:defRPr>
-            </a:pPr>
-            <a:r>
+              <a:defRPr sz="1300">
+                <a:solidFill>
+                  <a:srgbClr val="424242"/>
+                </a:solidFill>
+                <a:latin typeface="Calibri"/>
+              </a:defRPr>
+            </a:pPr>
+            <a:r>
+              <a:rPr/>
               <a:t>• Tekanan &amp; suhu makin rendah di setiap effect (vacuum)</a:t>
             </a:r>
           </a:p>
@@ -16902,7 +17373,7 @@
               <a:spcAft>
                 <a:spcPts val="400"/>
               </a:spcAft>
-              <a:defRPr sz="1000">
+              <a:defRPr sz="1300">
                 <a:solidFill>
                   <a:srgbClr val="424242"/>
                 </a:solidFill>
@@ -16915,14 +17386,15 @@
               <a:spcAft>
                 <a:spcPts val="400"/>
               </a:spcAft>
-              <a:defRPr sz="1000">
-                <a:solidFill>
-                  <a:srgbClr val="424242"/>
-                </a:solidFill>
-                <a:latin typeface="Calibri"/>
-              </a:defRPr>
-            </a:pPr>
-            <a:r>
+              <a:defRPr sz="1300">
+                <a:solidFill>
+                  <a:srgbClr val="424242"/>
+                </a:solidFill>
+                <a:latin typeface="Calibri"/>
+              </a:defRPr>
+            </a:pPr>
+            <a:r>
+              <a:rPr/>
               <a:t>Keuntungan sistem multi-effect:</a:t>
             </a:r>
           </a:p>
@@ -16931,14 +17403,15 @@
               <a:spcAft>
                 <a:spcPts val="400"/>
               </a:spcAft>
-              <a:defRPr sz="1000">
-                <a:solidFill>
-                  <a:srgbClr val="424242"/>
-                </a:solidFill>
-                <a:latin typeface="Calibri"/>
-              </a:defRPr>
-            </a:pPr>
-            <a:r>
+              <a:defRPr sz="1300">
+                <a:solidFill>
+                  <a:srgbClr val="424242"/>
+                </a:solidFill>
+                <a:latin typeface="Calibri"/>
+              </a:defRPr>
+            </a:pPr>
+            <a:r>
+              <a:rPr/>
               <a:t>→ Hemat energi: 1 kg uap bisa menguapkan 4–5 kg air</a:t>
             </a:r>
           </a:p>
@@ -16947,14 +17420,15 @@
               <a:spcAft>
                 <a:spcPts val="400"/>
               </a:spcAft>
-              <a:defRPr sz="1000">
-                <a:solidFill>
-                  <a:srgbClr val="424242"/>
-                </a:solidFill>
-                <a:latin typeface="Calibri"/>
-              </a:defRPr>
-            </a:pPr>
-            <a:r>
+              <a:defRPr sz="1300">
+                <a:solidFill>
+                  <a:srgbClr val="424242"/>
+                </a:solidFill>
+                <a:latin typeface="Calibri"/>
+              </a:defRPr>
+            </a:pPr>
+            <a:r>
+              <a:rPr/>
               <a:t>→ Suhu rendah di effect akhir: mencegah kerusakan gula (karamelisasi)</a:t>
             </a:r>
           </a:p>
@@ -17002,135 +17476,146 @@
           <a:lstStyle/>
           <a:p>
             <a:pPr algn="ctr">
-              <a:defRPr sz="1100" b="1">
+              <a:defRPr sz="1400" b="1">
                 <a:solidFill>
                   <a:srgbClr val="1B5E20"/>
                 </a:solidFill>
               </a:defRPr>
             </a:pPr>
             <a:r>
+              <a:rPr/>
               <a:t>Parameter Kunci</a:t>
             </a:r>
           </a:p>
           <a:p>
             <a:br/>
             <a:pPr>
-              <a:defRPr sz="900">
-                <a:solidFill>
-                  <a:srgbClr val="424242"/>
-                </a:solidFill>
-              </a:defRPr>
-            </a:pPr>
-            <a:r>
+              <a:defRPr sz="1200">
+                <a:solidFill>
+                  <a:srgbClr val="424242"/>
+                </a:solidFill>
+              </a:defRPr>
+            </a:pPr>
+            <a:r>
+              <a:rPr/>
               <a:t>Input: Brix 12–15%</a:t>
             </a:r>
           </a:p>
           <a:p>
             <a:pPr>
-              <a:defRPr sz="900">
-                <a:solidFill>
-                  <a:srgbClr val="424242"/>
-                </a:solidFill>
-              </a:defRPr>
-            </a:pPr>
-            <a:r>
+              <a:defRPr sz="1200">
+                <a:solidFill>
+                  <a:srgbClr val="424242"/>
+                </a:solidFill>
+              </a:defRPr>
+            </a:pPr>
+            <a:r>
+              <a:rPr/>
               <a:t>Output: Brix 60–65%</a:t>
             </a:r>
           </a:p>
           <a:p>
             <a:pPr>
-              <a:defRPr sz="900">
-                <a:solidFill>
-                  <a:srgbClr val="424242"/>
-                </a:solidFill>
-              </a:defRPr>
-            </a:pPr>
-            <a:r>
+              <a:defRPr sz="1200">
+                <a:solidFill>
+                  <a:srgbClr val="424242"/>
+                </a:solidFill>
+              </a:defRPr>
+            </a:pPr>
+            <a:r>
+              <a:rPr/>
               <a:t>Jumlah effect: 4–5</a:t>
             </a:r>
           </a:p>
           <a:p>
             <a:pPr>
-              <a:defRPr sz="900">
-                <a:solidFill>
-                  <a:srgbClr val="424242"/>
-                </a:solidFill>
-              </a:defRPr>
-            </a:pPr>
-            <a:r>
+              <a:defRPr sz="1200">
+                <a:solidFill>
+                  <a:srgbClr val="424242"/>
+                </a:solidFill>
+              </a:defRPr>
+            </a:pPr>
+            <a:r>
+              <a:rPr/>
               <a:t>Tekanan: vacuum</a:t>
             </a:r>
           </a:p>
           <a:p>
             <a:pPr>
-              <a:defRPr sz="900">
-                <a:solidFill>
-                  <a:srgbClr val="424242"/>
-                </a:solidFill>
-              </a:defRPr>
-            </a:pPr>
-            <a:r>
+              <a:defRPr sz="1200">
+                <a:solidFill>
+                  <a:srgbClr val="424242"/>
+                </a:solidFill>
+              </a:defRPr>
+            </a:pPr>
+            <a:r>
+              <a:rPr/>
               <a:t>Suhu effect akhir: ~55°C</a:t>
             </a:r>
           </a:p>
           <a:p>
             <a:br/>
             <a:pPr>
-              <a:defRPr sz="900">
-                <a:solidFill>
-                  <a:srgbClr val="424242"/>
-                </a:solidFill>
-              </a:defRPr>
-            </a:pPr>
-            <a:r>
+              <a:defRPr sz="1200">
+                <a:solidFill>
+                  <a:srgbClr val="424242"/>
+                </a:solidFill>
+              </a:defRPr>
+            </a:pPr>
+            <a:r>
+              <a:rPr/>
               <a:t>Kontrol:</a:t>
             </a:r>
           </a:p>
           <a:p>
             <a:pPr>
-              <a:defRPr sz="900">
-                <a:solidFill>
-                  <a:srgbClr val="424242"/>
-                </a:solidFill>
-              </a:defRPr>
-            </a:pPr>
-            <a:r>
+              <a:defRPr sz="1200">
+                <a:solidFill>
+                  <a:srgbClr val="424242"/>
+                </a:solidFill>
+              </a:defRPr>
+            </a:pPr>
+            <a:r>
+              <a:rPr/>
               <a:t>• Brix nira kental</a:t>
             </a:r>
           </a:p>
           <a:p>
             <a:pPr>
-              <a:defRPr sz="900">
-                <a:solidFill>
-                  <a:srgbClr val="424242"/>
-                </a:solidFill>
-              </a:defRPr>
-            </a:pPr>
-            <a:r>
+              <a:defRPr sz="1200">
+                <a:solidFill>
+                  <a:srgbClr val="424242"/>
+                </a:solidFill>
+              </a:defRPr>
+            </a:pPr>
+            <a:r>
+              <a:rPr/>
               <a:t>• Suhu tiap effect</a:t>
             </a:r>
           </a:p>
           <a:p>
             <a:pPr>
-              <a:defRPr sz="900">
-                <a:solidFill>
-                  <a:srgbClr val="424242"/>
-                </a:solidFill>
-              </a:defRPr>
-            </a:pPr>
-            <a:r>
+              <a:defRPr sz="1200">
+                <a:solidFill>
+                  <a:srgbClr val="424242"/>
+                </a:solidFill>
+              </a:defRPr>
+            </a:pPr>
+            <a:r>
+              <a:rPr/>
               <a:t>• Vacuum pressure</a:t>
             </a:r>
           </a:p>
           <a:p>
             <a:pPr>
-              <a:defRPr sz="900">
-                <a:solidFill>
-                  <a:srgbClr val="424242"/>
-                </a:solidFill>
-              </a:defRPr>
-            </a:pPr>
-            <a:r>
+              <a:defRPr sz="1200">
+                <a:solidFill>
+                  <a:srgbClr val="424242"/>
+                </a:solidFill>
+              </a:defRPr>
+            </a:pPr>
+            <a:r>
+              <a:rPr/>
               <a:t>• Scaling (kerak)</a:t>
             </a:r>
           </a:p>
@@ -17178,7 +17663,7 @@
           <a:lstStyle/>
           <a:p>
             <a:pPr algn="ctr">
-              <a:defRPr sz="1100" b="1">
+              <a:defRPr sz="1400" b="1">
                 <a:solidFill>
                   <a:srgbClr val="1B5E20"/>
                 </a:solidFill>
@@ -17186,6 +17671,7 @@
               </a:defRPr>
             </a:pPr>
             <a:r>
+              <a:rPr/>
               <a:t>Key Takeaway: Evaporasi menghilangkan ~80% air dari nira. Efisiensi energi di sini sangat krusial untuk biaya produksi.</a:t>
             </a:r>
           </a:p>
@@ -17240,7 +17726,7 @@
           <a:lstStyle/>
           <a:p>
             <a:pPr algn="l">
-              <a:defRPr sz="2800" b="1">
+              <a:defRPr sz="3000" b="1">
                 <a:solidFill>
                   <a:srgbClr val="1B5E20"/>
                 </a:solidFill>
@@ -17248,6 +17734,7 @@
               </a:defRPr>
             </a:pPr>
             <a:r>
+              <a:rPr/>
               <a:t>Crystallization Process</a:t>
             </a:r>
           </a:p>
@@ -17276,7 +17763,7 @@
           <a:lstStyle/>
           <a:p>
             <a:pPr algn="l">
-              <a:defRPr sz="1300" b="0">
+              <a:defRPr sz="1500" b="0">
                 <a:solidFill>
                   <a:srgbClr val="2E7D32"/>
                 </a:solidFill>
@@ -17284,6 +17771,7 @@
               </a:defRPr>
             </a:pPr>
             <a:r>
+              <a:rPr/>
               <a:t>Stasiun Masakan — Pembentukan kristal gula</a:t>
             </a:r>
           </a:p>
@@ -17312,7 +17800,7 @@
           <a:lstStyle/>
           <a:p>
             <a:pPr algn="l">
-              <a:defRPr sz="800" b="0">
+              <a:defRPr sz="1100" b="0">
                 <a:solidFill>
                   <a:srgbClr val="9E9E9E"/>
                 </a:solidFill>
@@ -17320,6 +17808,7 @@
               </a:defRPr>
             </a:pPr>
             <a:r>
+              <a:rPr/>
               <a:t>9 / 21  •  Overview Operasional &amp; Proses Produksi Pabrik Gula  |  Internal Use</a:t>
             </a:r>
           </a:p>
@@ -17351,14 +17840,15 @@
               <a:spcAft>
                 <a:spcPts val="400"/>
               </a:spcAft>
-              <a:defRPr sz="1000" b="1">
-                <a:solidFill>
-                  <a:srgbClr val="424242"/>
-                </a:solidFill>
-                <a:latin typeface="Calibri"/>
-              </a:defRPr>
-            </a:pPr>
-            <a:r>
+              <a:defRPr sz="1300" b="1">
+                <a:solidFill>
+                  <a:srgbClr val="424242"/>
+                </a:solidFill>
+                <a:latin typeface="Calibri"/>
+              </a:defRPr>
+            </a:pPr>
+            <a:r>
+              <a:rPr/>
               <a:t>Apa yang terjadi di proses ini?</a:t>
             </a:r>
           </a:p>
@@ -17367,7 +17857,7 @@
               <a:spcAft>
                 <a:spcPts val="400"/>
               </a:spcAft>
-              <a:defRPr sz="1000">
+              <a:defRPr sz="1300">
                 <a:solidFill>
                   <a:srgbClr val="424242"/>
                 </a:solidFill>
@@ -17380,14 +17870,15 @@
               <a:spcAft>
                 <a:spcPts val="400"/>
               </a:spcAft>
-              <a:defRPr sz="1000">
-                <a:solidFill>
-                  <a:srgbClr val="424242"/>
-                </a:solidFill>
-                <a:latin typeface="Calibri"/>
-              </a:defRPr>
-            </a:pPr>
-            <a:r>
+              <a:defRPr sz="1300">
+                <a:solidFill>
+                  <a:srgbClr val="424242"/>
+                </a:solidFill>
+                <a:latin typeface="Calibri"/>
+              </a:defRPr>
+            </a:pPr>
+            <a:r>
+              <a:rPr/>
               <a:t>Nira kental (thick juice) dimasak dalam vacuum pan pada suhu rendah</a:t>
             </a:r>
           </a:p>
@@ -17396,14 +17887,15 @@
               <a:spcAft>
                 <a:spcPts val="400"/>
               </a:spcAft>
-              <a:defRPr sz="1000">
-                <a:solidFill>
-                  <a:srgbClr val="424242"/>
-                </a:solidFill>
-                <a:latin typeface="Calibri"/>
-              </a:defRPr>
-            </a:pPr>
-            <a:r>
+              <a:defRPr sz="1300">
+                <a:solidFill>
+                  <a:srgbClr val="424242"/>
+                </a:solidFill>
+                <a:latin typeface="Calibri"/>
+              </a:defRPr>
+            </a:pPr>
+            <a:r>
+              <a:rPr/>
               <a:t>dan tekanan vakum hingga terbentuk kristal gula (massecuite).</a:t>
             </a:r>
           </a:p>
@@ -17412,7 +17904,7 @@
               <a:spcAft>
                 <a:spcPts val="400"/>
               </a:spcAft>
-              <a:defRPr sz="1000">
+              <a:defRPr sz="1300">
                 <a:solidFill>
                   <a:srgbClr val="424242"/>
                 </a:solidFill>
@@ -17425,14 +17917,15 @@
               <a:spcAft>
                 <a:spcPts val="400"/>
               </a:spcAft>
-              <a:defRPr sz="1000">
-                <a:solidFill>
-                  <a:srgbClr val="424242"/>
-                </a:solidFill>
-                <a:latin typeface="Calibri"/>
-              </a:defRPr>
-            </a:pPr>
-            <a:r>
+              <a:defRPr sz="1300">
+                <a:solidFill>
+                  <a:srgbClr val="424242"/>
+                </a:solidFill>
+                <a:latin typeface="Calibri"/>
+              </a:defRPr>
+            </a:pPr>
+            <a:r>
+              <a:rPr/>
               <a:t>Tahapan Masakan (3-Boiling System):</a:t>
             </a:r>
           </a:p>
@@ -17441,7 +17934,7 @@
               <a:spcAft>
                 <a:spcPts val="400"/>
               </a:spcAft>
-              <a:defRPr sz="1000">
+              <a:defRPr sz="1300">
                 <a:solidFill>
                   <a:srgbClr val="424242"/>
                 </a:solidFill>
@@ -17454,14 +17947,15 @@
               <a:spcAft>
                 <a:spcPts val="400"/>
               </a:spcAft>
-              <a:defRPr sz="1000">
-                <a:solidFill>
-                  <a:srgbClr val="424242"/>
-                </a:solidFill>
-                <a:latin typeface="Calibri"/>
-              </a:defRPr>
-            </a:pPr>
-            <a:r>
+              <a:defRPr sz="1300">
+                <a:solidFill>
+                  <a:srgbClr val="424242"/>
+                </a:solidFill>
+                <a:latin typeface="Calibri"/>
+              </a:defRPr>
+            </a:pPr>
+            <a:r>
+              <a:rPr/>
               <a:t>• Masakan A (1st boiling):</a:t>
             </a:r>
           </a:p>
@@ -17470,14 +17964,15 @@
               <a:spcAft>
                 <a:spcPts val="400"/>
               </a:spcAft>
-              <a:defRPr sz="1000">
-                <a:solidFill>
-                  <a:srgbClr val="424242"/>
-                </a:solidFill>
-                <a:latin typeface="Calibri"/>
-              </a:defRPr>
-            </a:pPr>
-            <a:r>
+              <a:defRPr sz="1300">
+                <a:solidFill>
+                  <a:srgbClr val="424242"/>
+                </a:solidFill>
+                <a:latin typeface="Calibri"/>
+              </a:defRPr>
+            </a:pPr>
+            <a:r>
+              <a:rPr/>
               <a:t>  - Nira kental + bibit kristal → kristal besar (gula produk SHS)</a:t>
             </a:r>
           </a:p>
@@ -17486,14 +17981,15 @@
               <a:spcAft>
                 <a:spcPts val="400"/>
               </a:spcAft>
-              <a:defRPr sz="1000">
-                <a:solidFill>
-                  <a:srgbClr val="424242"/>
-                </a:solidFill>
-                <a:latin typeface="Calibri"/>
-              </a:defRPr>
-            </a:pPr>
-            <a:r>
+              <a:defRPr sz="1300">
+                <a:solidFill>
+                  <a:srgbClr val="424242"/>
+                </a:solidFill>
+                <a:latin typeface="Calibri"/>
+              </a:defRPr>
+            </a:pPr>
+            <a:r>
+              <a:rPr/>
               <a:t>  - Hasil: Massecuite A → centrifuge → Gula A + Molasses A</a:t>
             </a:r>
           </a:p>
@@ -17502,7 +17998,7 @@
               <a:spcAft>
                 <a:spcPts val="400"/>
               </a:spcAft>
-              <a:defRPr sz="1000">
+              <a:defRPr sz="1300">
                 <a:solidFill>
                   <a:srgbClr val="424242"/>
                 </a:solidFill>
@@ -17515,14 +18011,15 @@
               <a:spcAft>
                 <a:spcPts val="400"/>
               </a:spcAft>
-              <a:defRPr sz="1000">
-                <a:solidFill>
-                  <a:srgbClr val="424242"/>
-                </a:solidFill>
-                <a:latin typeface="Calibri"/>
-              </a:defRPr>
-            </a:pPr>
-            <a:r>
+              <a:defRPr sz="1300">
+                <a:solidFill>
+                  <a:srgbClr val="424242"/>
+                </a:solidFill>
+                <a:latin typeface="Calibri"/>
+              </a:defRPr>
+            </a:pPr>
+            <a:r>
+              <a:rPr/>
               <a:t>• Masakan B (2nd boiling):</a:t>
             </a:r>
           </a:p>
@@ -17531,14 +18028,15 @@
               <a:spcAft>
                 <a:spcPts val="400"/>
               </a:spcAft>
-              <a:defRPr sz="1000">
-                <a:solidFill>
-                  <a:srgbClr val="424242"/>
-                </a:solidFill>
-                <a:latin typeface="Calibri"/>
-              </a:defRPr>
-            </a:pPr>
-            <a:r>
+              <a:defRPr sz="1300">
+                <a:solidFill>
+                  <a:srgbClr val="424242"/>
+                </a:solidFill>
+                <a:latin typeface="Calibri"/>
+              </a:defRPr>
+            </a:pPr>
+            <a:r>
+              <a:rPr/>
               <a:t>  - Molasses A dimasak ulang → kristal sedang</a:t>
             </a:r>
           </a:p>
@@ -17547,14 +18045,15 @@
               <a:spcAft>
                 <a:spcPts val="400"/>
               </a:spcAft>
-              <a:defRPr sz="1000">
-                <a:solidFill>
-                  <a:srgbClr val="424242"/>
-                </a:solidFill>
-                <a:latin typeface="Calibri"/>
-              </a:defRPr>
-            </a:pPr>
-            <a:r>
+              <a:defRPr sz="1300">
+                <a:solidFill>
+                  <a:srgbClr val="424242"/>
+                </a:solidFill>
+                <a:latin typeface="Calibri"/>
+              </a:defRPr>
+            </a:pPr>
+            <a:r>
+              <a:rPr/>
               <a:t>  - Hasil: Gula B (dilebur, kembali ke masakan A)</a:t>
             </a:r>
           </a:p>
@@ -17563,7 +18062,7 @@
               <a:spcAft>
                 <a:spcPts val="400"/>
               </a:spcAft>
-              <a:defRPr sz="1000">
+              <a:defRPr sz="1300">
                 <a:solidFill>
                   <a:srgbClr val="424242"/>
                 </a:solidFill>
@@ -17576,14 +18075,15 @@
               <a:spcAft>
                 <a:spcPts val="400"/>
               </a:spcAft>
-              <a:defRPr sz="1000">
-                <a:solidFill>
-                  <a:srgbClr val="424242"/>
-                </a:solidFill>
-                <a:latin typeface="Calibri"/>
-              </a:defRPr>
-            </a:pPr>
-            <a:r>
+              <a:defRPr sz="1300">
+                <a:solidFill>
+                  <a:srgbClr val="424242"/>
+                </a:solidFill>
+                <a:latin typeface="Calibri"/>
+              </a:defRPr>
+            </a:pPr>
+            <a:r>
+              <a:rPr/>
               <a:t>• Masakan C/D (3rd boiling):</a:t>
             </a:r>
           </a:p>
@@ -17592,14 +18092,15 @@
               <a:spcAft>
                 <a:spcPts val="400"/>
               </a:spcAft>
-              <a:defRPr sz="1000">
-                <a:solidFill>
-                  <a:srgbClr val="424242"/>
-                </a:solidFill>
-                <a:latin typeface="Calibri"/>
-              </a:defRPr>
-            </a:pPr>
-            <a:r>
+              <a:defRPr sz="1300">
+                <a:solidFill>
+                  <a:srgbClr val="424242"/>
+                </a:solidFill>
+                <a:latin typeface="Calibri"/>
+              </a:defRPr>
+            </a:pPr>
+            <a:r>
+              <a:rPr/>
               <a:t>  - Molasses B dimasak → kristal kecil (bibit/seed)</a:t>
             </a:r>
           </a:p>
@@ -17608,14 +18109,15 @@
               <a:spcAft>
                 <a:spcPts val="400"/>
               </a:spcAft>
-              <a:defRPr sz="1000">
-                <a:solidFill>
-                  <a:srgbClr val="424242"/>
-                </a:solidFill>
-                <a:latin typeface="Calibri"/>
-              </a:defRPr>
-            </a:pPr>
-            <a:r>
+              <a:defRPr sz="1300">
+                <a:solidFill>
+                  <a:srgbClr val="424242"/>
+                </a:solidFill>
+                <a:latin typeface="Calibri"/>
+              </a:defRPr>
+            </a:pPr>
+            <a:r>
+              <a:rPr/>
               <a:t>  - Hasil: Gula C/D (bibit) + Final Molasses (tetes akhir)</a:t>
             </a:r>
           </a:p>
@@ -17624,7 +18126,7 @@
               <a:spcAft>
                 <a:spcPts val="400"/>
               </a:spcAft>
-              <a:defRPr sz="1000">
+              <a:defRPr sz="1300">
                 <a:solidFill>
                   <a:srgbClr val="424242"/>
                 </a:solidFill>
@@ -17637,14 +18139,15 @@
               <a:spcAft>
                 <a:spcPts val="400"/>
               </a:spcAft>
-              <a:defRPr sz="1000">
-                <a:solidFill>
-                  <a:srgbClr val="424242"/>
-                </a:solidFill>
-                <a:latin typeface="Calibri"/>
-              </a:defRPr>
-            </a:pPr>
-            <a:r>
+              <a:defRPr sz="1300">
+                <a:solidFill>
+                  <a:srgbClr val="424242"/>
+                </a:solidFill>
+                <a:latin typeface="Calibri"/>
+              </a:defRPr>
+            </a:pPr>
+            <a:r>
+              <a:rPr/>
               <a:t>Parameter kritis:</a:t>
             </a:r>
           </a:p>
@@ -17653,14 +18156,15 @@
               <a:spcAft>
                 <a:spcPts val="400"/>
               </a:spcAft>
-              <a:defRPr sz="1000">
-                <a:solidFill>
-                  <a:srgbClr val="424242"/>
-                </a:solidFill>
-                <a:latin typeface="Calibri"/>
-              </a:defRPr>
-            </a:pPr>
-            <a:r>
+              <a:defRPr sz="1300">
+                <a:solidFill>
+                  <a:srgbClr val="424242"/>
+                </a:solidFill>
+                <a:latin typeface="Calibri"/>
+              </a:defRPr>
+            </a:pPr>
+            <a:r>
+              <a:rPr/>
               <a:t>• Suhu masakan: 65–75°C (di bawah vakum)</a:t>
             </a:r>
           </a:p>
@@ -17669,14 +18173,15 @@
               <a:spcAft>
                 <a:spcPts val="400"/>
               </a:spcAft>
-              <a:defRPr sz="1000">
-                <a:solidFill>
-                  <a:srgbClr val="424242"/>
-                </a:solidFill>
-                <a:latin typeface="Calibri"/>
-              </a:defRPr>
-            </a:pPr>
-            <a:r>
+              <a:defRPr sz="1300">
+                <a:solidFill>
+                  <a:srgbClr val="424242"/>
+                </a:solidFill>
+                <a:latin typeface="Calibri"/>
+              </a:defRPr>
+            </a:pPr>
+            <a:r>
+              <a:rPr/>
               <a:t>• Supersaturasi: dijaga ~1,1–1,2</a:t>
             </a:r>
           </a:p>
@@ -17685,14 +18190,15 @@
               <a:spcAft>
                 <a:spcPts val="400"/>
               </a:spcAft>
-              <a:defRPr sz="1000">
-                <a:solidFill>
-                  <a:srgbClr val="424242"/>
-                </a:solidFill>
-                <a:latin typeface="Calibri"/>
-              </a:defRPr>
-            </a:pPr>
-            <a:r>
+              <a:defRPr sz="1300">
+                <a:solidFill>
+                  <a:srgbClr val="424242"/>
+                </a:solidFill>
+                <a:latin typeface="Calibri"/>
+              </a:defRPr>
+            </a:pPr>
+            <a:r>
+              <a:rPr/>
               <a:t>• Ukuran kristal: 0,8–1,1 mm untuk gula SHS</a:t>
             </a:r>
           </a:p>
@@ -17740,74 +18246,80 @@
           <a:lstStyle/>
           <a:p>
             <a:pPr algn="ctr">
-              <a:defRPr sz="1000" b="1">
+              <a:defRPr sz="1300" b="1">
                 <a:solidFill>
                   <a:srgbClr val="6D4C41"/>
                 </a:solidFill>
               </a:defRPr>
             </a:pPr>
             <a:r>
+              <a:rPr/>
               <a:t>Istilah Penting</a:t>
             </a:r>
           </a:p>
           <a:p>
             <a:br/>
             <a:pPr>
-              <a:defRPr sz="900">
-                <a:solidFill>
-                  <a:srgbClr val="424242"/>
-                </a:solidFill>
-              </a:defRPr>
-            </a:pPr>
-            <a:r>
+              <a:defRPr sz="1200">
+                <a:solidFill>
+                  <a:srgbClr val="424242"/>
+                </a:solidFill>
+              </a:defRPr>
+            </a:pPr>
+            <a:r>
+              <a:rPr/>
               <a:t>Massecuite = campuran kristal + larutan induk</a:t>
             </a:r>
           </a:p>
           <a:p>
             <a:pPr>
-              <a:defRPr sz="900">
-                <a:solidFill>
-                  <a:srgbClr val="424242"/>
-                </a:solidFill>
-              </a:defRPr>
-            </a:pPr>
-            <a:r>
+              <a:defRPr sz="1200">
+                <a:solidFill>
+                  <a:srgbClr val="424242"/>
+                </a:solidFill>
+              </a:defRPr>
+            </a:pPr>
+            <a:r>
+              <a:rPr/>
               <a:t>Vacuum Pan = bejana masak bertekanan vakum</a:t>
             </a:r>
           </a:p>
           <a:p>
             <a:pPr>
-              <a:defRPr sz="900">
-                <a:solidFill>
-                  <a:srgbClr val="424242"/>
-                </a:solidFill>
-              </a:defRPr>
-            </a:pPr>
-            <a:r>
+              <a:defRPr sz="1200">
+                <a:solidFill>
+                  <a:srgbClr val="424242"/>
+                </a:solidFill>
+              </a:defRPr>
+            </a:pPr>
+            <a:r>
+              <a:rPr/>
               <a:t>Seed/Bibit = kristal kecil pemicu pertumbuhan</a:t>
             </a:r>
           </a:p>
           <a:p>
             <a:pPr>
-              <a:defRPr sz="900">
-                <a:solidFill>
-                  <a:srgbClr val="424242"/>
-                </a:solidFill>
-              </a:defRPr>
-            </a:pPr>
-            <a:r>
+              <a:defRPr sz="1200">
+                <a:solidFill>
+                  <a:srgbClr val="424242"/>
+                </a:solidFill>
+              </a:defRPr>
+            </a:pPr>
+            <a:r>
+              <a:rPr/>
               <a:t>Molasses = tetes, sisa cair setelah kristalisasi</a:t>
             </a:r>
           </a:p>
           <a:p>
             <a:pPr>
-              <a:defRPr sz="900">
-                <a:solidFill>
-                  <a:srgbClr val="424242"/>
-                </a:solidFill>
-              </a:defRPr>
-            </a:pPr>
-            <a:r>
+              <a:defRPr sz="1200">
+                <a:solidFill>
+                  <a:srgbClr val="424242"/>
+                </a:solidFill>
+              </a:defRPr>
+            </a:pPr>
+            <a:r>
+              <a:rPr/>
               <a:t>SHS = Superior High Sugar (pol ≥99,3%)</a:t>
             </a:r>
           </a:p>
@@ -17855,7 +18367,7 @@
           <a:lstStyle/>
           <a:p>
             <a:pPr algn="ctr">
-              <a:defRPr sz="1100" b="1">
+              <a:defRPr sz="1400" b="1">
                 <a:solidFill>
                   <a:srgbClr val="1B5E20"/>
                 </a:solidFill>
@@ -17863,6 +18375,7 @@
               </a:defRPr>
             </a:pPr>
             <a:r>
+              <a:rPr/>
               <a:t>Key Takeaway: Kristalisasi menentukan ukuran &amp; kemurnian gula akhir. Kontrol supersaturasi sangat krusial.</a:t>
             </a:r>
           </a:p>
